--- a/NeuralOperator.pptx
+++ b/NeuralOperator.pptx
@@ -5,10 +5,10 @@
     <p:sldMasterId id="2147483671" r:id="rId1"/>
   </p:sldMasterIdLst>
   <p:notesMasterIdLst>
-    <p:notesMasterId r:id="rId9"/>
+    <p:notesMasterId r:id="rId10"/>
   </p:notesMasterIdLst>
   <p:handoutMasterIdLst>
-    <p:handoutMasterId r:id="rId10"/>
+    <p:handoutMasterId r:id="rId11"/>
   </p:handoutMasterIdLst>
   <p:sldIdLst>
     <p:sldId id="305" r:id="rId2"/>
@@ -17,7 +17,8 @@
     <p:sldId id="374" r:id="rId5"/>
     <p:sldId id="373" r:id="rId6"/>
     <p:sldId id="375" r:id="rId7"/>
-    <p:sldId id="355" r:id="rId8"/>
+    <p:sldId id="376" r:id="rId8"/>
+    <p:sldId id="355" r:id="rId9"/>
   </p:sldIdLst>
   <p:sldSz cx="9144000" cy="6858000" type="screen4x3"/>
   <p:notesSz cx="6805613" cy="9944100"/>
@@ -157,6 +158,7 @@
             <p14:sldId id="374"/>
             <p14:sldId id="373"/>
             <p14:sldId id="375"/>
+            <p14:sldId id="376"/>
             <p14:sldId id="355"/>
           </p14:sldIdLst>
         </p14:section>
@@ -330,7 +332,7 @@
               <a:pPr>
                 <a:defRPr/>
               </a:pPr>
-              <a:t>09.02.2025</a:t>
+              <a:t>28.02.2025</a:t>
             </a:fld>
             <a:endParaRPr lang="de-DE"/>
           </a:p>
@@ -538,7 +540,7 @@
               <a:pPr>
                 <a:defRPr/>
               </a:pPr>
-              <a:t>09.02.2025</a:t>
+              <a:t>28.02.2025</a:t>
             </a:fld>
             <a:endParaRPr lang="de-DE" dirty="0"/>
           </a:p>
@@ -934,7 +936,241 @@
           <a:bodyPr/>
           <a:lstStyle/>
           <a:p>
-            <a:endParaRPr lang="de-DE"/>
+            <a:r>
+              <a:rPr lang="de-DE" dirty="0" err="1"/>
+              <a:t>Neural</a:t>
+            </a:r>
+            <a:r>
+              <a:rPr lang="de-DE" dirty="0"/>
+              <a:t> Operators </a:t>
+            </a:r>
+            <a:r>
+              <a:rPr lang="de-DE" dirty="0" err="1"/>
+              <a:t>are</a:t>
+            </a:r>
+            <a:r>
+              <a:rPr lang="de-DE" dirty="0"/>
+              <a:t> </a:t>
+            </a:r>
+            <a:r>
+              <a:rPr lang="de-DE" dirty="0" err="1"/>
+              <a:t>the</a:t>
+            </a:r>
+            <a:r>
+              <a:rPr lang="de-DE" dirty="0"/>
+              <a:t> </a:t>
+            </a:r>
+            <a:r>
+              <a:rPr lang="de-DE" dirty="0" err="1"/>
+              <a:t>concept</a:t>
+            </a:r>
+            <a:r>
+              <a:rPr lang="de-DE" dirty="0"/>
+              <a:t> </a:t>
+            </a:r>
+            <a:r>
+              <a:rPr lang="de-DE" dirty="0" err="1"/>
+              <a:t>for</a:t>
+            </a:r>
+            <a:r>
+              <a:rPr lang="de-DE" dirty="0"/>
+              <a:t> all </a:t>
+            </a:r>
+            <a:r>
+              <a:rPr lang="de-DE" dirty="0" err="1"/>
+              <a:t>neural</a:t>
+            </a:r>
+            <a:r>
+              <a:rPr lang="de-DE" dirty="0"/>
+              <a:t> </a:t>
+            </a:r>
+            <a:r>
+              <a:rPr lang="de-DE" dirty="0" err="1"/>
+              <a:t>networks</a:t>
+            </a:r>
+            <a:r>
+              <a:rPr lang="de-DE" dirty="0"/>
+              <a:t> </a:t>
+            </a:r>
+            <a:r>
+              <a:rPr lang="de-DE" dirty="0" err="1"/>
+              <a:t>which</a:t>
+            </a:r>
+            <a:r>
+              <a:rPr lang="de-DE" dirty="0"/>
+              <a:t> </a:t>
+            </a:r>
+            <a:r>
+              <a:rPr lang="de-DE" dirty="0" err="1"/>
+              <a:t>satisfy</a:t>
+            </a:r>
+            <a:r>
+              <a:rPr lang="de-DE" dirty="0"/>
+              <a:t> </a:t>
+            </a:r>
+            <a:r>
+              <a:rPr lang="de-DE" dirty="0" err="1"/>
+              <a:t>some</a:t>
+            </a:r>
+            <a:r>
+              <a:rPr lang="de-DE" dirty="0"/>
+              <a:t> </a:t>
+            </a:r>
+            <a:r>
+              <a:rPr lang="de-DE" dirty="0" err="1"/>
+              <a:t>criteria</a:t>
+            </a:r>
+            <a:r>
+              <a:rPr lang="de-DE" dirty="0"/>
+              <a:t> </a:t>
+            </a:r>
+            <a:r>
+              <a:rPr lang="de-DE" dirty="0" err="1"/>
+              <a:t>for</a:t>
+            </a:r>
+            <a:r>
+              <a:rPr lang="de-DE" dirty="0"/>
+              <a:t> </a:t>
+            </a:r>
+            <a:r>
+              <a:rPr lang="de-DE" dirty="0" err="1"/>
+              <a:t>mappings</a:t>
+            </a:r>
+            <a:r>
+              <a:rPr lang="de-DE" dirty="0"/>
+              <a:t> </a:t>
+            </a:r>
+            <a:r>
+              <a:rPr lang="de-DE" dirty="0" err="1"/>
+              <a:t>between</a:t>
+            </a:r>
+            <a:r>
+              <a:rPr lang="de-DE" dirty="0"/>
+              <a:t> infinite dimensional </a:t>
+            </a:r>
+            <a:r>
+              <a:rPr lang="de-DE" dirty="0" err="1"/>
+              <a:t>functionspace</a:t>
+            </a:r>
+            <a:r>
+              <a:rPr lang="de-DE" dirty="0"/>
+              <a:t> </a:t>
+            </a:r>
+          </a:p>
+          <a:p>
+            <a:r>
+              <a:rPr lang="de-DE" dirty="0"/>
+              <a:t>First </a:t>
+            </a:r>
+            <a:r>
+              <a:rPr lang="de-DE" dirty="0" err="1"/>
+              <a:t>disect</a:t>
+            </a:r>
+            <a:r>
+              <a:rPr lang="de-DE" dirty="0"/>
+              <a:t> </a:t>
+            </a:r>
+            <a:r>
+              <a:rPr lang="de-DE" dirty="0" err="1"/>
+              <a:t>what</a:t>
+            </a:r>
+            <a:r>
+              <a:rPr lang="de-DE" dirty="0"/>
+              <a:t> </a:t>
+            </a:r>
+            <a:r>
+              <a:rPr lang="de-DE" dirty="0" err="1"/>
+              <a:t>Neural</a:t>
+            </a:r>
+            <a:r>
+              <a:rPr lang="de-DE" dirty="0"/>
+              <a:t> </a:t>
+            </a:r>
+            <a:r>
+              <a:rPr lang="de-DE" dirty="0" err="1"/>
+              <a:t>operators</a:t>
+            </a:r>
+            <a:r>
+              <a:rPr lang="de-DE" dirty="0"/>
+              <a:t> do</a:t>
+            </a:r>
+          </a:p>
+          <a:p>
+            <a:r>
+              <a:rPr lang="de-DE" dirty="0"/>
+              <a:t>Next </a:t>
+            </a:r>
+            <a:r>
+              <a:rPr lang="de-DE" dirty="0" err="1"/>
+              <a:t>layout</a:t>
+            </a:r>
+            <a:r>
+              <a:rPr lang="de-DE" dirty="0"/>
+              <a:t> </a:t>
+            </a:r>
+            <a:r>
+              <a:rPr lang="de-DE" dirty="0" err="1"/>
+              <a:t>the</a:t>
+            </a:r>
+            <a:r>
+              <a:rPr lang="de-DE" dirty="0"/>
+              <a:t> </a:t>
+            </a:r>
+            <a:r>
+              <a:rPr lang="de-DE" dirty="0" err="1"/>
+              <a:t>structure</a:t>
+            </a:r>
+            <a:r>
+              <a:rPr lang="de-DE" dirty="0"/>
+              <a:t> </a:t>
+            </a:r>
+            <a:r>
+              <a:rPr lang="de-DE" dirty="0" err="1"/>
+              <a:t>of</a:t>
+            </a:r>
+            <a:r>
+              <a:rPr lang="de-DE" dirty="0"/>
+              <a:t> </a:t>
+            </a:r>
+            <a:r>
+              <a:rPr lang="de-DE" dirty="0" err="1"/>
+              <a:t>Neural</a:t>
+            </a:r>
+            <a:r>
+              <a:rPr lang="de-DE" dirty="0"/>
+              <a:t> Operators</a:t>
+            </a:r>
+          </a:p>
+          <a:p>
+            <a:r>
+              <a:rPr lang="de-DE" dirty="0" err="1"/>
+              <a:t>Finally</a:t>
+            </a:r>
+            <a:r>
+              <a:rPr lang="de-DE" dirty="0"/>
+              <a:t> </a:t>
+            </a:r>
+            <a:r>
+              <a:rPr lang="de-DE" dirty="0" err="1"/>
+              <a:t>show</a:t>
+            </a:r>
+            <a:r>
+              <a:rPr lang="de-DE" dirty="0"/>
+              <a:t> </a:t>
+            </a:r>
+            <a:r>
+              <a:rPr lang="de-DE" dirty="0" err="1"/>
+              <a:t>some</a:t>
+            </a:r>
+            <a:r>
+              <a:rPr lang="de-DE" dirty="0"/>
+              <a:t> </a:t>
+            </a:r>
+            <a:r>
+              <a:rPr lang="de-DE" dirty="0" err="1"/>
+              <a:t>examples</a:t>
+            </a:r>
+            <a:endParaRPr lang="de-DE" dirty="0"/>
           </a:p>
         </p:txBody>
       </p:sp>
@@ -3395,11 +3631,23 @@
               <a:p>
                 <a:r>
                   <a:rPr lang="en-US" noProof="0" dirty="0"/>
-                  <a:t>Fields </a:t>
+                  <a:t>A </a:t>
+                </a:r>
+                <a:r>
+                  <a:rPr lang="en-US" dirty="0"/>
+                  <a:t>given f</a:t>
+                </a:r>
+                <a:r>
+                  <a:rPr lang="en-US" noProof="0" dirty="0" err="1"/>
+                  <a:t>ield</a:t>
+                </a:r>
+                <a:r>
+                  <a:rPr lang="en-US" noProof="0" dirty="0"/>
+                  <a:t> </a:t>
                 </a:r>
                 <a:r>
                   <a:rPr lang="en-US" i="1" noProof="0" dirty="0"/>
-                  <a:t>are </a:t>
+                  <a:t>is </a:t>
                 </a:r>
                 <a:r>
                   <a:rPr lang="en-US" noProof="0" dirty="0"/>
@@ -4269,8 +4517,8 @@
           </a:p>
         </p:txBody>
       </p:sp>
-      <mc:AlternateContent xmlns:mc="http://schemas.openxmlformats.org/markup-compatibility/2006">
-        <mc:Choice xmlns:a14="http://schemas.microsoft.com/office/drawing/2010/main" Requires="a14">
+      <mc:AlternateContent xmlns:mc="http://schemas.openxmlformats.org/markup-compatibility/2006" xmlns:a14="http://schemas.microsoft.com/office/drawing/2010/main">
+        <mc:Choice Requires="a14">
           <p:sp>
             <p:nvSpPr>
               <p:cNvPr id="3" name="Inhaltsplatzhalter 2">
@@ -4290,7 +4538,7 @@
             <p:spPr>
               <a:xfrm>
                 <a:off x="466725" y="1773239"/>
-                <a:ext cx="4897363" cy="4248150"/>
+                <a:ext cx="4897363" cy="1799777"/>
               </a:xfrm>
             </p:spPr>
             <p:txBody>
@@ -4524,313 +4772,12 @@
                 </a:endParaRPr>
               </a:p>
               <a:p>
-                <a:pPr marL="0" indent="0">
-                  <a:buNone/>
-                </a:pPr>
-                <a14:m>
-                  <m:oMathPara xmlns:m="http://schemas.openxmlformats.org/officeDocument/2006/math">
-                    <m:oMathParaPr>
-                      <m:jc m:val="centerGroup"/>
-                    </m:oMathParaPr>
-                    <m:oMath xmlns:m="http://schemas.openxmlformats.org/officeDocument/2006/math">
-                      <m:acc>
-                        <m:accPr>
-                          <m:chr m:val="̿"/>
-                          <m:ctrlPr>
-                            <a:rPr lang="de-DE" b="0" i="1" smtClean="0">
-                              <a:latin typeface="Cambria Math" panose="02040503050406030204" pitchFamily="18" charset="0"/>
-                            </a:rPr>
-                          </m:ctrlPr>
-                        </m:accPr>
-                        <m:e>
-                          <m:r>
-                            <a:rPr lang="de-DE" b="0" i="1" smtClean="0">
-                              <a:latin typeface="Cambria Math" panose="02040503050406030204" pitchFamily="18" charset="0"/>
-                            </a:rPr>
-                            <m:t>𝑂</m:t>
-                          </m:r>
-                        </m:e>
-                      </m:acc>
-                      <m:r>
-                        <a:rPr lang="de-DE" b="0" i="1" smtClean="0">
-                          <a:latin typeface="Cambria Math" panose="02040503050406030204" pitchFamily="18" charset="0"/>
-                        </a:rPr>
-                        <m:t>𝑢</m:t>
-                      </m:r>
-                      <m:d>
-                        <m:dPr>
-                          <m:ctrlPr>
-                            <a:rPr lang="de-DE" b="0" i="1" smtClean="0">
-                              <a:latin typeface="Cambria Math" panose="02040503050406030204" pitchFamily="18" charset="0"/>
-                            </a:rPr>
-                          </m:ctrlPr>
-                        </m:dPr>
-                        <m:e>
-                          <m:acc>
-                            <m:accPr>
-                              <m:chr m:val="⃗"/>
-                              <m:ctrlPr>
-                                <a:rPr lang="de-DE" b="0" i="1" smtClean="0">
-                                  <a:latin typeface="Cambria Math" panose="02040503050406030204" pitchFamily="18" charset="0"/>
-                                </a:rPr>
-                              </m:ctrlPr>
-                            </m:accPr>
-                            <m:e>
-                              <m:r>
-                                <a:rPr lang="de-DE" b="0" i="1" smtClean="0">
-                                  <a:latin typeface="Cambria Math" panose="02040503050406030204" pitchFamily="18" charset="0"/>
-                                </a:rPr>
-                                <m:t>𝑥</m:t>
-                              </m:r>
-                            </m:e>
-                          </m:acc>
-                        </m:e>
-                      </m:d>
-                      <m:r>
-                        <a:rPr lang="de-DE" b="0" i="1" smtClean="0">
-                          <a:latin typeface="Cambria Math" panose="02040503050406030204" pitchFamily="18" charset="0"/>
-                        </a:rPr>
-                        <m:t>=</m:t>
-                      </m:r>
-                      <m:r>
-                        <a:rPr lang="de-DE" b="0" i="1" smtClean="0">
-                          <a:latin typeface="Cambria Math" panose="02040503050406030204" pitchFamily="18" charset="0"/>
-                        </a:rPr>
-                        <m:t>𝑓</m:t>
-                      </m:r>
-                      <m:r>
-                        <a:rPr lang="de-DE" b="0" i="1" smtClean="0">
-                          <a:latin typeface="Cambria Math" panose="02040503050406030204" pitchFamily="18" charset="0"/>
-                        </a:rPr>
-                        <m:t>;</m:t>
-                      </m:r>
-                      <m:acc>
-                        <m:accPr>
-                          <m:chr m:val="⃗"/>
-                          <m:ctrlPr>
-                            <a:rPr lang="de-DE" i="1">
-                              <a:latin typeface="Cambria Math" panose="02040503050406030204" pitchFamily="18" charset="0"/>
-                            </a:rPr>
-                          </m:ctrlPr>
-                        </m:accPr>
-                        <m:e>
-                          <m:r>
-                            <a:rPr lang="de-DE" i="1">
-                              <a:latin typeface="Cambria Math" panose="02040503050406030204" pitchFamily="18" charset="0"/>
-                            </a:rPr>
-                            <m:t>𝑥</m:t>
-                          </m:r>
-                        </m:e>
-                      </m:acc>
-                      <m:r>
-                        <a:rPr lang="de-DE" b="0" i="1" smtClean="0">
-                          <a:latin typeface="Cambria Math" panose="02040503050406030204" pitchFamily="18" charset="0"/>
-                        </a:rPr>
-                        <m:t>∈</m:t>
-                      </m:r>
-                      <m:r>
-                        <m:rPr>
-                          <m:sty m:val="p"/>
-                        </m:rPr>
-                        <a:rPr lang="de-DE" b="0" i="0" smtClean="0">
-                          <a:latin typeface="Cambria Math" panose="02040503050406030204" pitchFamily="18" charset="0"/>
-                        </a:rPr>
-                        <m:t>Ω</m:t>
-                      </m:r>
-                    </m:oMath>
-                  </m:oMathPara>
-                </a14:m>
-                <a:endParaRPr lang="de-DE" b="0" i="0" dirty="0">
-                  <a:latin typeface="Cambria Math" panose="02040503050406030204" pitchFamily="18" charset="0"/>
-                </a:endParaRPr>
-              </a:p>
-              <a:p>
-                <a:pPr marL="0" indent="0">
-                  <a:buNone/>
-                </a:pPr>
-                <a14:m>
-                  <m:oMathPara xmlns:m="http://schemas.openxmlformats.org/officeDocument/2006/math">
-                    <m:oMathParaPr>
-                      <m:jc m:val="centerGroup"/>
-                    </m:oMathParaPr>
-                    <m:oMath xmlns:m="http://schemas.openxmlformats.org/officeDocument/2006/math">
-                      <m:sSub>
-                        <m:sSubPr>
-                          <m:ctrlPr>
-                            <a:rPr lang="de-DE" i="1">
-                              <a:latin typeface="Cambria Math" panose="02040503050406030204" pitchFamily="18" charset="0"/>
-                            </a:rPr>
-                          </m:ctrlPr>
-                        </m:sSubPr>
-                        <m:e>
-                          <m:r>
-                            <a:rPr lang="de-DE" b="0" i="1" smtClean="0">
-                              <a:latin typeface="Cambria Math" panose="02040503050406030204" pitchFamily="18" charset="0"/>
-                            </a:rPr>
-                            <m:t> </m:t>
-                          </m:r>
-                          <m:sSub>
-                            <m:sSubPr>
-                              <m:ctrlPr>
-                                <a:rPr lang="de-DE" i="1" smtClean="0">
-                                  <a:latin typeface="Cambria Math" panose="02040503050406030204" pitchFamily="18" charset="0"/>
-                                </a:rPr>
-                              </m:ctrlPr>
-                            </m:sSubPr>
-                            <m:e>
-                              <m:r>
-                                <a:rPr lang="de-DE" i="1">
-                                  <a:latin typeface="Cambria Math" panose="02040503050406030204" pitchFamily="18" charset="0"/>
-                                </a:rPr>
-                                <m:t>𝑢</m:t>
-                              </m:r>
-                            </m:e>
-                            <m:sub>
-                              <m:r>
-                                <a:rPr lang="de-DE" i="1">
-                                  <a:latin typeface="Cambria Math" panose="02040503050406030204" pitchFamily="18" charset="0"/>
-                                </a:rPr>
-                                <m:t>0</m:t>
-                              </m:r>
-                            </m:sub>
-                          </m:sSub>
-                          <m:d>
-                            <m:dPr>
-                              <m:ctrlPr>
-                                <a:rPr lang="de-DE" i="1">
-                                  <a:latin typeface="Cambria Math" panose="02040503050406030204" pitchFamily="18" charset="0"/>
-                                </a:rPr>
-                              </m:ctrlPr>
-                            </m:dPr>
-                            <m:e>
-                              <m:acc>
-                                <m:accPr>
-                                  <m:chr m:val="⃗"/>
-                                  <m:ctrlPr>
-                                    <a:rPr lang="de-DE" i="1">
-                                      <a:latin typeface="Cambria Math" panose="02040503050406030204" pitchFamily="18" charset="0"/>
-                                    </a:rPr>
-                                  </m:ctrlPr>
-                                </m:accPr>
-                                <m:e>
-                                  <m:r>
-                                    <a:rPr lang="de-DE" i="1">
-                                      <a:latin typeface="Cambria Math" panose="02040503050406030204" pitchFamily="18" charset="0"/>
-                                    </a:rPr>
-                                    <m:t>𝑥</m:t>
-                                  </m:r>
-                                </m:e>
-                              </m:acc>
-                            </m:e>
-                          </m:d>
-                          <m:r>
-                            <a:rPr lang="de-DE" b="0" i="1" smtClean="0">
-                              <a:latin typeface="Cambria Math" panose="02040503050406030204" pitchFamily="18" charset="0"/>
-                            </a:rPr>
-                            <m:t>= </m:t>
-                          </m:r>
-                          <m:r>
-                            <a:rPr lang="de-DE" i="1">
-                              <a:latin typeface="Cambria Math" panose="02040503050406030204" pitchFamily="18" charset="0"/>
-                            </a:rPr>
-                            <m:t>𝑢</m:t>
-                          </m:r>
-                        </m:e>
-                        <m:sub>
-                          <m:r>
-                            <a:rPr lang="de-DE" i="1">
-                              <a:latin typeface="Cambria Math" panose="02040503050406030204" pitchFamily="18" charset="0"/>
-                            </a:rPr>
-                            <m:t>0</m:t>
-                          </m:r>
-                        </m:sub>
-                      </m:sSub>
-                      <m:d>
-                        <m:dPr>
-                          <m:ctrlPr>
-                            <a:rPr lang="de-DE" i="1">
-                              <a:latin typeface="Cambria Math" panose="02040503050406030204" pitchFamily="18" charset="0"/>
-                            </a:rPr>
-                          </m:ctrlPr>
-                        </m:dPr>
-                        <m:e>
-                          <m:acc>
-                            <m:accPr>
-                              <m:chr m:val="⃗"/>
-                              <m:ctrlPr>
-                                <a:rPr lang="de-DE" i="1">
-                                  <a:latin typeface="Cambria Math" panose="02040503050406030204" pitchFamily="18" charset="0"/>
-                                </a:rPr>
-                              </m:ctrlPr>
-                            </m:accPr>
-                            <m:e>
-                              <m:r>
-                                <a:rPr lang="de-DE" i="1">
-                                  <a:latin typeface="Cambria Math" panose="02040503050406030204" pitchFamily="18" charset="0"/>
-                                </a:rPr>
-                                <m:t>𝑥</m:t>
-                              </m:r>
-                            </m:e>
-                          </m:acc>
-                        </m:e>
-                      </m:d>
-                      <m:r>
-                        <a:rPr lang="de-DE" b="0" i="1" smtClean="0">
-                          <a:latin typeface="Cambria Math" panose="02040503050406030204" pitchFamily="18" charset="0"/>
-                        </a:rPr>
-                        <m:t>;</m:t>
-                      </m:r>
-                      <m:acc>
-                        <m:accPr>
-                          <m:chr m:val="⃗"/>
-                          <m:ctrlPr>
-                            <a:rPr lang="de-DE" i="1">
-                              <a:latin typeface="Cambria Math" panose="02040503050406030204" pitchFamily="18" charset="0"/>
-                            </a:rPr>
-                          </m:ctrlPr>
-                        </m:accPr>
-                        <m:e>
-                          <m:r>
-                            <a:rPr lang="de-DE" i="1">
-                              <a:latin typeface="Cambria Math" panose="02040503050406030204" pitchFamily="18" charset="0"/>
-                            </a:rPr>
-                            <m:t>𝑥</m:t>
-                          </m:r>
-                        </m:e>
-                      </m:acc>
-                      <m:r>
-                        <a:rPr lang="de-DE" b="0" i="1" smtClean="0">
-                          <a:latin typeface="Cambria Math" panose="02040503050406030204" pitchFamily="18" charset="0"/>
-                        </a:rPr>
-                        <m:t>∈</m:t>
-                      </m:r>
-                      <m:r>
-                        <a:rPr lang="de-DE" b="0" i="1" smtClean="0">
-                          <a:latin typeface="Cambria Math" panose="02040503050406030204" pitchFamily="18" charset="0"/>
-                        </a:rPr>
-                        <m:t>𝜕</m:t>
-                      </m:r>
-                      <m:r>
-                        <m:rPr>
-                          <m:sty m:val="p"/>
-                        </m:rPr>
-                        <a:rPr lang="de-DE" b="0" i="0" smtClean="0">
-                          <a:latin typeface="Cambria Math" panose="02040503050406030204" pitchFamily="18" charset="0"/>
-                        </a:rPr>
-                        <m:t>Ω</m:t>
-                      </m:r>
-                    </m:oMath>
-                  </m:oMathPara>
-                </a14:m>
-                <a:endParaRPr lang="de-DE" dirty="0"/>
-              </a:p>
-              <a:p>
                 <a:endParaRPr lang="en-GB" dirty="0"/>
               </a:p>
             </p:txBody>
           </p:sp>
         </mc:Choice>
-        <mc:Fallback>
+        <mc:Fallback xmlns="">
           <p:sp>
             <p:nvSpPr>
               <p:cNvPr id="3" name="Inhaltsplatzhalter 2">
@@ -4850,12 +4797,12 @@
             <p:spPr>
               <a:xfrm>
                 <a:off x="466725" y="1773239"/>
-                <a:ext cx="4897363" cy="4248150"/>
+                <a:ext cx="4897363" cy="1799777"/>
               </a:xfrm>
               <a:blipFill>
                 <a:blip r:embed="rId2"/>
                 <a:stretch>
-                  <a:fillRect l="-2740" t="-3156" r="-1993"/>
+                  <a:fillRect l="-2740" t="-7458" r="-1993" b="-3051"/>
                 </a:stretch>
               </a:blipFill>
             </p:spPr>
@@ -4910,6 +4857,1001 @@
           </a:prstGeom>
         </p:spPr>
       </p:pic>
+      <mc:AlternateContent xmlns:mc="http://schemas.openxmlformats.org/markup-compatibility/2006" xmlns:a14="http://schemas.microsoft.com/office/drawing/2010/main">
+        <mc:Choice Requires="a14">
+          <p:sp>
+            <p:nvSpPr>
+              <p:cNvPr id="7" name="Textfeld 6">
+                <a:extLst>
+                  <a:ext uri="{FF2B5EF4-FFF2-40B4-BE49-F238E27FC236}">
+                    <a16:creationId xmlns:a16="http://schemas.microsoft.com/office/drawing/2014/main" id="{9B04D435-E5D7-5903-6EEE-4CE5103E31A5}"/>
+                  </a:ext>
+                </a:extLst>
+              </p:cNvPr>
+              <p:cNvSpPr txBox="1"/>
+              <p:nvPr/>
+            </p:nvSpPr>
+            <p:spPr>
+              <a:xfrm>
+                <a:off x="1092646" y="4439194"/>
+                <a:ext cx="4392488" cy="1556388"/>
+              </a:xfrm>
+              <a:prstGeom prst="rect">
+                <a:avLst/>
+              </a:prstGeom>
+              <a:noFill/>
+            </p:spPr>
+            <p:txBody>
+              <a:bodyPr wrap="square" rtlCol="0">
+                <a:spAutoFit/>
+              </a:bodyPr>
+              <a:lstStyle/>
+              <a:p>
+                <a:pPr marL="0" indent="0">
+                  <a:buNone/>
+                </a:pPr>
+                <a14:m>
+                  <m:oMathPara xmlns:m="http://schemas.openxmlformats.org/officeDocument/2006/math">
+                    <m:oMathParaPr>
+                      <m:jc m:val="centerGroup"/>
+                    </m:oMathParaPr>
+                    <m:oMath xmlns:m="http://schemas.openxmlformats.org/officeDocument/2006/math">
+                      <m:acc>
+                        <m:accPr>
+                          <m:chr m:val="̿"/>
+                          <m:ctrlPr>
+                            <a:rPr lang="de-DE" sz="2400" b="0" i="1" smtClean="0">
+                              <a:latin typeface="Cambria Math" panose="02040503050406030204" pitchFamily="18" charset="0"/>
+                            </a:rPr>
+                          </m:ctrlPr>
+                        </m:accPr>
+                        <m:e>
+                          <m:r>
+                            <a:rPr lang="de-DE" sz="2400" b="0" i="1" smtClean="0">
+                              <a:latin typeface="Cambria Math" panose="02040503050406030204" pitchFamily="18" charset="0"/>
+                            </a:rPr>
+                            <m:t>𝐿</m:t>
+                          </m:r>
+                        </m:e>
+                      </m:acc>
+                      <m:r>
+                        <a:rPr lang="de-DE" sz="2400" b="0" i="1" smtClean="0">
+                          <a:latin typeface="Cambria Math" panose="02040503050406030204" pitchFamily="18" charset="0"/>
+                        </a:rPr>
+                        <m:t>𝑢</m:t>
+                      </m:r>
+                      <m:d>
+                        <m:dPr>
+                          <m:ctrlPr>
+                            <a:rPr lang="de-DE" sz="2400" b="0" i="1" smtClean="0">
+                              <a:latin typeface="Cambria Math" panose="02040503050406030204" pitchFamily="18" charset="0"/>
+                            </a:rPr>
+                          </m:ctrlPr>
+                        </m:dPr>
+                        <m:e>
+                          <m:acc>
+                            <m:accPr>
+                              <m:chr m:val="⃗"/>
+                              <m:ctrlPr>
+                                <a:rPr lang="de-DE" sz="2400" b="0" i="1" smtClean="0">
+                                  <a:latin typeface="Cambria Math" panose="02040503050406030204" pitchFamily="18" charset="0"/>
+                                </a:rPr>
+                              </m:ctrlPr>
+                            </m:accPr>
+                            <m:e>
+                              <m:r>
+                                <a:rPr lang="de-DE" sz="2400" b="0" i="1" smtClean="0">
+                                  <a:latin typeface="Cambria Math" panose="02040503050406030204" pitchFamily="18" charset="0"/>
+                                </a:rPr>
+                                <m:t>𝑥</m:t>
+                              </m:r>
+                            </m:e>
+                          </m:acc>
+                        </m:e>
+                      </m:d>
+                      <m:r>
+                        <a:rPr lang="de-DE" sz="2400" b="0" i="1" smtClean="0">
+                          <a:latin typeface="Cambria Math" panose="02040503050406030204" pitchFamily="18" charset="0"/>
+                        </a:rPr>
+                        <m:t>=</m:t>
+                      </m:r>
+                      <m:r>
+                        <a:rPr lang="de-DE" sz="2400" b="0" i="1" smtClean="0">
+                          <a:latin typeface="Cambria Math" panose="02040503050406030204" pitchFamily="18" charset="0"/>
+                        </a:rPr>
+                        <m:t>𝑓</m:t>
+                      </m:r>
+                      <m:r>
+                        <a:rPr lang="de-DE" sz="2400" b="0" i="1" smtClean="0">
+                          <a:latin typeface="Cambria Math" panose="02040503050406030204" pitchFamily="18" charset="0"/>
+                        </a:rPr>
+                        <m:t>(</m:t>
+                      </m:r>
+                      <m:acc>
+                        <m:accPr>
+                          <m:chr m:val="⃗"/>
+                          <m:ctrlPr>
+                            <a:rPr lang="de-DE" sz="2400" b="0" i="1" smtClean="0">
+                              <a:latin typeface="Cambria Math" panose="02040503050406030204" pitchFamily="18" charset="0"/>
+                            </a:rPr>
+                          </m:ctrlPr>
+                        </m:accPr>
+                        <m:e>
+                          <m:r>
+                            <a:rPr lang="de-DE" sz="2400" b="0" i="1" smtClean="0">
+                              <a:latin typeface="Cambria Math" panose="02040503050406030204" pitchFamily="18" charset="0"/>
+                            </a:rPr>
+                            <m:t>𝑥</m:t>
+                          </m:r>
+                        </m:e>
+                      </m:acc>
+                      <m:r>
+                        <a:rPr lang="de-DE" sz="2400" b="0" i="1" smtClean="0">
+                          <a:latin typeface="Cambria Math" panose="02040503050406030204" pitchFamily="18" charset="0"/>
+                        </a:rPr>
+                        <m:t>);    </m:t>
+                      </m:r>
+                      <m:acc>
+                        <m:accPr>
+                          <m:chr m:val="⃗"/>
+                          <m:ctrlPr>
+                            <a:rPr lang="de-DE" sz="2400" i="1">
+                              <a:latin typeface="Cambria Math" panose="02040503050406030204" pitchFamily="18" charset="0"/>
+                            </a:rPr>
+                          </m:ctrlPr>
+                        </m:accPr>
+                        <m:e>
+                          <m:r>
+                            <a:rPr lang="de-DE" sz="2400" i="1">
+                              <a:latin typeface="Cambria Math" panose="02040503050406030204" pitchFamily="18" charset="0"/>
+                            </a:rPr>
+                            <m:t>𝑥</m:t>
+                          </m:r>
+                        </m:e>
+                      </m:acc>
+                      <m:r>
+                        <a:rPr lang="de-DE" sz="2400" b="0" i="1" smtClean="0">
+                          <a:latin typeface="Cambria Math" panose="02040503050406030204" pitchFamily="18" charset="0"/>
+                        </a:rPr>
+                        <m:t>∈</m:t>
+                      </m:r>
+                      <m:r>
+                        <m:rPr>
+                          <m:sty m:val="p"/>
+                        </m:rPr>
+                        <a:rPr lang="de-DE" sz="2400" b="0" i="0" smtClean="0">
+                          <a:latin typeface="Cambria Math" panose="02040503050406030204" pitchFamily="18" charset="0"/>
+                        </a:rPr>
+                        <m:t>Ω</m:t>
+                      </m:r>
+                    </m:oMath>
+                  </m:oMathPara>
+                </a14:m>
+                <a:endParaRPr lang="de-DE" sz="2400" b="0" i="0" dirty="0">
+                  <a:latin typeface="Cambria Math" panose="02040503050406030204" pitchFamily="18" charset="0"/>
+                </a:endParaRPr>
+              </a:p>
+              <a:p>
+                <a:pPr marL="0" indent="0">
+                  <a:buNone/>
+                </a:pPr>
+                <a:endParaRPr lang="de-DE" sz="2400" b="0" i="0" dirty="0">
+                  <a:latin typeface="Cambria Math" panose="02040503050406030204" pitchFamily="18" charset="0"/>
+                </a:endParaRPr>
+              </a:p>
+              <a:p>
+                <a:pPr marL="0" indent="0">
+                  <a:buNone/>
+                </a:pPr>
+                <a14:m>
+                  <m:oMathPara xmlns:m="http://schemas.openxmlformats.org/officeDocument/2006/math">
+                    <m:oMathParaPr>
+                      <m:jc m:val="centerGroup"/>
+                    </m:oMathParaPr>
+                    <m:oMath xmlns:m="http://schemas.openxmlformats.org/officeDocument/2006/math">
+                      <m:sSub>
+                        <m:sSubPr>
+                          <m:ctrlPr>
+                            <a:rPr lang="de-DE" sz="2400" i="1">
+                              <a:latin typeface="Cambria Math" panose="02040503050406030204" pitchFamily="18" charset="0"/>
+                            </a:rPr>
+                          </m:ctrlPr>
+                        </m:sSubPr>
+                        <m:e>
+                          <m:r>
+                            <a:rPr lang="de-DE" sz="2400" b="0" i="1" smtClean="0">
+                              <a:latin typeface="Cambria Math" panose="02040503050406030204" pitchFamily="18" charset="0"/>
+                            </a:rPr>
+                            <m:t> </m:t>
+                          </m:r>
+                          <m:r>
+                            <a:rPr lang="de-DE" sz="2400" b="0" i="1" smtClean="0">
+                              <a:latin typeface="Cambria Math" panose="02040503050406030204" pitchFamily="18" charset="0"/>
+                            </a:rPr>
+                            <m:t>𝑢</m:t>
+                          </m:r>
+                          <m:d>
+                            <m:dPr>
+                              <m:ctrlPr>
+                                <a:rPr lang="de-DE" sz="2400" i="1">
+                                  <a:latin typeface="Cambria Math" panose="02040503050406030204" pitchFamily="18" charset="0"/>
+                                </a:rPr>
+                              </m:ctrlPr>
+                            </m:dPr>
+                            <m:e>
+                              <m:acc>
+                                <m:accPr>
+                                  <m:chr m:val="⃗"/>
+                                  <m:ctrlPr>
+                                    <a:rPr lang="de-DE" sz="2400" i="1">
+                                      <a:latin typeface="Cambria Math" panose="02040503050406030204" pitchFamily="18" charset="0"/>
+                                    </a:rPr>
+                                  </m:ctrlPr>
+                                </m:accPr>
+                                <m:e>
+                                  <m:r>
+                                    <a:rPr lang="de-DE" sz="2400" i="1">
+                                      <a:latin typeface="Cambria Math" panose="02040503050406030204" pitchFamily="18" charset="0"/>
+                                    </a:rPr>
+                                    <m:t>𝑥</m:t>
+                                  </m:r>
+                                </m:e>
+                              </m:acc>
+                            </m:e>
+                          </m:d>
+                          <m:r>
+                            <a:rPr lang="de-DE" sz="2400" b="0" i="1" smtClean="0">
+                              <a:latin typeface="Cambria Math" panose="02040503050406030204" pitchFamily="18" charset="0"/>
+                            </a:rPr>
+                            <m:t>= </m:t>
+                          </m:r>
+                          <m:r>
+                            <a:rPr lang="de-DE" sz="2400" i="1">
+                              <a:latin typeface="Cambria Math" panose="02040503050406030204" pitchFamily="18" charset="0"/>
+                            </a:rPr>
+                            <m:t>𝑢</m:t>
+                          </m:r>
+                        </m:e>
+                        <m:sub>
+                          <m:r>
+                            <a:rPr lang="de-DE" sz="2400" i="1">
+                              <a:latin typeface="Cambria Math" panose="02040503050406030204" pitchFamily="18" charset="0"/>
+                            </a:rPr>
+                            <m:t>0</m:t>
+                          </m:r>
+                        </m:sub>
+                      </m:sSub>
+                      <m:d>
+                        <m:dPr>
+                          <m:ctrlPr>
+                            <a:rPr lang="de-DE" sz="2400" i="1">
+                              <a:latin typeface="Cambria Math" panose="02040503050406030204" pitchFamily="18" charset="0"/>
+                            </a:rPr>
+                          </m:ctrlPr>
+                        </m:dPr>
+                        <m:e>
+                          <m:acc>
+                            <m:accPr>
+                              <m:chr m:val="⃗"/>
+                              <m:ctrlPr>
+                                <a:rPr lang="de-DE" sz="2400" i="1">
+                                  <a:latin typeface="Cambria Math" panose="02040503050406030204" pitchFamily="18" charset="0"/>
+                                </a:rPr>
+                              </m:ctrlPr>
+                            </m:accPr>
+                            <m:e>
+                              <m:r>
+                                <a:rPr lang="de-DE" sz="2400" i="1">
+                                  <a:latin typeface="Cambria Math" panose="02040503050406030204" pitchFamily="18" charset="0"/>
+                                </a:rPr>
+                                <m:t>𝑥</m:t>
+                              </m:r>
+                            </m:e>
+                          </m:acc>
+                        </m:e>
+                      </m:d>
+                      <m:r>
+                        <a:rPr lang="de-DE" sz="2400" b="0" i="1" smtClean="0">
+                          <a:latin typeface="Cambria Math" panose="02040503050406030204" pitchFamily="18" charset="0"/>
+                        </a:rPr>
+                        <m:t>;    </m:t>
+                      </m:r>
+                      <m:acc>
+                        <m:accPr>
+                          <m:chr m:val="⃗"/>
+                          <m:ctrlPr>
+                            <a:rPr lang="de-DE" sz="2400" i="1">
+                              <a:latin typeface="Cambria Math" panose="02040503050406030204" pitchFamily="18" charset="0"/>
+                            </a:rPr>
+                          </m:ctrlPr>
+                        </m:accPr>
+                        <m:e>
+                          <m:r>
+                            <a:rPr lang="de-DE" sz="2400" i="1">
+                              <a:latin typeface="Cambria Math" panose="02040503050406030204" pitchFamily="18" charset="0"/>
+                            </a:rPr>
+                            <m:t>𝑥</m:t>
+                          </m:r>
+                        </m:e>
+                      </m:acc>
+                      <m:r>
+                        <a:rPr lang="de-DE" sz="2400" b="0" i="1" smtClean="0">
+                          <a:latin typeface="Cambria Math" panose="02040503050406030204" pitchFamily="18" charset="0"/>
+                        </a:rPr>
+                        <m:t>∈</m:t>
+                      </m:r>
+                      <m:r>
+                        <a:rPr lang="de-DE" sz="2400" b="0" i="1" smtClean="0">
+                          <a:latin typeface="Cambria Math" panose="02040503050406030204" pitchFamily="18" charset="0"/>
+                        </a:rPr>
+                        <m:t>𝜕</m:t>
+                      </m:r>
+                      <m:r>
+                        <m:rPr>
+                          <m:sty m:val="p"/>
+                        </m:rPr>
+                        <a:rPr lang="de-DE" sz="2400" b="0" i="0" smtClean="0">
+                          <a:latin typeface="Cambria Math" panose="02040503050406030204" pitchFamily="18" charset="0"/>
+                        </a:rPr>
+                        <m:t>Ω</m:t>
+                      </m:r>
+                    </m:oMath>
+                  </m:oMathPara>
+                </a14:m>
+                <a:endParaRPr lang="de-DE" sz="2400" dirty="0"/>
+              </a:p>
+              <a:p>
+                <a:endParaRPr lang="en-GB" dirty="0"/>
+              </a:p>
+            </p:txBody>
+          </p:sp>
+        </mc:Choice>
+        <mc:Fallback xmlns="">
+          <p:sp>
+            <p:nvSpPr>
+              <p:cNvPr id="7" name="Textfeld 6">
+                <a:extLst>
+                  <a:ext uri="{FF2B5EF4-FFF2-40B4-BE49-F238E27FC236}">
+                    <a16:creationId xmlns:a16="http://schemas.microsoft.com/office/drawing/2014/main" id="{9B04D435-E5D7-5903-6EEE-4CE5103E31A5}"/>
+                  </a:ext>
+                </a:extLst>
+              </p:cNvPr>
+              <p:cNvSpPr txBox="1">
+                <a:spLocks noRot="1" noChangeAspect="1" noMove="1" noResize="1" noEditPoints="1" noAdjustHandles="1" noChangeArrowheads="1" noChangeShapeType="1" noTextEdit="1"/>
+              </p:cNvSpPr>
+              <p:nvPr/>
+            </p:nvSpPr>
+            <p:spPr>
+              <a:xfrm>
+                <a:off x="1092646" y="4439194"/>
+                <a:ext cx="4392488" cy="1556388"/>
+              </a:xfrm>
+              <a:prstGeom prst="rect">
+                <a:avLst/>
+              </a:prstGeom>
+              <a:blipFill>
+                <a:blip r:embed="rId4"/>
+                <a:stretch>
+                  <a:fillRect/>
+                </a:stretch>
+              </a:blipFill>
+            </p:spPr>
+            <p:txBody>
+              <a:bodyPr/>
+              <a:lstStyle/>
+              <a:p>
+                <a:r>
+                  <a:rPr lang="en-GB">
+                    <a:noFill/>
+                  </a:rPr>
+                  <a:t> </a:t>
+                </a:r>
+              </a:p>
+            </p:txBody>
+          </p:sp>
+        </mc:Fallback>
+      </mc:AlternateContent>
+      <p:sp>
+        <p:nvSpPr>
+          <p:cNvPr id="6" name="Textfeld 5">
+            <a:extLst>
+              <a:ext uri="{FF2B5EF4-FFF2-40B4-BE49-F238E27FC236}">
+                <a16:creationId xmlns:a16="http://schemas.microsoft.com/office/drawing/2014/main" id="{65672875-6846-1FD8-B2C6-9E80935384BA}"/>
+              </a:ext>
+            </a:extLst>
+          </p:cNvPr>
+          <p:cNvSpPr txBox="1"/>
+          <p:nvPr/>
+        </p:nvSpPr>
+        <p:spPr>
+          <a:xfrm>
+            <a:off x="5220072" y="5237286"/>
+            <a:ext cx="2736304" cy="369332"/>
+          </a:xfrm>
+          <a:prstGeom prst="rect">
+            <a:avLst/>
+          </a:prstGeom>
+          <a:noFill/>
+        </p:spPr>
+        <p:txBody>
+          <a:bodyPr wrap="square" rtlCol="0">
+            <a:spAutoFit/>
+          </a:bodyPr>
+          <a:lstStyle/>
+          <a:p>
+            <a:r>
+              <a:rPr lang="de-DE" dirty="0"/>
+              <a:t>Boundary </a:t>
+            </a:r>
+            <a:r>
+              <a:rPr lang="de-DE" dirty="0" err="1"/>
+              <a:t>condition</a:t>
+            </a:r>
+            <a:endParaRPr lang="en-GB" dirty="0"/>
+          </a:p>
+        </p:txBody>
+      </p:sp>
+      <p:sp>
+        <p:nvSpPr>
+          <p:cNvPr id="8" name="Textfeld 7">
+            <a:extLst>
+              <a:ext uri="{FF2B5EF4-FFF2-40B4-BE49-F238E27FC236}">
+                <a16:creationId xmlns:a16="http://schemas.microsoft.com/office/drawing/2014/main" id="{FE55FD64-09E7-9904-B6C2-C44083A63CDC}"/>
+              </a:ext>
+            </a:extLst>
+          </p:cNvPr>
+          <p:cNvSpPr txBox="1"/>
+          <p:nvPr/>
+        </p:nvSpPr>
+        <p:spPr>
+          <a:xfrm>
+            <a:off x="3437003" y="3781493"/>
+            <a:ext cx="2736304" cy="369332"/>
+          </a:xfrm>
+          <a:prstGeom prst="rect">
+            <a:avLst/>
+          </a:prstGeom>
+          <a:noFill/>
+        </p:spPr>
+        <p:txBody>
+          <a:bodyPr wrap="square" rtlCol="0">
+            <a:spAutoFit/>
+          </a:bodyPr>
+          <a:lstStyle/>
+          <a:p>
+            <a:r>
+              <a:rPr lang="de-DE" dirty="0"/>
+              <a:t>Source </a:t>
+            </a:r>
+            <a:r>
+              <a:rPr lang="de-DE" dirty="0" err="1"/>
+              <a:t>terms</a:t>
+            </a:r>
+            <a:endParaRPr lang="en-GB" dirty="0"/>
+          </a:p>
+        </p:txBody>
+      </p:sp>
+      <p:sp>
+        <p:nvSpPr>
+          <p:cNvPr id="9" name="Textfeld 8">
+            <a:extLst>
+              <a:ext uri="{FF2B5EF4-FFF2-40B4-BE49-F238E27FC236}">
+                <a16:creationId xmlns:a16="http://schemas.microsoft.com/office/drawing/2014/main" id="{6F8FEEEB-1643-8BBC-AD5B-D105C0049F86}"/>
+              </a:ext>
+            </a:extLst>
+          </p:cNvPr>
+          <p:cNvSpPr txBox="1"/>
+          <p:nvPr/>
+        </p:nvSpPr>
+        <p:spPr>
+          <a:xfrm>
+            <a:off x="1858666" y="3748281"/>
+            <a:ext cx="1489198" cy="369332"/>
+          </a:xfrm>
+          <a:prstGeom prst="rect">
+            <a:avLst/>
+          </a:prstGeom>
+          <a:noFill/>
+        </p:spPr>
+        <p:txBody>
+          <a:bodyPr wrap="square" rtlCol="0">
+            <a:spAutoFit/>
+          </a:bodyPr>
+          <a:lstStyle/>
+          <a:p>
+            <a:r>
+              <a:rPr lang="de-DE" dirty="0"/>
+              <a:t>The </a:t>
+            </a:r>
+            <a:r>
+              <a:rPr lang="de-DE" dirty="0" err="1"/>
+              <a:t>solution</a:t>
+            </a:r>
+            <a:endParaRPr lang="en-GB" dirty="0"/>
+          </a:p>
+        </p:txBody>
+      </p:sp>
+      <p:sp>
+        <p:nvSpPr>
+          <p:cNvPr id="10" name="Textfeld 9">
+            <a:extLst>
+              <a:ext uri="{FF2B5EF4-FFF2-40B4-BE49-F238E27FC236}">
+                <a16:creationId xmlns:a16="http://schemas.microsoft.com/office/drawing/2014/main" id="{2972BEAD-5F77-BA77-0070-1E2449F4CB3E}"/>
+              </a:ext>
+            </a:extLst>
+          </p:cNvPr>
+          <p:cNvSpPr txBox="1"/>
+          <p:nvPr/>
+        </p:nvSpPr>
+        <p:spPr>
+          <a:xfrm>
+            <a:off x="107504" y="3953239"/>
+            <a:ext cx="2736304" cy="369332"/>
+          </a:xfrm>
+          <a:prstGeom prst="rect">
+            <a:avLst/>
+          </a:prstGeom>
+          <a:noFill/>
+        </p:spPr>
+        <p:txBody>
+          <a:bodyPr wrap="square" rtlCol="0">
+            <a:spAutoFit/>
+          </a:bodyPr>
+          <a:lstStyle/>
+          <a:p>
+            <a:r>
+              <a:rPr lang="de-DE" dirty="0"/>
+              <a:t>The </a:t>
+            </a:r>
+            <a:r>
+              <a:rPr lang="de-DE" dirty="0" err="1"/>
+              <a:t>operator</a:t>
+            </a:r>
+            <a:endParaRPr lang="en-GB" dirty="0"/>
+          </a:p>
+        </p:txBody>
+      </p:sp>
+      <p:cxnSp>
+        <p:nvCxnSpPr>
+          <p:cNvPr id="12" name="Gerade Verbindung mit Pfeil 11">
+            <a:extLst>
+              <a:ext uri="{FF2B5EF4-FFF2-40B4-BE49-F238E27FC236}">
+                <a16:creationId xmlns:a16="http://schemas.microsoft.com/office/drawing/2014/main" id="{D3E16D2B-5424-4892-5143-2FF5EC0BD32D}"/>
+              </a:ext>
+            </a:extLst>
+          </p:cNvPr>
+          <p:cNvCxnSpPr/>
+          <p:nvPr/>
+        </p:nvCxnSpPr>
+        <p:spPr bwMode="auto">
+          <a:xfrm flipH="1">
+            <a:off x="3364995" y="4150825"/>
+            <a:ext cx="432048" cy="387980"/>
+          </a:xfrm>
+          <a:prstGeom prst="straightConnector1">
+            <a:avLst/>
+          </a:prstGeom>
+          <a:noFill/>
+          <a:ln w="28575">
+            <a:solidFill>
+              <a:srgbClr val="C00000"/>
+            </a:solidFill>
+            <a:tailEnd type="triangle"/>
+          </a:ln>
+          <a:effectLst/>
+          <a:extLst>
+            <a:ext uri="{909E8E84-426E-40dd-AFC4-6F175D3DCCD1}">
+              <a14:hiddenFill xmlns:a14="http://schemas.microsoft.com/office/drawing/2010/main" xmlns="">
+                <a:solidFill>
+                  <a:schemeClr val="accent1"/>
+                </a:solidFill>
+              </a14:hiddenFill>
+            </a:ext>
+            <a:ext uri="{91240B29-F687-4f45-9708-019B960494DF}">
+              <a14:hiddenLine xmlns:a14="http://schemas.microsoft.com/office/drawing/2010/main" xmlns="" w="9525" cap="flat" cmpd="sng" algn="ctr">
+                <a:solidFill>
+                  <a:schemeClr val="tx1"/>
+                </a:solidFill>
+                <a:prstDash val="solid"/>
+                <a:round/>
+                <a:headEnd type="none" w="med" len="med"/>
+                <a:tailEnd type="none" w="med" len="med"/>
+              </a14:hiddenLine>
+            </a:ext>
+            <a:ext uri="{AF507438-7753-43e0-B8FC-AC1667EBCBE1}">
+              <a14:hiddenEffects xmlns:a14="http://schemas.microsoft.com/office/drawing/2010/main" xmlns="">
+                <a:effectLst>
+                  <a:outerShdw dist="35921" dir="2700000" algn="ctr" rotWithShape="0">
+                    <a:schemeClr val="bg2"/>
+                  </a:outerShdw>
+                </a:effectLst>
+              </a14:hiddenEffects>
+            </a:ext>
+          </a:extLst>
+        </p:spPr>
+      </p:cxnSp>
+      <p:cxnSp>
+        <p:nvCxnSpPr>
+          <p:cNvPr id="13" name="Gerade Verbindung mit Pfeil 12">
+            <a:extLst>
+              <a:ext uri="{FF2B5EF4-FFF2-40B4-BE49-F238E27FC236}">
+                <a16:creationId xmlns:a16="http://schemas.microsoft.com/office/drawing/2014/main" id="{2F86DDC4-34B8-0316-D63E-7E3BF36A6BC8}"/>
+              </a:ext>
+            </a:extLst>
+          </p:cNvPr>
+          <p:cNvCxnSpPr>
+            <a:cxnSpLocks/>
+          </p:cNvCxnSpPr>
+          <p:nvPr/>
+        </p:nvCxnSpPr>
+        <p:spPr bwMode="auto">
+          <a:xfrm flipH="1">
+            <a:off x="2234520" y="4117613"/>
+            <a:ext cx="100310" cy="408533"/>
+          </a:xfrm>
+          <a:prstGeom prst="straightConnector1">
+            <a:avLst/>
+          </a:prstGeom>
+          <a:noFill/>
+          <a:ln w="28575">
+            <a:solidFill>
+              <a:srgbClr val="C00000"/>
+            </a:solidFill>
+            <a:tailEnd type="triangle"/>
+          </a:ln>
+          <a:effectLst/>
+          <a:extLst>
+            <a:ext uri="{909E8E84-426E-40dd-AFC4-6F175D3DCCD1}">
+              <a14:hiddenFill xmlns:a14="http://schemas.microsoft.com/office/drawing/2010/main" xmlns="">
+                <a:solidFill>
+                  <a:schemeClr val="accent1"/>
+                </a:solidFill>
+              </a14:hiddenFill>
+            </a:ext>
+            <a:ext uri="{91240B29-F687-4f45-9708-019B960494DF}">
+              <a14:hiddenLine xmlns:a14="http://schemas.microsoft.com/office/drawing/2010/main" xmlns="" w="9525" cap="flat" cmpd="sng" algn="ctr">
+                <a:solidFill>
+                  <a:schemeClr val="tx1"/>
+                </a:solidFill>
+                <a:prstDash val="solid"/>
+                <a:round/>
+                <a:headEnd type="none" w="med" len="med"/>
+                <a:tailEnd type="none" w="med" len="med"/>
+              </a14:hiddenLine>
+            </a:ext>
+            <a:ext uri="{AF507438-7753-43e0-B8FC-AC1667EBCBE1}">
+              <a14:hiddenEffects xmlns:a14="http://schemas.microsoft.com/office/drawing/2010/main" xmlns="">
+                <a:effectLst>
+                  <a:outerShdw dist="35921" dir="2700000" algn="ctr" rotWithShape="0">
+                    <a:schemeClr val="bg2"/>
+                  </a:outerShdw>
+                </a:effectLst>
+              </a14:hiddenEffects>
+            </a:ext>
+          </a:extLst>
+        </p:spPr>
+      </p:cxnSp>
+      <p:cxnSp>
+        <p:nvCxnSpPr>
+          <p:cNvPr id="15" name="Gerade Verbindung mit Pfeil 14">
+            <a:extLst>
+              <a:ext uri="{FF2B5EF4-FFF2-40B4-BE49-F238E27FC236}">
+                <a16:creationId xmlns:a16="http://schemas.microsoft.com/office/drawing/2014/main" id="{33D93B2D-B991-0528-FB10-FCA96674415C}"/>
+              </a:ext>
+            </a:extLst>
+          </p:cNvPr>
+          <p:cNvCxnSpPr>
+            <a:cxnSpLocks/>
+            <a:stCxn id="10" idx="2"/>
+          </p:cNvCxnSpPr>
+          <p:nvPr/>
+        </p:nvCxnSpPr>
+        <p:spPr bwMode="auto">
+          <a:xfrm>
+            <a:off x="1475656" y="4322571"/>
+            <a:ext cx="395429" cy="189249"/>
+          </a:xfrm>
+          <a:prstGeom prst="straightConnector1">
+            <a:avLst/>
+          </a:prstGeom>
+          <a:noFill/>
+          <a:ln w="28575">
+            <a:solidFill>
+              <a:srgbClr val="C00000"/>
+            </a:solidFill>
+            <a:tailEnd type="triangle"/>
+          </a:ln>
+          <a:effectLst/>
+          <a:extLst>
+            <a:ext uri="{909E8E84-426E-40dd-AFC4-6F175D3DCCD1}">
+              <a14:hiddenFill xmlns:a14="http://schemas.microsoft.com/office/drawing/2010/main" xmlns="">
+                <a:solidFill>
+                  <a:schemeClr val="accent1"/>
+                </a:solidFill>
+              </a14:hiddenFill>
+            </a:ext>
+            <a:ext uri="{91240B29-F687-4f45-9708-019B960494DF}">
+              <a14:hiddenLine xmlns:a14="http://schemas.microsoft.com/office/drawing/2010/main" xmlns="" w="9525" cap="flat" cmpd="sng" algn="ctr">
+                <a:solidFill>
+                  <a:schemeClr val="tx1"/>
+                </a:solidFill>
+                <a:prstDash val="solid"/>
+                <a:round/>
+                <a:headEnd type="none" w="med" len="med"/>
+                <a:tailEnd type="none" w="med" len="med"/>
+              </a14:hiddenLine>
+            </a:ext>
+            <a:ext uri="{AF507438-7753-43e0-B8FC-AC1667EBCBE1}">
+              <a14:hiddenEffects xmlns:a14="http://schemas.microsoft.com/office/drawing/2010/main" xmlns="">
+                <a:effectLst>
+                  <a:outerShdw dist="35921" dir="2700000" algn="ctr" rotWithShape="0">
+                    <a:schemeClr val="bg2"/>
+                  </a:outerShdw>
+                </a:effectLst>
+              </a14:hiddenEffects>
+            </a:ext>
+          </a:extLst>
+        </p:spPr>
+      </p:cxnSp>
+      <mc:AlternateContent xmlns:mc="http://schemas.openxmlformats.org/markup-compatibility/2006" xmlns:a14="http://schemas.microsoft.com/office/drawing/2010/main">
+        <mc:Choice Requires="a14">
+          <p:sp>
+            <p:nvSpPr>
+              <p:cNvPr id="19" name="Textfeld 18">
+                <a:extLst>
+                  <a:ext uri="{FF2B5EF4-FFF2-40B4-BE49-F238E27FC236}">
+                    <a16:creationId xmlns:a16="http://schemas.microsoft.com/office/drawing/2014/main" id="{4443E55A-DC55-63CC-2E15-F19BF16B8470}"/>
+                  </a:ext>
+                </a:extLst>
+              </p:cNvPr>
+              <p:cNvSpPr txBox="1"/>
+              <p:nvPr/>
+            </p:nvSpPr>
+            <p:spPr>
+              <a:xfrm>
+                <a:off x="6672064" y="2907721"/>
+                <a:ext cx="1224136" cy="646331"/>
+              </a:xfrm>
+              <a:prstGeom prst="rect">
+                <a:avLst/>
+              </a:prstGeom>
+              <a:noFill/>
+            </p:spPr>
+            <p:txBody>
+              <a:bodyPr wrap="square">
+                <a:spAutoFit/>
+              </a:bodyPr>
+              <a:lstStyle/>
+              <a:p>
+                <a:pPr/>
+                <a14:m>
+                  <m:oMathPara xmlns:m="http://schemas.openxmlformats.org/officeDocument/2006/math">
+                    <m:oMathParaPr>
+                      <m:jc m:val="centerGroup"/>
+                    </m:oMathParaPr>
+                    <m:oMath xmlns:m="http://schemas.openxmlformats.org/officeDocument/2006/math">
+                      <m:r>
+                        <m:rPr>
+                          <m:sty m:val="p"/>
+                        </m:rPr>
+                        <a:rPr lang="de-DE" sz="3600" b="0" i="0" smtClean="0">
+                          <a:solidFill>
+                            <a:srgbClr val="FF0000"/>
+                          </a:solidFill>
+                          <a:latin typeface="Cambria Math" panose="02040503050406030204" pitchFamily="18" charset="0"/>
+                        </a:rPr>
+                        <m:t>Ω</m:t>
+                      </m:r>
+                    </m:oMath>
+                  </m:oMathPara>
+                </a14:m>
+                <a:endParaRPr lang="en-GB" sz="3600" dirty="0">
+                  <a:solidFill>
+                    <a:srgbClr val="FF0000"/>
+                  </a:solidFill>
+                </a:endParaRPr>
+              </a:p>
+            </p:txBody>
+          </p:sp>
+        </mc:Choice>
+        <mc:Fallback xmlns="">
+          <p:sp>
+            <p:nvSpPr>
+              <p:cNvPr id="19" name="Textfeld 18">
+                <a:extLst>
+                  <a:ext uri="{FF2B5EF4-FFF2-40B4-BE49-F238E27FC236}">
+                    <a16:creationId xmlns:a16="http://schemas.microsoft.com/office/drawing/2014/main" id="{4443E55A-DC55-63CC-2E15-F19BF16B8470}"/>
+                  </a:ext>
+                </a:extLst>
+              </p:cNvPr>
+              <p:cNvSpPr txBox="1">
+                <a:spLocks noRot="1" noChangeAspect="1" noMove="1" noResize="1" noEditPoints="1" noAdjustHandles="1" noChangeArrowheads="1" noChangeShapeType="1" noTextEdit="1"/>
+              </p:cNvSpPr>
+              <p:nvPr/>
+            </p:nvSpPr>
+            <p:spPr>
+              <a:xfrm>
+                <a:off x="6672064" y="2907721"/>
+                <a:ext cx="1224136" cy="646331"/>
+              </a:xfrm>
+              <a:prstGeom prst="rect">
+                <a:avLst/>
+              </a:prstGeom>
+              <a:blipFill>
+                <a:blip r:embed="rId5"/>
+                <a:stretch>
+                  <a:fillRect/>
+                </a:stretch>
+              </a:blipFill>
+            </p:spPr>
+            <p:txBody>
+              <a:bodyPr/>
+              <a:lstStyle/>
+              <a:p>
+                <a:r>
+                  <a:rPr lang="en-GB">
+                    <a:noFill/>
+                  </a:rPr>
+                  <a:t> </a:t>
+                </a:r>
+              </a:p>
+            </p:txBody>
+          </p:sp>
+        </mc:Fallback>
+      </mc:AlternateContent>
+      <mc:AlternateContent xmlns:mc="http://schemas.openxmlformats.org/markup-compatibility/2006" xmlns:a14="http://schemas.microsoft.com/office/drawing/2010/main">
+        <mc:Choice Requires="a14">
+          <p:sp>
+            <p:nvSpPr>
+              <p:cNvPr id="21" name="Textfeld 20">
+                <a:extLst>
+                  <a:ext uri="{FF2B5EF4-FFF2-40B4-BE49-F238E27FC236}">
+                    <a16:creationId xmlns:a16="http://schemas.microsoft.com/office/drawing/2014/main" id="{F7CBDFCA-F0D3-7B47-92E7-98AE40723462}"/>
+                  </a:ext>
+                </a:extLst>
+              </p:cNvPr>
+              <p:cNvSpPr txBox="1"/>
+              <p:nvPr/>
+            </p:nvSpPr>
+            <p:spPr>
+              <a:xfrm>
+                <a:off x="5985284" y="470089"/>
+                <a:ext cx="1205880" cy="646331"/>
+              </a:xfrm>
+              <a:prstGeom prst="rect">
+                <a:avLst/>
+              </a:prstGeom>
+              <a:noFill/>
+            </p:spPr>
+            <p:txBody>
+              <a:bodyPr wrap="square">
+                <a:spAutoFit/>
+              </a:bodyPr>
+              <a:lstStyle/>
+              <a:p>
+                <a:pPr marL="0" indent="0">
+                  <a:buNone/>
+                </a:pPr>
+                <a14:m>
+                  <m:oMathPara xmlns:m="http://schemas.openxmlformats.org/officeDocument/2006/math">
+                    <m:oMathParaPr>
+                      <m:jc m:val="centerGroup"/>
+                    </m:oMathParaPr>
+                    <m:oMath xmlns:m="http://schemas.openxmlformats.org/officeDocument/2006/math">
+                      <m:r>
+                        <a:rPr lang="de-DE" sz="3600" b="0" i="0" smtClean="0">
+                          <a:solidFill>
+                            <a:srgbClr val="FF0000"/>
+                          </a:solidFill>
+                          <a:latin typeface="Cambria Math" panose="02040503050406030204" pitchFamily="18" charset="0"/>
+                        </a:rPr>
+                        <m:t>𝜕</m:t>
+                      </m:r>
+                      <m:r>
+                        <m:rPr>
+                          <m:sty m:val="p"/>
+                        </m:rPr>
+                        <a:rPr lang="de-DE" sz="3600" b="0" i="0" smtClean="0">
+                          <a:solidFill>
+                            <a:srgbClr val="FF0000"/>
+                          </a:solidFill>
+                          <a:latin typeface="Cambria Math" panose="02040503050406030204" pitchFamily="18" charset="0"/>
+                        </a:rPr>
+                        <m:t>Ω</m:t>
+                      </m:r>
+                    </m:oMath>
+                  </m:oMathPara>
+                </a14:m>
+                <a:endParaRPr lang="de-DE" sz="3600" dirty="0">
+                  <a:solidFill>
+                    <a:srgbClr val="FF0000"/>
+                  </a:solidFill>
+                </a:endParaRPr>
+              </a:p>
+            </p:txBody>
+          </p:sp>
+        </mc:Choice>
+        <mc:Fallback xmlns="">
+          <p:sp>
+            <p:nvSpPr>
+              <p:cNvPr id="21" name="Textfeld 20">
+                <a:extLst>
+                  <a:ext uri="{FF2B5EF4-FFF2-40B4-BE49-F238E27FC236}">
+                    <a16:creationId xmlns:a16="http://schemas.microsoft.com/office/drawing/2014/main" id="{F7CBDFCA-F0D3-7B47-92E7-98AE40723462}"/>
+                  </a:ext>
+                </a:extLst>
+              </p:cNvPr>
+              <p:cNvSpPr txBox="1">
+                <a:spLocks noRot="1" noChangeAspect="1" noMove="1" noResize="1" noEditPoints="1" noAdjustHandles="1" noChangeArrowheads="1" noChangeShapeType="1" noTextEdit="1"/>
+              </p:cNvSpPr>
+              <p:nvPr/>
+            </p:nvSpPr>
+            <p:spPr>
+              <a:xfrm>
+                <a:off x="5985284" y="470089"/>
+                <a:ext cx="1205880" cy="646331"/>
+              </a:xfrm>
+              <a:prstGeom prst="rect">
+                <a:avLst/>
+              </a:prstGeom>
+              <a:blipFill>
+                <a:blip r:embed="rId6"/>
+                <a:stretch>
+                  <a:fillRect/>
+                </a:stretch>
+              </a:blipFill>
+            </p:spPr>
+            <p:txBody>
+              <a:bodyPr/>
+              <a:lstStyle/>
+              <a:p>
+                <a:r>
+                  <a:rPr lang="en-GB">
+                    <a:noFill/>
+                  </a:rPr>
+                  <a:t> </a:t>
+                </a:r>
+              </a:p>
+            </p:txBody>
+          </p:sp>
+        </mc:Fallback>
+      </mc:AlternateContent>
+      <p:sp>
+        <p:nvSpPr>
+          <p:cNvPr id="4" name="Textfeld 3">
+            <a:extLst>
+              <a:ext uri="{FF2B5EF4-FFF2-40B4-BE49-F238E27FC236}">
+                <a16:creationId xmlns:a16="http://schemas.microsoft.com/office/drawing/2014/main" id="{C34AA7E6-8AFF-A455-7128-1FFF37A57273}"/>
+              </a:ext>
+            </a:extLst>
+          </p:cNvPr>
+          <p:cNvSpPr txBox="1"/>
+          <p:nvPr/>
+        </p:nvSpPr>
+        <p:spPr>
+          <a:xfrm>
+            <a:off x="8674725" y="3429000"/>
+            <a:ext cx="469275" cy="369332"/>
+          </a:xfrm>
+          <a:prstGeom prst="rect">
+            <a:avLst/>
+          </a:prstGeom>
+          <a:noFill/>
+        </p:spPr>
+        <p:txBody>
+          <a:bodyPr wrap="square" rtlCol="0">
+            <a:spAutoFit/>
+          </a:bodyPr>
+          <a:lstStyle/>
+          <a:p>
+            <a:r>
+              <a:rPr lang="de-DE" dirty="0"/>
+              <a:t>[2]</a:t>
+            </a:r>
+            <a:endParaRPr lang="en-GB" dirty="0"/>
+          </a:p>
+        </p:txBody>
+      </p:sp>
     </p:spTree>
     <p:extLst>
       <p:ext uri="{BB962C8B-B14F-4D97-AF65-F5344CB8AC3E}">
@@ -4984,80 +5926,61 @@
             <p:ph idx="1"/>
           </p:nvPr>
         </p:nvSpPr>
-        <p:spPr/>
+        <p:spPr>
+          <a:xfrm>
+            <a:off x="466725" y="1196752"/>
+            <a:ext cx="8208000" cy="4248150"/>
+          </a:xfrm>
+        </p:spPr>
         <p:txBody>
           <a:bodyPr/>
           <a:lstStyle/>
           <a:p>
             <a:r>
               <a:rPr lang="en-US" noProof="0" dirty="0"/>
-              <a:t>Solving PDEs and finding the desired functions </a:t>
+              <a:t>Solving PDEs and finding the desired function is hard and slow</a:t>
+            </a:r>
+          </a:p>
+          <a:p>
+            <a:r>
+              <a:rPr lang="en-US" dirty="0"/>
+              <a:t>Let’s try to naively apply a Neural Network</a:t>
+            </a:r>
+          </a:p>
+          <a:p>
+            <a:r>
+              <a:rPr lang="en-US" noProof="0" dirty="0"/>
+              <a:t>Severe limitation –&gt; NNs are </a:t>
+            </a:r>
+            <a:r>
+              <a:rPr lang="en-US" b="1" noProof="0" dirty="0"/>
+              <a:t>not </a:t>
+            </a:r>
+            <a:r>
+              <a:rPr lang="en-US" noProof="0" dirty="0"/>
+              <a:t>scale and discretization invariant</a:t>
             </a:r>
           </a:p>
           <a:p>
             <a:pPr lvl="1"/>
             <a:r>
+              <a:rPr lang="en-US" dirty="0"/>
+              <a:t>If the scale of the inference problem changes, it becomes useless</a:t>
+            </a:r>
+          </a:p>
+          <a:p>
+            <a:r>
               <a:rPr lang="en-US" noProof="0" dirty="0"/>
-              <a:t>Hard</a:t>
+              <a:t>Another problem –&gt; NNs do not return a function and can’t be queried everywhere</a:t>
             </a:r>
           </a:p>
           <a:p>
             <a:pPr lvl="1"/>
             <a:r>
-              <a:rPr lang="en-US" noProof="0" dirty="0"/>
-              <a:t>Slow</a:t>
-            </a:r>
-          </a:p>
-          <a:p>
-            <a:pPr lvl="1"/>
-            <a:r>
-              <a:rPr lang="en-US" noProof="0" dirty="0"/>
-              <a:t>Expensive</a:t>
-            </a:r>
-          </a:p>
-          <a:p>
-            <a:r>
               <a:rPr lang="en-US" dirty="0"/>
-              <a:t>Lets try to naively apply a Neural Network</a:t>
-            </a:r>
-          </a:p>
-          <a:p>
-            <a:r>
-              <a:rPr lang="en-US" noProof="0" dirty="0"/>
-              <a:t>Severe limitation –&gt; NNs a re </a:t>
-            </a:r>
-            <a:r>
-              <a:rPr lang="en-US" b="1" noProof="0" dirty="0"/>
-              <a:t>not </a:t>
-            </a:r>
-            <a:r>
-              <a:rPr lang="en-US" noProof="0" dirty="0"/>
-              <a:t>scale and discretization invariant</a:t>
-            </a:r>
-          </a:p>
-          <a:p>
-            <a:pPr lvl="1"/>
-            <a:r>
-              <a:rPr lang="en-US" dirty="0"/>
-              <a:t>If the scale of the inference problem changes, it becomes useless</a:t>
-            </a:r>
-          </a:p>
-          <a:p>
-            <a:r>
-              <a:rPr lang="en-US" noProof="0" dirty="0"/>
-              <a:t>Another problem –&gt; NNs do not return a function and can’t be queried everywhere</a:t>
-            </a:r>
-          </a:p>
-          <a:p>
-            <a:pPr lvl="1"/>
-            <a:r>
-              <a:rPr lang="en-US" dirty="0"/>
-              <a:t>Training on meshes is impossible</a:t>
-            </a:r>
-            <a:r>
-              <a:rPr lang="en-US" noProof="0" dirty="0"/>
-              <a:t> </a:t>
-            </a:r>
+              <a:t>Training on variable meshes difficult</a:t>
+            </a:r>
+            <a:endParaRPr lang="en-US" noProof="0" dirty="0"/>
           </a:p>
           <a:p>
             <a:pPr lvl="1"/>
@@ -5071,6 +5994,72 @@
           </a:p>
           <a:p>
             <a:endParaRPr lang="en-US" noProof="0" dirty="0"/>
+          </a:p>
+        </p:txBody>
+      </p:sp>
+      <p:pic>
+        <p:nvPicPr>
+          <p:cNvPr id="5" name="Grafik 4">
+            <a:extLst>
+              <a:ext uri="{FF2B5EF4-FFF2-40B4-BE49-F238E27FC236}">
+                <a16:creationId xmlns:a16="http://schemas.microsoft.com/office/drawing/2014/main" id="{05445FA8-653D-47D9-D416-FFF24A7A3B51}"/>
+              </a:ext>
+            </a:extLst>
+          </p:cNvPr>
+          <p:cNvPicPr>
+            <a:picLocks noChangeAspect="1"/>
+          </p:cNvPicPr>
+          <p:nvPr/>
+        </p:nvPicPr>
+        <p:blipFill>
+          <a:blip r:embed="rId2"/>
+          <a:stretch>
+            <a:fillRect/>
+          </a:stretch>
+        </p:blipFill>
+        <p:spPr>
+          <a:xfrm>
+            <a:off x="1691772" y="3789040"/>
+            <a:ext cx="5760456" cy="2297955"/>
+          </a:xfrm>
+          <a:prstGeom prst="rect">
+            <a:avLst/>
+          </a:prstGeom>
+        </p:spPr>
+      </p:pic>
+      <p:sp>
+        <p:nvSpPr>
+          <p:cNvPr id="4" name="Textfeld 3">
+            <a:extLst>
+              <a:ext uri="{FF2B5EF4-FFF2-40B4-BE49-F238E27FC236}">
+                <a16:creationId xmlns:a16="http://schemas.microsoft.com/office/drawing/2014/main" id="{11292BE8-9BC2-0C07-6448-28A90B32FA24}"/>
+              </a:ext>
+            </a:extLst>
+          </p:cNvPr>
+          <p:cNvSpPr txBox="1"/>
+          <p:nvPr/>
+        </p:nvSpPr>
+        <p:spPr>
+          <a:xfrm>
+            <a:off x="6983356" y="5805264"/>
+            <a:ext cx="720080" cy="369332"/>
+          </a:xfrm>
+          <a:prstGeom prst="rect">
+            <a:avLst/>
+          </a:prstGeom>
+          <a:noFill/>
+        </p:spPr>
+        <p:txBody>
+          <a:bodyPr wrap="square" rtlCol="0">
+            <a:spAutoFit/>
+          </a:bodyPr>
+          <a:lstStyle/>
+          <a:p>
+            <a:r>
+              <a:rPr lang="de-DE" dirty="0"/>
+              <a:t>[0]</a:t>
+            </a:r>
+            <a:endParaRPr lang="en-GB" dirty="0"/>
           </a:p>
         </p:txBody>
       </p:sp>
@@ -5149,12 +6138,1601 @@
           </a:p>
         </p:txBody>
       </p:sp>
+      <mc:AlternateContent xmlns:mc="http://schemas.openxmlformats.org/markup-compatibility/2006">
+        <mc:Choice xmlns:a14="http://schemas.microsoft.com/office/drawing/2010/main" Requires="a14">
+          <p:sp>
+            <p:nvSpPr>
+              <p:cNvPr id="3" name="Inhaltsplatzhalter 2">
+                <a:extLst>
+                  <a:ext uri="{FF2B5EF4-FFF2-40B4-BE49-F238E27FC236}">
+                    <a16:creationId xmlns:a16="http://schemas.microsoft.com/office/drawing/2014/main" id="{107DD1B7-9055-A5E0-4EDF-4071AFC7C2F7}"/>
+                  </a:ext>
+                </a:extLst>
+              </p:cNvPr>
+              <p:cNvSpPr>
+                <a:spLocks noGrp="1"/>
+              </p:cNvSpPr>
+              <p:nvPr>
+                <p:ph idx="1"/>
+              </p:nvPr>
+            </p:nvSpPr>
+            <p:spPr>
+              <a:xfrm>
+                <a:off x="466725" y="1214804"/>
+                <a:ext cx="4572000" cy="4248150"/>
+              </a:xfrm>
+            </p:spPr>
+            <p:txBody>
+              <a:bodyPr/>
+              <a:lstStyle/>
+              <a:p>
+                <a:pPr>
+                  <a:lnSpc>
+                    <a:spcPct val="150000"/>
+                  </a:lnSpc>
+                </a:pPr>
+                <a:r>
+                  <a:rPr lang="en-US" noProof="0" dirty="0"/>
+                  <a:t>Green‘s functions </a:t>
+                </a:r>
+                <a14:m>
+                  <m:oMath xmlns:m="http://schemas.openxmlformats.org/officeDocument/2006/math">
+                    <m:r>
+                      <a:rPr lang="en-US" i="1" noProof="0" smtClean="0">
+                        <a:latin typeface="Cambria Math" panose="02040503050406030204" pitchFamily="18" charset="0"/>
+                        <a:ea typeface="Cambria Math" panose="02040503050406030204" pitchFamily="18" charset="0"/>
+                      </a:rPr>
+                      <m:t>𝒢</m:t>
+                    </m:r>
+                    <m:r>
+                      <a:rPr lang="en-US" i="1" noProof="0" smtClean="0">
+                        <a:latin typeface="Cambria Math" panose="02040503050406030204" pitchFamily="18" charset="0"/>
+                        <a:ea typeface="Cambria Math" panose="02040503050406030204" pitchFamily="18" charset="0"/>
+                      </a:rPr>
+                      <m:t> </m:t>
+                    </m:r>
+                    <m:d>
+                      <m:dPr>
+                        <m:ctrlPr>
+                          <a:rPr lang="en-US" i="1" noProof="0" smtClean="0">
+                            <a:latin typeface="Cambria Math" panose="02040503050406030204" pitchFamily="18" charset="0"/>
+                          </a:rPr>
+                        </m:ctrlPr>
+                      </m:dPr>
+                      <m:e>
+                        <m:acc>
+                          <m:accPr>
+                            <m:chr m:val="⃗"/>
+                            <m:ctrlPr>
+                              <a:rPr lang="en-US" i="1" noProof="0" smtClean="0">
+                                <a:latin typeface="Cambria Math" panose="02040503050406030204" pitchFamily="18" charset="0"/>
+                              </a:rPr>
+                            </m:ctrlPr>
+                          </m:accPr>
+                          <m:e>
+                            <m:r>
+                              <a:rPr lang="en-US" i="1" noProof="0" smtClean="0">
+                                <a:latin typeface="Cambria Math" panose="02040503050406030204" pitchFamily="18" charset="0"/>
+                              </a:rPr>
+                              <m:t>𝑦</m:t>
+                            </m:r>
+                          </m:e>
+                        </m:acc>
+                        <m:r>
+                          <a:rPr lang="en-US" i="1" noProof="0" smtClean="0">
+                            <a:latin typeface="Cambria Math" panose="02040503050406030204" pitchFamily="18" charset="0"/>
+                          </a:rPr>
+                          <m:t>, </m:t>
+                        </m:r>
+                        <m:acc>
+                          <m:accPr>
+                            <m:chr m:val="⃗"/>
+                            <m:ctrlPr>
+                              <a:rPr lang="en-US" i="1" noProof="0" smtClean="0">
+                                <a:latin typeface="Cambria Math" panose="02040503050406030204" pitchFamily="18" charset="0"/>
+                              </a:rPr>
+                            </m:ctrlPr>
+                          </m:accPr>
+                          <m:e>
+                            <m:r>
+                              <a:rPr lang="en-US" i="1" noProof="0" smtClean="0">
+                                <a:latin typeface="Cambria Math" panose="02040503050406030204" pitchFamily="18" charset="0"/>
+                              </a:rPr>
+                              <m:t>𝑥</m:t>
+                            </m:r>
+                          </m:e>
+                        </m:acc>
+                      </m:e>
+                    </m:d>
+                  </m:oMath>
+                </a14:m>
+                <a:r>
+                  <a:rPr lang="en-US" noProof="0" dirty="0"/>
+                  <a:t> are a </a:t>
+                </a:r>
+                <a:r>
+                  <a:rPr lang="en-US" i="1" noProof="0" dirty="0"/>
+                  <a:t>theoretical </a:t>
+                </a:r>
+                <a:r>
+                  <a:rPr lang="en-US" noProof="0" dirty="0"/>
+                  <a:t>solution to any PDE</a:t>
+                </a:r>
+              </a:p>
+              <a:p>
+                <a:pPr>
+                  <a:lnSpc>
+                    <a:spcPct val="150000"/>
+                  </a:lnSpc>
+                </a:pPr>
+                <a:r>
+                  <a:rPr lang="en-US" noProof="0" dirty="0"/>
+                  <a:t>If we </a:t>
+                </a:r>
+                <a:r>
+                  <a:rPr lang="en-US" i="1" noProof="0" dirty="0"/>
+                  <a:t>knew</a:t>
+                </a:r>
+                <a:r>
+                  <a:rPr lang="en-US" noProof="0" dirty="0"/>
+                  <a:t> the Green‘s function </a:t>
+                </a:r>
+                <a:r>
+                  <a:rPr lang="en-US" noProof="0" dirty="0">
+                    <a:sym typeface="Wingdings" panose="05000000000000000000" pitchFamily="2" charset="2"/>
+                  </a:rPr>
+                  <a:t> </a:t>
+                </a:r>
+                <a:r>
+                  <a:rPr lang="en-US" noProof="0" dirty="0"/>
+                  <a:t>get the solution </a:t>
+                </a:r>
+                <a14:m>
+                  <m:oMath xmlns:m="http://schemas.openxmlformats.org/officeDocument/2006/math">
+                    <m:r>
+                      <a:rPr lang="en-US" sz="1800" b="0" i="1" noProof="0" smtClean="0">
+                        <a:latin typeface="Cambria Math" panose="02040503050406030204" pitchFamily="18" charset="0"/>
+                      </a:rPr>
+                      <m:t>𝑢</m:t>
+                    </m:r>
+                    <m:d>
+                      <m:dPr>
+                        <m:ctrlPr>
+                          <a:rPr lang="en-US" sz="1800" b="0" i="1" noProof="0" smtClean="0">
+                            <a:latin typeface="Cambria Math" panose="02040503050406030204" pitchFamily="18" charset="0"/>
+                          </a:rPr>
+                        </m:ctrlPr>
+                      </m:dPr>
+                      <m:e>
+                        <m:acc>
+                          <m:accPr>
+                            <m:chr m:val="⃗"/>
+                            <m:ctrlPr>
+                              <a:rPr lang="en-US" sz="1800" b="0" i="1" noProof="0" smtClean="0">
+                                <a:latin typeface="Cambria Math" panose="02040503050406030204" pitchFamily="18" charset="0"/>
+                              </a:rPr>
+                            </m:ctrlPr>
+                          </m:accPr>
+                          <m:e>
+                            <m:r>
+                              <a:rPr lang="en-US" sz="1800" b="0" i="1" noProof="0" smtClean="0">
+                                <a:latin typeface="Cambria Math" panose="02040503050406030204" pitchFamily="18" charset="0"/>
+                              </a:rPr>
+                              <m:t>𝑥</m:t>
+                            </m:r>
+                          </m:e>
+                        </m:acc>
+                      </m:e>
+                    </m:d>
+                  </m:oMath>
+                </a14:m>
+                <a:r>
+                  <a:rPr lang="en-US" noProof="0" dirty="0"/>
+                  <a:t> everywhere on our domain </a:t>
+                </a:r>
+                <a14:m>
+                  <m:oMath xmlns:m="http://schemas.openxmlformats.org/officeDocument/2006/math">
+                    <m:r>
+                      <m:rPr>
+                        <m:sty m:val="p"/>
+                      </m:rPr>
+                      <a:rPr lang="en-US" noProof="0" smtClean="0">
+                        <a:latin typeface="Cambria Math" panose="02040503050406030204" pitchFamily="18" charset="0"/>
+                      </a:rPr>
+                      <m:t>Ω</m:t>
+                    </m:r>
+                  </m:oMath>
+                </a14:m>
+                <a:endParaRPr lang="en-US" noProof="0" dirty="0"/>
+              </a:p>
+              <a:p>
+                <a:pPr>
+                  <a:lnSpc>
+                    <a:spcPct val="150000"/>
+                  </a:lnSpc>
+                </a:pPr>
+                <a14:m>
+                  <m:oMath xmlns:m="http://schemas.openxmlformats.org/officeDocument/2006/math">
+                    <m:r>
+                      <a:rPr lang="en-US" i="1" noProof="0" smtClean="0">
+                        <a:latin typeface="Cambria Math" panose="02040503050406030204" pitchFamily="18" charset="0"/>
+                        <a:ea typeface="Cambria Math" panose="02040503050406030204" pitchFamily="18" charset="0"/>
+                      </a:rPr>
+                      <m:t>𝒢</m:t>
+                    </m:r>
+                    <m:d>
+                      <m:dPr>
+                        <m:ctrlPr>
+                          <a:rPr lang="en-US" i="1" noProof="0" smtClean="0">
+                            <a:latin typeface="Cambria Math" panose="02040503050406030204" pitchFamily="18" charset="0"/>
+                          </a:rPr>
+                        </m:ctrlPr>
+                      </m:dPr>
+                      <m:e>
+                        <m:acc>
+                          <m:accPr>
+                            <m:chr m:val="⃗"/>
+                            <m:ctrlPr>
+                              <a:rPr lang="en-US" i="1" noProof="0" smtClean="0">
+                                <a:latin typeface="Cambria Math" panose="02040503050406030204" pitchFamily="18" charset="0"/>
+                              </a:rPr>
+                            </m:ctrlPr>
+                          </m:accPr>
+                          <m:e>
+                            <m:r>
+                              <a:rPr lang="en-US" i="1" noProof="0" smtClean="0">
+                                <a:latin typeface="Cambria Math" panose="02040503050406030204" pitchFamily="18" charset="0"/>
+                              </a:rPr>
+                              <m:t>𝑦</m:t>
+                            </m:r>
+                          </m:e>
+                        </m:acc>
+                        <m:r>
+                          <a:rPr lang="en-US" i="1" noProof="0" smtClean="0">
+                            <a:latin typeface="Cambria Math" panose="02040503050406030204" pitchFamily="18" charset="0"/>
+                          </a:rPr>
+                          <m:t>, </m:t>
+                        </m:r>
+                        <m:acc>
+                          <m:accPr>
+                            <m:chr m:val="⃗"/>
+                            <m:ctrlPr>
+                              <a:rPr lang="en-US" i="1" noProof="0" smtClean="0">
+                                <a:latin typeface="Cambria Math" panose="02040503050406030204" pitchFamily="18" charset="0"/>
+                              </a:rPr>
+                            </m:ctrlPr>
+                          </m:accPr>
+                          <m:e>
+                            <m:r>
+                              <a:rPr lang="en-US" i="1" noProof="0" smtClean="0">
+                                <a:latin typeface="Cambria Math" panose="02040503050406030204" pitchFamily="18" charset="0"/>
+                              </a:rPr>
+                              <m:t>𝑥</m:t>
+                            </m:r>
+                          </m:e>
+                        </m:acc>
+                      </m:e>
+                    </m:d>
+                  </m:oMath>
+                </a14:m>
+                <a:r>
+                  <a:rPr lang="en-US" noProof="0" dirty="0"/>
+                  <a:t> is only analytically tractable for the simplest problems</a:t>
+                </a:r>
+              </a:p>
+              <a:p>
+                <a:pPr>
+                  <a:lnSpc>
+                    <a:spcPct val="150000"/>
+                  </a:lnSpc>
+                </a:pPr>
+                <a:r>
+                  <a:rPr lang="en-US" noProof="0" dirty="0"/>
+                  <a:t>Let’s do AI and simply approximate the </a:t>
+                </a:r>
+                <a:r>
+                  <a:rPr lang="en-US" i="1" noProof="0" dirty="0"/>
+                  <a:t>true</a:t>
+                </a:r>
+                <a:r>
+                  <a:rPr lang="en-US" noProof="0" dirty="0"/>
+                  <a:t> Green‘s function  </a:t>
+                </a:r>
+                <a14:m>
+                  <m:oMath xmlns:m="http://schemas.openxmlformats.org/officeDocument/2006/math">
+                    <m:sSup>
+                      <m:sSupPr>
+                        <m:ctrlPr>
+                          <a:rPr lang="en-US" i="1" noProof="0" smtClean="0">
+                            <a:latin typeface="Cambria Math" panose="02040503050406030204" pitchFamily="18" charset="0"/>
+                            <a:ea typeface="Cambria Math" panose="02040503050406030204" pitchFamily="18" charset="0"/>
+                          </a:rPr>
+                        </m:ctrlPr>
+                      </m:sSupPr>
+                      <m:e>
+                        <m:r>
+                          <a:rPr lang="en-US" i="1" noProof="0" smtClean="0">
+                            <a:latin typeface="Cambria Math" panose="02040503050406030204" pitchFamily="18" charset="0"/>
+                            <a:ea typeface="Cambria Math" panose="02040503050406030204" pitchFamily="18" charset="0"/>
+                          </a:rPr>
+                          <m:t>𝒢</m:t>
+                        </m:r>
+                      </m:e>
+                      <m:sup>
+                        <m:r>
+                          <a:rPr lang="en-US" b="0" i="1" noProof="0" smtClean="0">
+                            <a:latin typeface="Cambria Math" panose="02040503050406030204" pitchFamily="18" charset="0"/>
+                            <a:ea typeface="Cambria Math" panose="02040503050406030204" pitchFamily="18" charset="0"/>
+                          </a:rPr>
+                          <m:t>†</m:t>
+                        </m:r>
+                      </m:sup>
+                    </m:sSup>
+                  </m:oMath>
+                </a14:m>
+                <a:r>
+                  <a:rPr lang="en-US" noProof="0" dirty="0"/>
+                  <a:t>!</a:t>
+                </a:r>
+              </a:p>
+              <a:p>
+                <a:endParaRPr lang="en-US" noProof="0" dirty="0"/>
+              </a:p>
+            </p:txBody>
+          </p:sp>
+        </mc:Choice>
+        <mc:Fallback>
+          <p:sp>
+            <p:nvSpPr>
+              <p:cNvPr id="3" name="Inhaltsplatzhalter 2">
+                <a:extLst>
+                  <a:ext uri="{FF2B5EF4-FFF2-40B4-BE49-F238E27FC236}">
+                    <a16:creationId xmlns:a16="http://schemas.microsoft.com/office/drawing/2014/main" id="{107DD1B7-9055-A5E0-4EDF-4071AFC7C2F7}"/>
+                  </a:ext>
+                </a:extLst>
+              </p:cNvPr>
+              <p:cNvSpPr>
+                <a:spLocks noGrp="1" noRot="1" noChangeAspect="1" noMove="1" noResize="1" noEditPoints="1" noAdjustHandles="1" noChangeArrowheads="1" noChangeShapeType="1" noTextEdit="1"/>
+              </p:cNvSpPr>
+              <p:nvPr>
+                <p:ph idx="1"/>
+              </p:nvPr>
+            </p:nvSpPr>
+            <p:spPr>
+              <a:xfrm>
+                <a:off x="466725" y="1214804"/>
+                <a:ext cx="4572000" cy="4248150"/>
+              </a:xfrm>
+              <a:blipFill>
+                <a:blip r:embed="rId2"/>
+                <a:stretch>
+                  <a:fillRect l="-2933" t="-717"/>
+                </a:stretch>
+              </a:blipFill>
+            </p:spPr>
+            <p:txBody>
+              <a:bodyPr/>
+              <a:lstStyle/>
+              <a:p>
+                <a:r>
+                  <a:rPr lang="en-GB">
+                    <a:noFill/>
+                  </a:rPr>
+                  <a:t> </a:t>
+                </a:r>
+              </a:p>
+            </p:txBody>
+          </p:sp>
+        </mc:Fallback>
+      </mc:AlternateContent>
+      <mc:AlternateContent xmlns:mc="http://schemas.openxmlformats.org/markup-compatibility/2006">
+        <mc:Choice xmlns:a14="http://schemas.microsoft.com/office/drawing/2010/main" Requires="a14">
+          <p:sp>
+            <p:nvSpPr>
+              <p:cNvPr id="5" name="Textfeld 4">
+                <a:extLst>
+                  <a:ext uri="{FF2B5EF4-FFF2-40B4-BE49-F238E27FC236}">
+                    <a16:creationId xmlns:a16="http://schemas.microsoft.com/office/drawing/2014/main" id="{F4BFC3FE-08CA-5424-913A-74C80C89D376}"/>
+                  </a:ext>
+                </a:extLst>
+              </p:cNvPr>
+              <p:cNvSpPr txBox="1"/>
+              <p:nvPr/>
+            </p:nvSpPr>
+            <p:spPr>
+              <a:xfrm>
+                <a:off x="5436096" y="1550858"/>
+                <a:ext cx="3419872" cy="1235788"/>
+              </a:xfrm>
+              <a:prstGeom prst="rect">
+                <a:avLst/>
+              </a:prstGeom>
+              <a:noFill/>
+            </p:spPr>
+            <p:txBody>
+              <a:bodyPr wrap="square">
+                <a:spAutoFit/>
+              </a:bodyPr>
+              <a:lstStyle/>
+              <a:p>
+                <a:pPr marL="0" indent="0">
+                  <a:buNone/>
+                </a:pPr>
+                <a14:m>
+                  <m:oMathPara xmlns:m="http://schemas.openxmlformats.org/officeDocument/2006/math">
+                    <m:oMathParaPr>
+                      <m:jc m:val="centerGroup"/>
+                    </m:oMathParaPr>
+                    <m:oMath xmlns:m="http://schemas.openxmlformats.org/officeDocument/2006/math">
+                      <m:acc>
+                        <m:accPr>
+                          <m:chr m:val="̿"/>
+                          <m:ctrlPr>
+                            <a:rPr lang="de-DE" sz="1800" b="0" i="1" smtClean="0">
+                              <a:latin typeface="Cambria Math" panose="02040503050406030204" pitchFamily="18" charset="0"/>
+                            </a:rPr>
+                          </m:ctrlPr>
+                        </m:accPr>
+                        <m:e>
+                          <m:r>
+                            <a:rPr lang="de-DE" sz="1800" b="0" i="1" smtClean="0">
+                              <a:latin typeface="Cambria Math" panose="02040503050406030204" pitchFamily="18" charset="0"/>
+                            </a:rPr>
+                            <m:t>𝐿</m:t>
+                          </m:r>
+                        </m:e>
+                      </m:acc>
+                      <m:r>
+                        <a:rPr lang="de-DE" sz="1800" b="0" i="1" smtClean="0">
+                          <a:latin typeface="Cambria Math" panose="02040503050406030204" pitchFamily="18" charset="0"/>
+                        </a:rPr>
+                        <m:t>𝑢</m:t>
+                      </m:r>
+                      <m:d>
+                        <m:dPr>
+                          <m:ctrlPr>
+                            <a:rPr lang="de-DE" sz="1800" b="0" i="1" smtClean="0">
+                              <a:latin typeface="Cambria Math" panose="02040503050406030204" pitchFamily="18" charset="0"/>
+                            </a:rPr>
+                          </m:ctrlPr>
+                        </m:dPr>
+                        <m:e>
+                          <m:acc>
+                            <m:accPr>
+                              <m:chr m:val="⃗"/>
+                              <m:ctrlPr>
+                                <a:rPr lang="de-DE" sz="1800" b="0" i="1" smtClean="0">
+                                  <a:latin typeface="Cambria Math" panose="02040503050406030204" pitchFamily="18" charset="0"/>
+                                </a:rPr>
+                              </m:ctrlPr>
+                            </m:accPr>
+                            <m:e>
+                              <m:r>
+                                <a:rPr lang="de-DE" sz="1800" b="0" i="1" smtClean="0">
+                                  <a:latin typeface="Cambria Math" panose="02040503050406030204" pitchFamily="18" charset="0"/>
+                                </a:rPr>
+                                <m:t>𝑥</m:t>
+                              </m:r>
+                            </m:e>
+                          </m:acc>
+                        </m:e>
+                      </m:d>
+                      <m:r>
+                        <a:rPr lang="de-DE" sz="1800" b="0" i="1" smtClean="0">
+                          <a:latin typeface="Cambria Math" panose="02040503050406030204" pitchFamily="18" charset="0"/>
+                        </a:rPr>
+                        <m:t>=</m:t>
+                      </m:r>
+                      <m:r>
+                        <a:rPr lang="de-DE" sz="1800" b="0" i="1" smtClean="0">
+                          <a:latin typeface="Cambria Math" panose="02040503050406030204" pitchFamily="18" charset="0"/>
+                        </a:rPr>
+                        <m:t>𝑏</m:t>
+                      </m:r>
+                      <m:r>
+                        <a:rPr lang="de-DE" sz="1800" b="0" i="1" smtClean="0">
+                          <a:latin typeface="Cambria Math" panose="02040503050406030204" pitchFamily="18" charset="0"/>
+                        </a:rPr>
+                        <m:t>;    </m:t>
+                      </m:r>
+                      <m:acc>
+                        <m:accPr>
+                          <m:chr m:val="⃗"/>
+                          <m:ctrlPr>
+                            <a:rPr lang="de-DE" sz="1800" i="1">
+                              <a:latin typeface="Cambria Math" panose="02040503050406030204" pitchFamily="18" charset="0"/>
+                            </a:rPr>
+                          </m:ctrlPr>
+                        </m:accPr>
+                        <m:e>
+                          <m:r>
+                            <a:rPr lang="de-DE" sz="1800" i="1">
+                              <a:latin typeface="Cambria Math" panose="02040503050406030204" pitchFamily="18" charset="0"/>
+                            </a:rPr>
+                            <m:t>𝑥</m:t>
+                          </m:r>
+                        </m:e>
+                      </m:acc>
+                      <m:r>
+                        <a:rPr lang="de-DE" sz="1800" b="0" i="1" smtClean="0">
+                          <a:latin typeface="Cambria Math" panose="02040503050406030204" pitchFamily="18" charset="0"/>
+                        </a:rPr>
+                        <m:t>∈</m:t>
+                      </m:r>
+                      <m:r>
+                        <m:rPr>
+                          <m:sty m:val="p"/>
+                        </m:rPr>
+                        <a:rPr lang="de-DE" sz="1800" b="0" i="0" smtClean="0">
+                          <a:latin typeface="Cambria Math" panose="02040503050406030204" pitchFamily="18" charset="0"/>
+                        </a:rPr>
+                        <m:t>Ω</m:t>
+                      </m:r>
+                    </m:oMath>
+                  </m:oMathPara>
+                </a14:m>
+                <a:endParaRPr lang="de-DE" sz="1800" b="0" i="0" dirty="0">
+                  <a:latin typeface="Cambria Math" panose="02040503050406030204" pitchFamily="18" charset="0"/>
+                </a:endParaRPr>
+              </a:p>
+              <a:p>
+                <a:pPr marL="0" indent="0">
+                  <a:buNone/>
+                </a:pPr>
+                <a:endParaRPr lang="de-DE" sz="1800" b="0" i="0" dirty="0">
+                  <a:latin typeface="Cambria Math" panose="02040503050406030204" pitchFamily="18" charset="0"/>
+                </a:endParaRPr>
+              </a:p>
+              <a:p>
+                <a:pPr marL="0" indent="0" algn="ctr">
+                  <a:buNone/>
+                </a:pPr>
+                <a14:m>
+                  <m:oMathPara xmlns:m="http://schemas.openxmlformats.org/officeDocument/2006/math">
+                    <m:oMathParaPr>
+                      <m:jc m:val="centerGroup"/>
+                    </m:oMathParaPr>
+                    <m:oMath xmlns:m="http://schemas.openxmlformats.org/officeDocument/2006/math">
+                      <m:r>
+                        <a:rPr lang="de-DE" sz="1800" b="0" i="1" smtClean="0">
+                          <a:latin typeface="Cambria Math" panose="02040503050406030204" pitchFamily="18" charset="0"/>
+                        </a:rPr>
+                        <m:t>𝑢</m:t>
+                      </m:r>
+                      <m:d>
+                        <m:dPr>
+                          <m:ctrlPr>
+                            <a:rPr lang="de-DE" sz="1800" b="0" i="1" smtClean="0">
+                              <a:latin typeface="Cambria Math" panose="02040503050406030204" pitchFamily="18" charset="0"/>
+                            </a:rPr>
+                          </m:ctrlPr>
+                        </m:dPr>
+                        <m:e>
+                          <m:acc>
+                            <m:accPr>
+                              <m:chr m:val="⃗"/>
+                              <m:ctrlPr>
+                                <a:rPr lang="de-DE" sz="1800" b="0" i="1" smtClean="0">
+                                  <a:latin typeface="Cambria Math" panose="02040503050406030204" pitchFamily="18" charset="0"/>
+                                </a:rPr>
+                              </m:ctrlPr>
+                            </m:accPr>
+                            <m:e>
+                              <m:r>
+                                <a:rPr lang="de-DE" sz="1800" b="0" i="1" smtClean="0">
+                                  <a:latin typeface="Cambria Math" panose="02040503050406030204" pitchFamily="18" charset="0"/>
+                                </a:rPr>
+                                <m:t>𝑥</m:t>
+                              </m:r>
+                            </m:e>
+                          </m:acc>
+                        </m:e>
+                      </m:d>
+                      <m:r>
+                        <a:rPr lang="de-DE" sz="1800" b="0" i="1" smtClean="0">
+                          <a:latin typeface="Cambria Math" panose="02040503050406030204" pitchFamily="18" charset="0"/>
+                        </a:rPr>
+                        <m:t>=</m:t>
+                      </m:r>
+                      <m:nary>
+                        <m:naryPr>
+                          <m:ctrlPr>
+                            <a:rPr lang="de-DE" sz="1800" b="0" i="1" smtClean="0">
+                              <a:latin typeface="Cambria Math" panose="02040503050406030204" pitchFamily="18" charset="0"/>
+                            </a:rPr>
+                          </m:ctrlPr>
+                        </m:naryPr>
+                        <m:sub>
+                          <m:r>
+                            <m:rPr>
+                              <m:sty m:val="p"/>
+                            </m:rPr>
+                            <a:rPr lang="de-DE" sz="1800" b="0" i="0" smtClean="0">
+                              <a:latin typeface="Cambria Math" panose="02040503050406030204" pitchFamily="18" charset="0"/>
+                            </a:rPr>
+                            <m:t>Ω</m:t>
+                          </m:r>
+                        </m:sub>
+                        <m:sup>
+                          <m:r>
+                            <a:rPr lang="de-DE" sz="1800" b="0" i="1" smtClean="0">
+                              <a:latin typeface="Cambria Math" panose="02040503050406030204" pitchFamily="18" charset="0"/>
+                            </a:rPr>
+                            <m:t> </m:t>
+                          </m:r>
+                        </m:sup>
+                        <m:e>
+                          <m:r>
+                            <a:rPr lang="de-DE" i="1">
+                              <a:latin typeface="Cambria Math" panose="02040503050406030204" pitchFamily="18" charset="0"/>
+                              <a:ea typeface="Cambria Math" panose="02040503050406030204" pitchFamily="18" charset="0"/>
+                            </a:rPr>
+                            <m:t>𝒢</m:t>
+                          </m:r>
+                          <m:d>
+                            <m:dPr>
+                              <m:ctrlPr>
+                                <a:rPr lang="de-DE" i="1">
+                                  <a:latin typeface="Cambria Math" panose="02040503050406030204" pitchFamily="18" charset="0"/>
+                                </a:rPr>
+                              </m:ctrlPr>
+                            </m:dPr>
+                            <m:e>
+                              <m:acc>
+                                <m:accPr>
+                                  <m:chr m:val="⃗"/>
+                                  <m:ctrlPr>
+                                    <a:rPr lang="de-DE" i="1">
+                                      <a:latin typeface="Cambria Math" panose="02040503050406030204" pitchFamily="18" charset="0"/>
+                                    </a:rPr>
+                                  </m:ctrlPr>
+                                </m:accPr>
+                                <m:e>
+                                  <m:r>
+                                    <a:rPr lang="de-DE" i="1">
+                                      <a:latin typeface="Cambria Math" panose="02040503050406030204" pitchFamily="18" charset="0"/>
+                                    </a:rPr>
+                                    <m:t>𝑦</m:t>
+                                  </m:r>
+                                </m:e>
+                              </m:acc>
+                              <m:r>
+                                <a:rPr lang="de-DE" i="1">
+                                  <a:latin typeface="Cambria Math" panose="02040503050406030204" pitchFamily="18" charset="0"/>
+                                </a:rPr>
+                                <m:t>, </m:t>
+                              </m:r>
+                              <m:acc>
+                                <m:accPr>
+                                  <m:chr m:val="⃗"/>
+                                  <m:ctrlPr>
+                                    <a:rPr lang="de-DE" i="1">
+                                      <a:latin typeface="Cambria Math" panose="02040503050406030204" pitchFamily="18" charset="0"/>
+                                    </a:rPr>
+                                  </m:ctrlPr>
+                                </m:accPr>
+                                <m:e>
+                                  <m:r>
+                                    <a:rPr lang="de-DE" i="1">
+                                      <a:latin typeface="Cambria Math" panose="02040503050406030204" pitchFamily="18" charset="0"/>
+                                    </a:rPr>
+                                    <m:t>𝑥</m:t>
+                                  </m:r>
+                                </m:e>
+                              </m:acc>
+                            </m:e>
+                          </m:d>
+                          <m:r>
+                            <a:rPr lang="de-DE" i="1">
+                              <a:latin typeface="Cambria Math" panose="02040503050406030204" pitchFamily="18" charset="0"/>
+                            </a:rPr>
+                            <m:t>𝑏</m:t>
+                          </m:r>
+                          <m:d>
+                            <m:dPr>
+                              <m:ctrlPr>
+                                <a:rPr lang="de-DE" i="1">
+                                  <a:latin typeface="Cambria Math" panose="02040503050406030204" pitchFamily="18" charset="0"/>
+                                </a:rPr>
+                              </m:ctrlPr>
+                            </m:dPr>
+                            <m:e>
+                              <m:acc>
+                                <m:accPr>
+                                  <m:chr m:val="⃗"/>
+                                  <m:ctrlPr>
+                                    <a:rPr lang="de-DE" i="1">
+                                      <a:latin typeface="Cambria Math" panose="02040503050406030204" pitchFamily="18" charset="0"/>
+                                    </a:rPr>
+                                  </m:ctrlPr>
+                                </m:accPr>
+                                <m:e>
+                                  <m:r>
+                                    <a:rPr lang="de-DE" i="1">
+                                      <a:latin typeface="Cambria Math" panose="02040503050406030204" pitchFamily="18" charset="0"/>
+                                    </a:rPr>
+                                    <m:t>𝑦</m:t>
+                                  </m:r>
+                                </m:e>
+                              </m:acc>
+                            </m:e>
+                          </m:d>
+                          <m:r>
+                            <a:rPr lang="de-DE" i="1">
+                              <a:latin typeface="Cambria Math" panose="02040503050406030204" pitchFamily="18" charset="0"/>
+                            </a:rPr>
+                            <m:t>𝑑</m:t>
+                          </m:r>
+                          <m:acc>
+                            <m:accPr>
+                              <m:chr m:val="⃗"/>
+                              <m:ctrlPr>
+                                <a:rPr lang="de-DE" i="1">
+                                  <a:latin typeface="Cambria Math" panose="02040503050406030204" pitchFamily="18" charset="0"/>
+                                </a:rPr>
+                              </m:ctrlPr>
+                            </m:accPr>
+                            <m:e>
+                              <m:r>
+                                <a:rPr lang="de-DE" i="1">
+                                  <a:latin typeface="Cambria Math" panose="02040503050406030204" pitchFamily="18" charset="0"/>
+                                </a:rPr>
+                                <m:t>𝑦</m:t>
+                              </m:r>
+                            </m:e>
+                          </m:acc>
+                        </m:e>
+                      </m:nary>
+                    </m:oMath>
+                  </m:oMathPara>
+                </a14:m>
+                <a:endParaRPr lang="de-DE" sz="1800" b="0" i="0" dirty="0">
+                  <a:latin typeface="Cambria Math" panose="02040503050406030204" pitchFamily="18" charset="0"/>
+                </a:endParaRPr>
+              </a:p>
+            </p:txBody>
+          </p:sp>
+        </mc:Choice>
+        <mc:Fallback>
+          <p:sp>
+            <p:nvSpPr>
+              <p:cNvPr id="5" name="Textfeld 4">
+                <a:extLst>
+                  <a:ext uri="{FF2B5EF4-FFF2-40B4-BE49-F238E27FC236}">
+                    <a16:creationId xmlns:a16="http://schemas.microsoft.com/office/drawing/2014/main" id="{F4BFC3FE-08CA-5424-913A-74C80C89D376}"/>
+                  </a:ext>
+                </a:extLst>
+              </p:cNvPr>
+              <p:cNvSpPr txBox="1">
+                <a:spLocks noRot="1" noChangeAspect="1" noMove="1" noResize="1" noEditPoints="1" noAdjustHandles="1" noChangeArrowheads="1" noChangeShapeType="1" noTextEdit="1"/>
+              </p:cNvSpPr>
+              <p:nvPr/>
+            </p:nvSpPr>
+            <p:spPr>
+              <a:xfrm>
+                <a:off x="5436096" y="1550858"/>
+                <a:ext cx="3419872" cy="1235788"/>
+              </a:xfrm>
+              <a:prstGeom prst="rect">
+                <a:avLst/>
+              </a:prstGeom>
+              <a:blipFill>
+                <a:blip r:embed="rId3"/>
+                <a:stretch>
+                  <a:fillRect t="-4433"/>
+                </a:stretch>
+              </a:blipFill>
+            </p:spPr>
+            <p:txBody>
+              <a:bodyPr/>
+              <a:lstStyle/>
+              <a:p>
+                <a:r>
+                  <a:rPr lang="en-GB">
+                    <a:noFill/>
+                  </a:rPr>
+                  <a:t> </a:t>
+                </a:r>
+              </a:p>
+            </p:txBody>
+          </p:sp>
+        </mc:Fallback>
+      </mc:AlternateContent>
+      <mc:AlternateContent xmlns:mc="http://schemas.openxmlformats.org/markup-compatibility/2006">
+        <mc:Choice xmlns:a14="http://schemas.microsoft.com/office/drawing/2010/main" Requires="a14">
+          <p:sp>
+            <p:nvSpPr>
+              <p:cNvPr id="7" name="Textfeld 6">
+                <a:extLst>
+                  <a:ext uri="{FF2B5EF4-FFF2-40B4-BE49-F238E27FC236}">
+                    <a16:creationId xmlns:a16="http://schemas.microsoft.com/office/drawing/2014/main" id="{EE99E3C3-AFB4-C6F5-1392-8317DF1CF498}"/>
+                  </a:ext>
+                </a:extLst>
+              </p:cNvPr>
+              <p:cNvSpPr txBox="1"/>
+              <p:nvPr/>
+            </p:nvSpPr>
+            <p:spPr>
+              <a:xfrm>
+                <a:off x="1366450" y="4869160"/>
+                <a:ext cx="6408549" cy="778931"/>
+              </a:xfrm>
+              <a:prstGeom prst="rect">
+                <a:avLst/>
+              </a:prstGeom>
+              <a:noFill/>
+            </p:spPr>
+            <p:txBody>
+              <a:bodyPr wrap="none" lIns="0" tIns="0" rIns="0" bIns="0" rtlCol="0">
+                <a:spAutoFit/>
+              </a:bodyPr>
+              <a:lstStyle/>
+              <a:p>
+                <a:pPr/>
+                <a14:m>
+                  <m:oMathPara xmlns:m="http://schemas.openxmlformats.org/officeDocument/2006/math">
+                    <m:oMathParaPr>
+                      <m:jc m:val="centerGroup"/>
+                    </m:oMathParaPr>
+                    <m:oMath xmlns:m="http://schemas.openxmlformats.org/officeDocument/2006/math">
+                      <m:func>
+                        <m:funcPr>
+                          <m:ctrlPr>
+                            <a:rPr lang="en-GB" i="1" smtClean="0">
+                              <a:latin typeface="Cambria Math" panose="02040503050406030204" pitchFamily="18" charset="0"/>
+                            </a:rPr>
+                          </m:ctrlPr>
+                        </m:funcPr>
+                        <m:fName>
+                          <m:limLow>
+                            <m:limLowPr>
+                              <m:ctrlPr>
+                                <a:rPr lang="en-GB" i="1" smtClean="0">
+                                  <a:latin typeface="Cambria Math" panose="02040503050406030204" pitchFamily="18" charset="0"/>
+                                </a:rPr>
+                              </m:ctrlPr>
+                            </m:limLowPr>
+                            <m:e>
+                              <m:r>
+                                <m:rPr>
+                                  <m:sty m:val="p"/>
+                                </m:rPr>
+                                <a:rPr lang="en-GB" i="0" smtClean="0">
+                                  <a:latin typeface="Cambria Math" panose="02040503050406030204" pitchFamily="18" charset="0"/>
+                                </a:rPr>
+                                <m:t>min</m:t>
+                              </m:r>
+                            </m:e>
+                            <m:lim>
+                              <m:r>
+                                <a:rPr lang="de-DE" b="0" i="1" smtClean="0">
+                                  <a:latin typeface="Cambria Math" panose="02040503050406030204" pitchFamily="18" charset="0"/>
+                                </a:rPr>
+                                <m:t>𝜃</m:t>
+                              </m:r>
+                              <m:r>
+                                <a:rPr lang="de-DE" b="0" i="1" smtClean="0">
+                                  <a:latin typeface="Cambria Math" panose="02040503050406030204" pitchFamily="18" charset="0"/>
+                                </a:rPr>
+                                <m:t>∈</m:t>
+                              </m:r>
+                              <m:sSup>
+                                <m:sSupPr>
+                                  <m:ctrlPr>
+                                    <a:rPr lang="de-DE" b="0" i="1" smtClean="0">
+                                      <a:latin typeface="Cambria Math" panose="02040503050406030204" pitchFamily="18" charset="0"/>
+                                    </a:rPr>
+                                  </m:ctrlPr>
+                                </m:sSupPr>
+                                <m:e>
+                                  <m:r>
+                                    <a:rPr lang="de-DE" i="1">
+                                      <a:latin typeface="Cambria Math" panose="02040503050406030204" pitchFamily="18" charset="0"/>
+                                      <a:ea typeface="Cambria Math" panose="02040503050406030204" pitchFamily="18" charset="0"/>
+                                    </a:rPr>
+                                    <m:t>ℝ</m:t>
+                                  </m:r>
+                                </m:e>
+                                <m:sup>
+                                  <m:r>
+                                    <a:rPr lang="de-DE" b="0" i="1" smtClean="0">
+                                      <a:latin typeface="Cambria Math" panose="02040503050406030204" pitchFamily="18" charset="0"/>
+                                    </a:rPr>
+                                    <m:t>𝑝</m:t>
+                                  </m:r>
+                                </m:sup>
+                              </m:sSup>
+                            </m:lim>
+                          </m:limLow>
+                        </m:fName>
+                        <m:e>
+                          <m:nary>
+                            <m:naryPr>
+                              <m:ctrlPr>
+                                <a:rPr lang="de-DE" b="0" i="1" smtClean="0">
+                                  <a:latin typeface="Cambria Math" panose="02040503050406030204" pitchFamily="18" charset="0"/>
+                                </a:rPr>
+                              </m:ctrlPr>
+                            </m:naryPr>
+                            <m:sub>
+                              <m:r>
+                                <m:rPr>
+                                  <m:brk m:alnAt="23"/>
+                                </m:rPr>
+                                <a:rPr lang="de-DE" b="0" i="1" smtClean="0">
+                                  <a:latin typeface="Cambria Math" panose="02040503050406030204" pitchFamily="18" charset="0"/>
+                                  <a:ea typeface="Cambria Math" panose="02040503050406030204" pitchFamily="18" charset="0"/>
+                                </a:rPr>
+                                <m:t>𝒜</m:t>
+                              </m:r>
+                            </m:sub>
+                            <m:sup>
+                              <m:r>
+                                <a:rPr lang="de-DE" b="0" i="1" smtClean="0">
+                                  <a:latin typeface="Cambria Math" panose="02040503050406030204" pitchFamily="18" charset="0"/>
+                                </a:rPr>
+                                <m:t> </m:t>
+                              </m:r>
+                            </m:sup>
+                            <m:e>
+                              <m:r>
+                                <a:rPr lang="de-DE" i="1">
+                                  <a:latin typeface="Cambria Math" panose="02040503050406030204" pitchFamily="18" charset="0"/>
+                                </a:rPr>
+                                <m:t>||</m:t>
+                              </m:r>
+                              <m:sSup>
+                                <m:sSupPr>
+                                  <m:ctrlPr>
+                                    <a:rPr lang="de-DE" i="1">
+                                      <a:latin typeface="Cambria Math" panose="02040503050406030204" pitchFamily="18" charset="0"/>
+                                      <a:ea typeface="Cambria Math" panose="02040503050406030204" pitchFamily="18" charset="0"/>
+                                    </a:rPr>
+                                  </m:ctrlPr>
+                                </m:sSupPr>
+                                <m:e>
+                                  <m:r>
+                                    <a:rPr lang="de-DE" i="1">
+                                      <a:latin typeface="Cambria Math" panose="02040503050406030204" pitchFamily="18" charset="0"/>
+                                      <a:ea typeface="Cambria Math" panose="02040503050406030204" pitchFamily="18" charset="0"/>
+                                    </a:rPr>
+                                    <m:t>𝒢</m:t>
+                                  </m:r>
+                                </m:e>
+                                <m:sup>
+                                  <m:r>
+                                    <a:rPr lang="de-DE" i="1">
+                                      <a:latin typeface="Cambria Math" panose="02040503050406030204" pitchFamily="18" charset="0"/>
+                                      <a:ea typeface="Cambria Math" panose="02040503050406030204" pitchFamily="18" charset="0"/>
+                                    </a:rPr>
+                                    <m:t>†</m:t>
+                                  </m:r>
+                                </m:sup>
+                              </m:sSup>
+                              <m:d>
+                                <m:dPr>
+                                  <m:ctrlPr>
+                                    <a:rPr lang="de-DE" i="1">
+                                      <a:latin typeface="Cambria Math" panose="02040503050406030204" pitchFamily="18" charset="0"/>
+                                      <a:ea typeface="Cambria Math" panose="02040503050406030204" pitchFamily="18" charset="0"/>
+                                    </a:rPr>
+                                  </m:ctrlPr>
+                                </m:dPr>
+                                <m:e>
+                                  <m:r>
+                                    <a:rPr lang="de-DE" i="1">
+                                      <a:latin typeface="Cambria Math" panose="02040503050406030204" pitchFamily="18" charset="0"/>
+                                      <a:ea typeface="Cambria Math" panose="02040503050406030204" pitchFamily="18" charset="0"/>
+                                    </a:rPr>
+                                    <m:t>𝑎</m:t>
+                                  </m:r>
+                                </m:e>
+                              </m:d>
+                              <m:r>
+                                <a:rPr lang="de-DE" i="1">
+                                  <a:latin typeface="Cambria Math" panose="02040503050406030204" pitchFamily="18" charset="0"/>
+                                  <a:ea typeface="Cambria Math" panose="02040503050406030204" pitchFamily="18" charset="0"/>
+                                </a:rPr>
+                                <m:t> − </m:t>
+                              </m:r>
+                              <m:sSub>
+                                <m:sSubPr>
+                                  <m:ctrlPr>
+                                    <a:rPr lang="de-DE" i="1">
+                                      <a:latin typeface="Cambria Math" panose="02040503050406030204" pitchFamily="18" charset="0"/>
+                                      <a:ea typeface="Cambria Math" panose="02040503050406030204" pitchFamily="18" charset="0"/>
+                                    </a:rPr>
+                                  </m:ctrlPr>
+                                </m:sSubPr>
+                                <m:e>
+                                  <m:r>
+                                    <a:rPr lang="de-DE" i="1">
+                                      <a:latin typeface="Cambria Math" panose="02040503050406030204" pitchFamily="18" charset="0"/>
+                                      <a:ea typeface="Cambria Math" panose="02040503050406030204" pitchFamily="18" charset="0"/>
+                                    </a:rPr>
+                                    <m:t>𝒢</m:t>
+                                  </m:r>
+                                </m:e>
+                                <m:sub>
+                                  <m:r>
+                                    <a:rPr lang="de-DE" i="1">
+                                      <a:latin typeface="Cambria Math" panose="02040503050406030204" pitchFamily="18" charset="0"/>
+                                      <a:ea typeface="Cambria Math" panose="02040503050406030204" pitchFamily="18" charset="0"/>
+                                    </a:rPr>
+                                    <m:t>𝜃</m:t>
+                                  </m:r>
+                                </m:sub>
+                              </m:sSub>
+                              <m:d>
+                                <m:dPr>
+                                  <m:ctrlPr>
+                                    <a:rPr lang="de-DE" i="1">
+                                      <a:latin typeface="Cambria Math" panose="02040503050406030204" pitchFamily="18" charset="0"/>
+                                      <a:ea typeface="Cambria Math" panose="02040503050406030204" pitchFamily="18" charset="0"/>
+                                    </a:rPr>
+                                  </m:ctrlPr>
+                                </m:dPr>
+                                <m:e>
+                                  <m:r>
+                                    <a:rPr lang="de-DE" i="1">
+                                      <a:latin typeface="Cambria Math" panose="02040503050406030204" pitchFamily="18" charset="0"/>
+                                      <a:ea typeface="Cambria Math" panose="02040503050406030204" pitchFamily="18" charset="0"/>
+                                    </a:rPr>
+                                    <m:t>𝑎</m:t>
+                                  </m:r>
+                                </m:e>
+                              </m:d>
+                            </m:e>
+                          </m:nary>
+                          <m:r>
+                            <a:rPr lang="de-DE" b="0" i="1" smtClean="0">
+                              <a:latin typeface="Cambria Math" panose="02040503050406030204" pitchFamily="18" charset="0"/>
+                            </a:rPr>
+                            <m:t>|</m:t>
+                          </m:r>
+                          <m:sSup>
+                            <m:sSupPr>
+                              <m:ctrlPr>
+                                <a:rPr lang="de-DE" b="0" i="1" smtClean="0">
+                                  <a:latin typeface="Cambria Math" panose="02040503050406030204" pitchFamily="18" charset="0"/>
+                                </a:rPr>
+                              </m:ctrlPr>
+                            </m:sSupPr>
+                            <m:e>
+                              <m:r>
+                                <a:rPr lang="de-DE" b="0" i="1" smtClean="0">
+                                  <a:latin typeface="Cambria Math" panose="02040503050406030204" pitchFamily="18" charset="0"/>
+                                </a:rPr>
+                                <m:t>|</m:t>
+                              </m:r>
+                            </m:e>
+                            <m:sup>
+                              <m:r>
+                                <a:rPr lang="de-DE" b="0" i="1" smtClean="0">
+                                  <a:latin typeface="Cambria Math" panose="02040503050406030204" pitchFamily="18" charset="0"/>
+                                </a:rPr>
+                                <m:t>2</m:t>
+                              </m:r>
+                            </m:sup>
+                          </m:sSup>
+                          <m:r>
+                            <a:rPr lang="de-DE" b="0" i="1" smtClean="0">
+                              <a:latin typeface="Cambria Math" panose="02040503050406030204" pitchFamily="18" charset="0"/>
+                            </a:rPr>
+                            <m:t> </m:t>
+                          </m:r>
+                          <m:r>
+                            <a:rPr lang="de-DE" b="0" i="1" smtClean="0">
+                              <a:latin typeface="Cambria Math" panose="02040503050406030204" pitchFamily="18" charset="0"/>
+                            </a:rPr>
+                            <m:t>𝑑</m:t>
+                          </m:r>
+                          <m:r>
+                            <a:rPr lang="de-DE" b="0" i="1" smtClean="0">
+                              <a:latin typeface="Cambria Math" panose="02040503050406030204" pitchFamily="18" charset="0"/>
+                            </a:rPr>
+                            <m:t>𝜇</m:t>
+                          </m:r>
+                          <m:d>
+                            <m:dPr>
+                              <m:ctrlPr>
+                                <a:rPr lang="de-DE" b="0" i="1" smtClean="0">
+                                  <a:latin typeface="Cambria Math" panose="02040503050406030204" pitchFamily="18" charset="0"/>
+                                </a:rPr>
+                              </m:ctrlPr>
+                            </m:dPr>
+                            <m:e>
+                              <m:r>
+                                <a:rPr lang="de-DE" b="0" i="1" smtClean="0">
+                                  <a:latin typeface="Cambria Math" panose="02040503050406030204" pitchFamily="18" charset="0"/>
+                                </a:rPr>
+                                <m:t>𝑎</m:t>
+                              </m:r>
+                            </m:e>
+                          </m:d>
+                          <m:r>
+                            <a:rPr lang="de-DE" b="0" i="1" smtClean="0">
+                              <a:latin typeface="Cambria Math" panose="02040503050406030204" pitchFamily="18" charset="0"/>
+                            </a:rPr>
+                            <m:t>≈</m:t>
+                          </m:r>
+                        </m:e>
+                      </m:func>
+                      <m:limLow>
+                        <m:limLowPr>
+                          <m:ctrlPr>
+                            <a:rPr lang="en-GB" i="1">
+                              <a:latin typeface="Cambria Math" panose="02040503050406030204" pitchFamily="18" charset="0"/>
+                            </a:rPr>
+                          </m:ctrlPr>
+                        </m:limLowPr>
+                        <m:e>
+                          <m:r>
+                            <m:rPr>
+                              <m:sty m:val="p"/>
+                            </m:rPr>
+                            <a:rPr lang="en-GB">
+                              <a:latin typeface="Cambria Math" panose="02040503050406030204" pitchFamily="18" charset="0"/>
+                            </a:rPr>
+                            <m:t>min</m:t>
+                          </m:r>
+                        </m:e>
+                        <m:lim>
+                          <m:r>
+                            <a:rPr lang="de-DE" i="1">
+                              <a:latin typeface="Cambria Math" panose="02040503050406030204" pitchFamily="18" charset="0"/>
+                            </a:rPr>
+                            <m:t>𝜃</m:t>
+                          </m:r>
+                          <m:r>
+                            <a:rPr lang="de-DE" i="1">
+                              <a:latin typeface="Cambria Math" panose="02040503050406030204" pitchFamily="18" charset="0"/>
+                            </a:rPr>
+                            <m:t>∈</m:t>
+                          </m:r>
+                          <m:sSup>
+                            <m:sSupPr>
+                              <m:ctrlPr>
+                                <a:rPr lang="de-DE" i="1">
+                                  <a:latin typeface="Cambria Math" panose="02040503050406030204" pitchFamily="18" charset="0"/>
+                                </a:rPr>
+                              </m:ctrlPr>
+                            </m:sSupPr>
+                            <m:e>
+                              <m:r>
+                                <a:rPr lang="de-DE" i="1">
+                                  <a:latin typeface="Cambria Math" panose="02040503050406030204" pitchFamily="18" charset="0"/>
+                                  <a:ea typeface="Cambria Math" panose="02040503050406030204" pitchFamily="18" charset="0"/>
+                                </a:rPr>
+                                <m:t>ℝ</m:t>
+                              </m:r>
+                            </m:e>
+                            <m:sup>
+                              <m:r>
+                                <a:rPr lang="de-DE" i="1">
+                                  <a:latin typeface="Cambria Math" panose="02040503050406030204" pitchFamily="18" charset="0"/>
+                                </a:rPr>
+                                <m:t>𝑝</m:t>
+                              </m:r>
+                            </m:sup>
+                          </m:sSup>
+                        </m:lim>
+                      </m:limLow>
+                      <m:f>
+                        <m:fPr>
+                          <m:ctrlPr>
+                            <a:rPr lang="de-DE" b="0" i="1" smtClean="0">
+                              <a:latin typeface="Cambria Math" panose="02040503050406030204" pitchFamily="18" charset="0"/>
+                            </a:rPr>
+                          </m:ctrlPr>
+                        </m:fPr>
+                        <m:num>
+                          <m:r>
+                            <a:rPr lang="de-DE" b="0" i="1" smtClean="0">
+                              <a:latin typeface="Cambria Math" panose="02040503050406030204" pitchFamily="18" charset="0"/>
+                            </a:rPr>
+                            <m:t>1</m:t>
+                          </m:r>
+                        </m:num>
+                        <m:den>
+                          <m:r>
+                            <a:rPr lang="de-DE" b="0" i="1" smtClean="0">
+                              <a:latin typeface="Cambria Math" panose="02040503050406030204" pitchFamily="18" charset="0"/>
+                            </a:rPr>
+                            <m:t>𝑁</m:t>
+                          </m:r>
+                        </m:den>
+                      </m:f>
+                      <m:r>
+                        <a:rPr lang="de-DE" b="0" i="1" smtClean="0">
+                          <a:latin typeface="Cambria Math" panose="02040503050406030204" pitchFamily="18" charset="0"/>
+                        </a:rPr>
+                        <m:t> </m:t>
+                      </m:r>
+                      <m:nary>
+                        <m:naryPr>
+                          <m:chr m:val="∑"/>
+                          <m:ctrlPr>
+                            <a:rPr lang="de-DE" b="0" i="1" smtClean="0">
+                              <a:latin typeface="Cambria Math" panose="02040503050406030204" pitchFamily="18" charset="0"/>
+                            </a:rPr>
+                          </m:ctrlPr>
+                        </m:naryPr>
+                        <m:sub>
+                          <m:r>
+                            <m:rPr>
+                              <m:brk m:alnAt="23"/>
+                            </m:rPr>
+                            <a:rPr lang="de-DE" b="0" i="1" smtClean="0">
+                              <a:latin typeface="Cambria Math" panose="02040503050406030204" pitchFamily="18" charset="0"/>
+                            </a:rPr>
+                            <m:t>𝑖</m:t>
+                          </m:r>
+                          <m:r>
+                            <a:rPr lang="de-DE" b="0" i="1" smtClean="0">
+                              <a:latin typeface="Cambria Math" panose="02040503050406030204" pitchFamily="18" charset="0"/>
+                            </a:rPr>
+                            <m:t>=1</m:t>
+                          </m:r>
+                        </m:sub>
+                        <m:sup>
+                          <m:r>
+                            <a:rPr lang="de-DE" b="0" i="1" smtClean="0">
+                              <a:latin typeface="Cambria Math" panose="02040503050406030204" pitchFamily="18" charset="0"/>
+                            </a:rPr>
+                            <m:t>𝑁</m:t>
+                          </m:r>
+                        </m:sup>
+                        <m:e>
+                          <m:r>
+                            <a:rPr lang="de-DE" b="0" i="1" smtClean="0">
+                              <a:latin typeface="Cambria Math" panose="02040503050406030204" pitchFamily="18" charset="0"/>
+                            </a:rPr>
+                            <m:t>||</m:t>
+                          </m:r>
+                          <m:sSub>
+                            <m:sSubPr>
+                              <m:ctrlPr>
+                                <a:rPr lang="de-DE" b="0" i="1" smtClean="0">
+                                  <a:latin typeface="Cambria Math" panose="02040503050406030204" pitchFamily="18" charset="0"/>
+                                </a:rPr>
+                              </m:ctrlPr>
+                            </m:sSubPr>
+                            <m:e>
+                              <m:r>
+                                <a:rPr lang="de-DE" b="0" i="1" smtClean="0">
+                                  <a:latin typeface="Cambria Math" panose="02040503050406030204" pitchFamily="18" charset="0"/>
+                                </a:rPr>
+                                <m:t>𝑢</m:t>
+                              </m:r>
+                            </m:e>
+                            <m:sub>
+                              <m:r>
+                                <a:rPr lang="de-DE" b="0" i="1" smtClean="0">
+                                  <a:latin typeface="Cambria Math" panose="02040503050406030204" pitchFamily="18" charset="0"/>
+                                </a:rPr>
+                                <m:t>𝑖</m:t>
+                              </m:r>
+                            </m:sub>
+                          </m:sSub>
+                          <m:r>
+                            <a:rPr lang="de-DE" b="0" i="1" smtClean="0">
+                              <a:latin typeface="Cambria Math" panose="02040503050406030204" pitchFamily="18" charset="0"/>
+                            </a:rPr>
+                            <m:t> −</m:t>
+                          </m:r>
+                          <m:sSub>
+                            <m:sSubPr>
+                              <m:ctrlPr>
+                                <a:rPr lang="de-DE" i="1">
+                                  <a:latin typeface="Cambria Math" panose="02040503050406030204" pitchFamily="18" charset="0"/>
+                                  <a:ea typeface="Cambria Math" panose="02040503050406030204" pitchFamily="18" charset="0"/>
+                                </a:rPr>
+                              </m:ctrlPr>
+                            </m:sSubPr>
+                            <m:e>
+                              <m:r>
+                                <a:rPr lang="de-DE" i="1">
+                                  <a:latin typeface="Cambria Math" panose="02040503050406030204" pitchFamily="18" charset="0"/>
+                                  <a:ea typeface="Cambria Math" panose="02040503050406030204" pitchFamily="18" charset="0"/>
+                                </a:rPr>
+                                <m:t>𝒢</m:t>
+                              </m:r>
+                            </m:e>
+                            <m:sub>
+                              <m:r>
+                                <a:rPr lang="de-DE" i="1">
+                                  <a:latin typeface="Cambria Math" panose="02040503050406030204" pitchFamily="18" charset="0"/>
+                                  <a:ea typeface="Cambria Math" panose="02040503050406030204" pitchFamily="18" charset="0"/>
+                                </a:rPr>
+                                <m:t>𝜃</m:t>
+                              </m:r>
+                            </m:sub>
+                          </m:sSub>
+                          <m:d>
+                            <m:dPr>
+                              <m:ctrlPr>
+                                <a:rPr lang="de-DE" i="1">
+                                  <a:latin typeface="Cambria Math" panose="02040503050406030204" pitchFamily="18" charset="0"/>
+                                  <a:ea typeface="Cambria Math" panose="02040503050406030204" pitchFamily="18" charset="0"/>
+                                </a:rPr>
+                              </m:ctrlPr>
+                            </m:dPr>
+                            <m:e>
+                              <m:sSub>
+                                <m:sSubPr>
+                                  <m:ctrlPr>
+                                    <a:rPr lang="de-DE" b="0" i="1" smtClean="0">
+                                      <a:latin typeface="Cambria Math" panose="02040503050406030204" pitchFamily="18" charset="0"/>
+                                      <a:ea typeface="Cambria Math" panose="02040503050406030204" pitchFamily="18" charset="0"/>
+                                    </a:rPr>
+                                  </m:ctrlPr>
+                                </m:sSubPr>
+                                <m:e>
+                                  <m:r>
+                                    <a:rPr lang="de-DE" i="1">
+                                      <a:latin typeface="Cambria Math" panose="02040503050406030204" pitchFamily="18" charset="0"/>
+                                      <a:ea typeface="Cambria Math" panose="02040503050406030204" pitchFamily="18" charset="0"/>
+                                    </a:rPr>
+                                    <m:t>𝑎</m:t>
+                                  </m:r>
+                                </m:e>
+                                <m:sub>
+                                  <m:r>
+                                    <a:rPr lang="de-DE" b="0" i="1" smtClean="0">
+                                      <a:latin typeface="Cambria Math" panose="02040503050406030204" pitchFamily="18" charset="0"/>
+                                      <a:ea typeface="Cambria Math" panose="02040503050406030204" pitchFamily="18" charset="0"/>
+                                    </a:rPr>
+                                    <m:t>𝑖</m:t>
+                                  </m:r>
+                                </m:sub>
+                              </m:sSub>
+                            </m:e>
+                          </m:d>
+                          <m:sSup>
+                            <m:sSupPr>
+                              <m:ctrlPr>
+                                <a:rPr lang="de-DE" b="0" i="1" smtClean="0">
+                                  <a:latin typeface="Cambria Math" panose="02040503050406030204" pitchFamily="18" charset="0"/>
+                                </a:rPr>
+                              </m:ctrlPr>
+                            </m:sSupPr>
+                            <m:e>
+                              <m:r>
+                                <a:rPr lang="de-DE" b="0" i="1" smtClean="0">
+                                  <a:latin typeface="Cambria Math" panose="02040503050406030204" pitchFamily="18" charset="0"/>
+                                </a:rPr>
+                                <m:t>||</m:t>
+                              </m:r>
+                            </m:e>
+                            <m:sup>
+                              <m:r>
+                                <a:rPr lang="de-DE" b="0" i="1" smtClean="0">
+                                  <a:latin typeface="Cambria Math" panose="02040503050406030204" pitchFamily="18" charset="0"/>
+                                </a:rPr>
+                                <m:t>2</m:t>
+                              </m:r>
+                            </m:sup>
+                          </m:sSup>
+                        </m:e>
+                      </m:nary>
+                    </m:oMath>
+                  </m:oMathPara>
+                </a14:m>
+                <a:endParaRPr lang="en-GB" dirty="0"/>
+              </a:p>
+            </p:txBody>
+          </p:sp>
+        </mc:Choice>
+        <mc:Fallback>
+          <p:sp>
+            <p:nvSpPr>
+              <p:cNvPr id="7" name="Textfeld 6">
+                <a:extLst>
+                  <a:ext uri="{FF2B5EF4-FFF2-40B4-BE49-F238E27FC236}">
+                    <a16:creationId xmlns:a16="http://schemas.microsoft.com/office/drawing/2014/main" id="{EE99E3C3-AFB4-C6F5-1392-8317DF1CF498}"/>
+                  </a:ext>
+                </a:extLst>
+              </p:cNvPr>
+              <p:cNvSpPr txBox="1">
+                <a:spLocks noRot="1" noChangeAspect="1" noMove="1" noResize="1" noEditPoints="1" noAdjustHandles="1" noChangeArrowheads="1" noChangeShapeType="1" noTextEdit="1"/>
+              </p:cNvSpPr>
+              <p:nvPr/>
+            </p:nvSpPr>
+            <p:spPr>
+              <a:xfrm>
+                <a:off x="1366450" y="4869160"/>
+                <a:ext cx="6408549" cy="778931"/>
+              </a:xfrm>
+              <a:prstGeom prst="rect">
+                <a:avLst/>
+              </a:prstGeom>
+              <a:blipFill>
+                <a:blip r:embed="rId4"/>
+                <a:stretch>
+                  <a:fillRect/>
+                </a:stretch>
+              </a:blipFill>
+            </p:spPr>
+            <p:txBody>
+              <a:bodyPr/>
+              <a:lstStyle/>
+              <a:p>
+                <a:r>
+                  <a:rPr lang="en-GB">
+                    <a:noFill/>
+                  </a:rPr>
+                  <a:t> </a:t>
+                </a:r>
+              </a:p>
+            </p:txBody>
+          </p:sp>
+        </mc:Fallback>
+      </mc:AlternateContent>
+    </p:spTree>
+    <p:extLst>
+      <p:ext uri="{BB962C8B-B14F-4D97-AF65-F5344CB8AC3E}">
+        <p14:creationId xmlns:p14="http://schemas.microsoft.com/office/powerpoint/2010/main" val="1210688276"/>
+      </p:ext>
+    </p:extLst>
+  </p:cSld>
+  <p:clrMapOvr>
+    <a:masterClrMapping/>
+  </p:clrMapOvr>
+</p:sld>
+</file>
+
+<file path=ppt/slides/slide7.xml><?xml version="1.0" encoding="utf-8"?>
+<p:sld xmlns:a="http://schemas.openxmlformats.org/drawingml/2006/main" xmlns:r="http://schemas.openxmlformats.org/officeDocument/2006/relationships" xmlns:p="http://schemas.openxmlformats.org/presentationml/2006/main">
+  <p:cSld>
+    <p:spTree>
+      <p:nvGrpSpPr>
+        <p:cNvPr id="1" name=""/>
+        <p:cNvGrpSpPr/>
+        <p:nvPr/>
+      </p:nvGrpSpPr>
+      <p:grpSpPr>
+        <a:xfrm>
+          <a:off x="0" y="0"/>
+          <a:ext cx="0" cy="0"/>
+          <a:chOff x="0" y="0"/>
+          <a:chExt cx="0" cy="0"/>
+        </a:xfrm>
+      </p:grpSpPr>
+      <mc:AlternateContent xmlns:mc="http://schemas.openxmlformats.org/markup-compatibility/2006">
+        <mc:Choice xmlns:a14="http://schemas.microsoft.com/office/drawing/2010/main" Requires="a14">
+          <p:sp>
+            <p:nvSpPr>
+              <p:cNvPr id="2" name="Titel 1">
+                <a:extLst>
+                  <a:ext uri="{FF2B5EF4-FFF2-40B4-BE49-F238E27FC236}">
+                    <a16:creationId xmlns:a16="http://schemas.microsoft.com/office/drawing/2014/main" id="{84DFF4A8-1F51-8B9A-921F-24BD966F1B83}"/>
+                  </a:ext>
+                </a:extLst>
+              </p:cNvPr>
+              <p:cNvSpPr>
+                <a:spLocks noGrp="1"/>
+              </p:cNvSpPr>
+              <p:nvPr>
+                <p:ph type="title"/>
+              </p:nvPr>
+            </p:nvSpPr>
+            <p:spPr/>
+            <p:txBody>
+              <a:bodyPr/>
+              <a:lstStyle/>
+              <a:p>
+                <a:r>
+                  <a:rPr lang="de-DE" dirty="0" err="1"/>
+                  <a:t>How</a:t>
+                </a:r>
+                <a:r>
+                  <a:rPr lang="de-DE" dirty="0"/>
+                  <a:t> </a:t>
+                </a:r>
+                <a:r>
+                  <a:rPr lang="de-DE" dirty="0" err="1"/>
+                  <a:t>does</a:t>
+                </a:r>
+                <a:r>
+                  <a:rPr lang="de-DE" dirty="0"/>
+                  <a:t> </a:t>
+                </a:r>
+                <a14:m>
+                  <m:oMath xmlns:m="http://schemas.openxmlformats.org/officeDocument/2006/math">
+                    <m:sSub>
+                      <m:sSubPr>
+                        <m:ctrlPr>
+                          <a:rPr lang="de-DE" i="1" smtClean="0">
+                            <a:latin typeface="Cambria Math" panose="02040503050406030204" pitchFamily="18" charset="0"/>
+                            <a:ea typeface="Cambria Math" panose="02040503050406030204" pitchFamily="18" charset="0"/>
+                          </a:rPr>
+                        </m:ctrlPr>
+                      </m:sSubPr>
+                      <m:e>
+                        <m:r>
+                          <a:rPr lang="de-DE" b="1" i="1">
+                            <a:latin typeface="Cambria Math" panose="02040503050406030204" pitchFamily="18" charset="0"/>
+                            <a:ea typeface="Cambria Math" panose="02040503050406030204" pitchFamily="18" charset="0"/>
+                          </a:rPr>
+                          <m:t>𝓖</m:t>
+                        </m:r>
+                      </m:e>
+                      <m:sub>
+                        <m:r>
+                          <a:rPr lang="de-DE" b="1" i="1">
+                            <a:latin typeface="Cambria Math" panose="02040503050406030204" pitchFamily="18" charset="0"/>
+                            <a:ea typeface="Cambria Math" panose="02040503050406030204" pitchFamily="18" charset="0"/>
+                          </a:rPr>
+                          <m:t>𝜽</m:t>
+                        </m:r>
+                      </m:sub>
+                    </m:sSub>
+                  </m:oMath>
+                </a14:m>
+                <a:r>
+                  <a:rPr lang="de-DE" dirty="0"/>
+                  <a:t> </a:t>
+                </a:r>
+                <a:r>
+                  <a:rPr lang="de-DE" dirty="0" err="1"/>
+                  <a:t>look</a:t>
+                </a:r>
+                <a:r>
+                  <a:rPr lang="de-DE" dirty="0"/>
+                  <a:t> like?</a:t>
+                </a:r>
+                <a:endParaRPr lang="en-GB" dirty="0"/>
+              </a:p>
+            </p:txBody>
+          </p:sp>
+        </mc:Choice>
+        <mc:Fallback>
+          <p:sp>
+            <p:nvSpPr>
+              <p:cNvPr id="2" name="Titel 1">
+                <a:extLst>
+                  <a:ext uri="{FF2B5EF4-FFF2-40B4-BE49-F238E27FC236}">
+                    <a16:creationId xmlns:a16="http://schemas.microsoft.com/office/drawing/2014/main" id="{84DFF4A8-1F51-8B9A-921F-24BD966F1B83}"/>
+                  </a:ext>
+                </a:extLst>
+              </p:cNvPr>
+              <p:cNvSpPr>
+                <a:spLocks noGrp="1" noRot="1" noChangeAspect="1" noMove="1" noResize="1" noEditPoints="1" noAdjustHandles="1" noChangeArrowheads="1" noChangeShapeType="1" noTextEdit="1"/>
+              </p:cNvSpPr>
+              <p:nvPr>
+                <p:ph type="title"/>
+              </p:nvPr>
+            </p:nvSpPr>
+            <p:spPr>
+              <a:blipFill>
+                <a:blip r:embed="rId2"/>
+                <a:stretch>
+                  <a:fillRect l="-2303" t="-26230" b="-47541"/>
+                </a:stretch>
+              </a:blipFill>
+            </p:spPr>
+            <p:txBody>
+              <a:bodyPr/>
+              <a:lstStyle/>
+              <a:p>
+                <a:r>
+                  <a:rPr lang="en-GB">
+                    <a:noFill/>
+                  </a:rPr>
+                  <a:t> </a:t>
+                </a:r>
+              </a:p>
+            </p:txBody>
+          </p:sp>
+        </mc:Fallback>
+      </mc:AlternateContent>
       <p:sp>
         <p:nvSpPr>
           <p:cNvPr id="3" name="Inhaltsplatzhalter 2">
             <a:extLst>
               <a:ext uri="{FF2B5EF4-FFF2-40B4-BE49-F238E27FC236}">
-                <a16:creationId xmlns:a16="http://schemas.microsoft.com/office/drawing/2014/main" id="{107DD1B7-9055-A5E0-4EDF-4071AFC7C2F7}"/>
+                <a16:creationId xmlns:a16="http://schemas.microsoft.com/office/drawing/2014/main" id="{E8B07CC7-9250-807D-AD18-F1249F0A6447}"/>
               </a:ext>
             </a:extLst>
           </p:cNvPr>
@@ -5170,14 +7748,1169 @@
           <a:bodyPr/>
           <a:lstStyle/>
           <a:p>
-            <a:endParaRPr lang="en-GB"/>
+            <a:pPr>
+              <a:buFont typeface="+mj-lt"/>
+              <a:buAutoNum type="arabicPeriod"/>
+            </a:pPr>
+            <a:r>
+              <a:rPr lang="de-DE" dirty="0"/>
+              <a:t>Lifting </a:t>
+            </a:r>
+          </a:p>
+          <a:p>
+            <a:pPr>
+              <a:buFont typeface="+mj-lt"/>
+              <a:buAutoNum type="arabicPeriod"/>
+            </a:pPr>
+            <a:endParaRPr lang="de-DE" dirty="0"/>
+          </a:p>
+          <a:p>
+            <a:pPr>
+              <a:buFont typeface="+mj-lt"/>
+              <a:buAutoNum type="arabicPeriod"/>
+            </a:pPr>
+            <a:endParaRPr lang="de-DE" dirty="0"/>
+          </a:p>
+          <a:p>
+            <a:pPr>
+              <a:buFont typeface="+mj-lt"/>
+              <a:buAutoNum type="arabicPeriod"/>
+            </a:pPr>
+            <a:endParaRPr lang="de-DE" dirty="0"/>
+          </a:p>
+          <a:p>
+            <a:pPr>
+              <a:buFont typeface="+mj-lt"/>
+              <a:buAutoNum type="arabicPeriod"/>
+            </a:pPr>
+            <a:r>
+              <a:rPr lang="de-DE" dirty="0"/>
+              <a:t>Kernel </a:t>
+            </a:r>
+            <a:r>
+              <a:rPr lang="de-DE" dirty="0" err="1"/>
+              <a:t>integration</a:t>
+            </a:r>
+            <a:endParaRPr lang="de-DE" dirty="0"/>
+          </a:p>
+          <a:p>
+            <a:pPr>
+              <a:buFont typeface="+mj-lt"/>
+              <a:buAutoNum type="arabicPeriod"/>
+            </a:pPr>
+            <a:endParaRPr lang="de-DE" dirty="0"/>
+          </a:p>
+          <a:p>
+            <a:pPr>
+              <a:buFont typeface="+mj-lt"/>
+              <a:buAutoNum type="arabicPeriod"/>
+            </a:pPr>
+            <a:endParaRPr lang="de-DE" dirty="0"/>
+          </a:p>
+          <a:p>
+            <a:pPr>
+              <a:buFont typeface="+mj-lt"/>
+              <a:buAutoNum type="arabicPeriod"/>
+            </a:pPr>
+            <a:endParaRPr lang="de-DE" dirty="0"/>
+          </a:p>
+          <a:p>
+            <a:pPr>
+              <a:buFont typeface="+mj-lt"/>
+              <a:buAutoNum type="arabicPeriod"/>
+            </a:pPr>
+            <a:r>
+              <a:rPr lang="de-DE" dirty="0" err="1"/>
+              <a:t>Projection</a:t>
+            </a:r>
+            <a:endParaRPr lang="en-GB" dirty="0"/>
+          </a:p>
+        </p:txBody>
+      </p:sp>
+      <p:grpSp>
+        <p:nvGrpSpPr>
+          <p:cNvPr id="25" name="Gruppieren 24">
+            <a:extLst>
+              <a:ext uri="{FF2B5EF4-FFF2-40B4-BE49-F238E27FC236}">
+                <a16:creationId xmlns:a16="http://schemas.microsoft.com/office/drawing/2014/main" id="{5070B152-82C9-AB6A-B23C-A434076DA7FC}"/>
+              </a:ext>
+            </a:extLst>
+          </p:cNvPr>
+          <p:cNvGrpSpPr/>
+          <p:nvPr/>
+        </p:nvGrpSpPr>
+        <p:grpSpPr>
+          <a:xfrm>
+            <a:off x="2415253" y="704355"/>
+            <a:ext cx="5225511" cy="1914525"/>
+            <a:chOff x="2234327" y="979992"/>
+            <a:chExt cx="5225511" cy="1914525"/>
+          </a:xfrm>
+        </p:grpSpPr>
+        <p:cxnSp>
+          <p:nvCxnSpPr>
+            <p:cNvPr id="8" name="Gerader Verbinder 7">
+              <a:extLst>
+                <a:ext uri="{FF2B5EF4-FFF2-40B4-BE49-F238E27FC236}">
+                  <a16:creationId xmlns:a16="http://schemas.microsoft.com/office/drawing/2014/main" id="{85365033-DE9D-0781-B2AE-1E1CEF5DCE11}"/>
+                </a:ext>
+              </a:extLst>
+            </p:cNvPr>
+            <p:cNvCxnSpPr>
+              <a:cxnSpLocks/>
+            </p:cNvCxnSpPr>
+            <p:nvPr/>
+          </p:nvCxnSpPr>
+          <p:spPr bwMode="auto">
+            <a:xfrm>
+              <a:off x="3290489" y="2369994"/>
+              <a:ext cx="2544452" cy="338926"/>
+            </a:xfrm>
+            <a:prstGeom prst="line">
+              <a:avLst/>
+            </a:prstGeom>
+            <a:noFill/>
+            <a:ln>
+              <a:solidFill>
+                <a:srgbClr val="FF0000"/>
+              </a:solidFill>
+            </a:ln>
+            <a:effectLst/>
+            <a:extLst>
+              <a:ext uri="{909E8E84-426E-40dd-AFC4-6F175D3DCCD1}">
+                <a14:hiddenFill xmlns:a14="http://schemas.microsoft.com/office/drawing/2010/main" xmlns="">
+                  <a:solidFill>
+                    <a:schemeClr val="accent1"/>
+                  </a:solidFill>
+                </a14:hiddenFill>
+              </a:ext>
+              <a:ext uri="{91240B29-F687-4f45-9708-019B960494DF}">
+                <a14:hiddenLine xmlns:a14="http://schemas.microsoft.com/office/drawing/2010/main" xmlns="" w="9525" cap="flat" cmpd="sng" algn="ctr">
+                  <a:solidFill>
+                    <a:schemeClr val="tx1"/>
+                  </a:solidFill>
+                  <a:prstDash val="solid"/>
+                  <a:round/>
+                  <a:headEnd type="none" w="med" len="med"/>
+                  <a:tailEnd type="none" w="med" len="med"/>
+                </a14:hiddenLine>
+              </a:ext>
+              <a:ext uri="{AF507438-7753-43e0-B8FC-AC1667EBCBE1}">
+                <a14:hiddenEffects xmlns:a14="http://schemas.microsoft.com/office/drawing/2010/main" xmlns="">
+                  <a:effectLst>
+                    <a:outerShdw dist="35921" dir="2700000" algn="ctr" rotWithShape="0">
+                      <a:schemeClr val="bg2"/>
+                    </a:outerShdw>
+                  </a:effectLst>
+                </a14:hiddenEffects>
+              </a:ext>
+            </a:extLst>
+          </p:spPr>
+        </p:cxnSp>
+        <p:sp>
+          <p:nvSpPr>
+            <p:cNvPr id="14" name="Pfeil: nach rechts 13">
+              <a:extLst>
+                <a:ext uri="{FF2B5EF4-FFF2-40B4-BE49-F238E27FC236}">
+                  <a16:creationId xmlns:a16="http://schemas.microsoft.com/office/drawing/2014/main" id="{5CBF4481-F0EE-0221-AFE4-47B4B1858B84}"/>
+                </a:ext>
+              </a:extLst>
+            </p:cNvPr>
+            <p:cNvSpPr/>
+            <p:nvPr/>
+          </p:nvSpPr>
+          <p:spPr bwMode="auto">
+            <a:xfrm>
+              <a:off x="4022655" y="1770411"/>
+              <a:ext cx="1080120" cy="288032"/>
+            </a:xfrm>
+            <a:prstGeom prst="rightArrow">
+              <a:avLst/>
+            </a:prstGeom>
+            <a:noFill/>
+            <a:ln>
+              <a:solidFill>
+                <a:srgbClr val="FF0000"/>
+              </a:solidFill>
+            </a:ln>
+            <a:effectLst/>
+            <a:extLst>
+              <a:ext uri="{909E8E84-426E-40dd-AFC4-6F175D3DCCD1}">
+                <a14:hiddenFill xmlns:a14="http://schemas.microsoft.com/office/drawing/2010/main" xmlns="">
+                  <a:solidFill>
+                    <a:schemeClr val="accent1"/>
+                  </a:solidFill>
+                </a14:hiddenFill>
+              </a:ext>
+              <a:ext uri="{91240B29-F687-4f45-9708-019B960494DF}">
+                <a14:hiddenLine xmlns:a14="http://schemas.microsoft.com/office/drawing/2010/main" xmlns="" w="9525" cap="flat" cmpd="sng" algn="ctr">
+                  <a:solidFill>
+                    <a:schemeClr val="tx1"/>
+                  </a:solidFill>
+                  <a:prstDash val="solid"/>
+                  <a:round/>
+                  <a:headEnd type="none" w="med" len="med"/>
+                  <a:tailEnd type="none" w="med" len="med"/>
+                </a14:hiddenLine>
+              </a:ext>
+              <a:ext uri="{AF507438-7753-43e0-B8FC-AC1667EBCBE1}">
+                <a14:hiddenEffects xmlns:a14="http://schemas.microsoft.com/office/drawing/2010/main" xmlns="">
+                  <a:effectLst>
+                    <a:outerShdw dist="35921" dir="2700000" algn="ctr" rotWithShape="0">
+                      <a:schemeClr val="bg2"/>
+                    </a:outerShdw>
+                  </a:effectLst>
+                </a14:hiddenEffects>
+              </a:ext>
+            </a:extLst>
+          </p:spPr>
+          <p:txBody>
+            <a:bodyPr vert="horz" wrap="square" lIns="0" tIns="0" rIns="0" bIns="0" numCol="1" rtlCol="0" anchor="t" anchorCtr="0" compatLnSpc="1">
+              <a:prstTxWarp prst="textNoShape">
+                <a:avLst/>
+              </a:prstTxWarp>
+            </a:bodyPr>
+            <a:lstStyle/>
+            <a:p>
+              <a:pPr marL="0" marR="0" indent="0" algn="l" defTabSz="914400" rtl="0" eaLnBrk="1" fontAlgn="base" latinLnBrk="0" hangingPunct="1">
+                <a:lnSpc>
+                  <a:spcPct val="100000"/>
+                </a:lnSpc>
+                <a:spcBef>
+                  <a:spcPct val="0"/>
+                </a:spcBef>
+                <a:spcAft>
+                  <a:spcPct val="40000"/>
+                </a:spcAft>
+                <a:buClrTx/>
+                <a:buSzTx/>
+                <a:buFont typeface="Wingdings" pitchFamily="2" charset="2"/>
+                <a:buNone/>
+                <a:tabLst/>
+              </a:pPr>
+              <a:endParaRPr kumimoji="0" lang="en-GB" sz="1800" b="0" i="0" u="none" strike="noStrike" cap="none" normalizeH="0" baseline="0">
+                <a:ln>
+                  <a:noFill/>
+                </a:ln>
+                <a:solidFill>
+                  <a:schemeClr val="tx1"/>
+                </a:solidFill>
+                <a:effectLst/>
+                <a:latin typeface="Frutiger LT Com 55 Roman" pitchFamily="34" charset="0"/>
+              </a:endParaRPr>
+            </a:p>
+          </p:txBody>
+        </p:sp>
+        <p:pic>
+          <p:nvPicPr>
+            <p:cNvPr id="16" name="Grafik 15">
+              <a:extLst>
+                <a:ext uri="{FF2B5EF4-FFF2-40B4-BE49-F238E27FC236}">
+                  <a16:creationId xmlns:a16="http://schemas.microsoft.com/office/drawing/2014/main" id="{427BB415-5270-02EE-A3CF-48DF186D3D8A}"/>
+                </a:ext>
+              </a:extLst>
+            </p:cNvPr>
+            <p:cNvPicPr>
+              <a:picLocks noChangeAspect="1"/>
+            </p:cNvPicPr>
+            <p:nvPr/>
+          </p:nvPicPr>
+          <p:blipFill>
+            <a:blip r:embed="rId3"/>
+            <a:stretch>
+              <a:fillRect/>
+            </a:stretch>
+          </p:blipFill>
+          <p:spPr>
+            <a:xfrm>
+              <a:off x="2234327" y="1473875"/>
+              <a:ext cx="1705021" cy="878641"/>
+            </a:xfrm>
+            <a:prstGeom prst="rect">
+              <a:avLst/>
+            </a:prstGeom>
+          </p:spPr>
+        </p:pic>
+        <p:pic>
+          <p:nvPicPr>
+            <p:cNvPr id="19" name="Grafik 18">
+              <a:extLst>
+                <a:ext uri="{FF2B5EF4-FFF2-40B4-BE49-F238E27FC236}">
+                  <a16:creationId xmlns:a16="http://schemas.microsoft.com/office/drawing/2014/main" id="{9299944D-A861-3F46-D32F-B37F220D864C}"/>
+                </a:ext>
+              </a:extLst>
+            </p:cNvPr>
+            <p:cNvPicPr>
+              <a:picLocks noChangeAspect="1"/>
+            </p:cNvPicPr>
+            <p:nvPr/>
+          </p:nvPicPr>
+          <p:blipFill>
+            <a:blip r:embed="rId4">
+              <a:extLst>
+                <a:ext uri="{96DAC541-7B7A-43D3-8B79-37D633B846F1}">
+                  <asvg:svgBlip xmlns:asvg="http://schemas.microsoft.com/office/drawing/2016/SVG/main" r:embed="rId5"/>
+                </a:ext>
+              </a:extLst>
+            </a:blip>
+            <a:stretch>
+              <a:fillRect/>
+            </a:stretch>
+          </p:blipFill>
+          <p:spPr>
+            <a:xfrm>
+              <a:off x="5697713" y="979992"/>
+              <a:ext cx="1762125" cy="1914525"/>
+            </a:xfrm>
+            <a:prstGeom prst="rect">
+              <a:avLst/>
+            </a:prstGeom>
+          </p:spPr>
+        </p:pic>
+        <p:cxnSp>
+          <p:nvCxnSpPr>
+            <p:cNvPr id="20" name="Gerader Verbinder 19">
+              <a:extLst>
+                <a:ext uri="{FF2B5EF4-FFF2-40B4-BE49-F238E27FC236}">
+                  <a16:creationId xmlns:a16="http://schemas.microsoft.com/office/drawing/2014/main" id="{ADE63400-E233-FED3-E9CC-ED40CC1FE5DA}"/>
+                </a:ext>
+              </a:extLst>
+            </p:cNvPr>
+            <p:cNvCxnSpPr>
+              <a:cxnSpLocks/>
+            </p:cNvCxnSpPr>
+            <p:nvPr/>
+          </p:nvCxnSpPr>
+          <p:spPr bwMode="auto">
+            <a:xfrm flipV="1">
+              <a:off x="3290489" y="1119934"/>
+              <a:ext cx="2544452" cy="338926"/>
+            </a:xfrm>
+            <a:prstGeom prst="line">
+              <a:avLst/>
+            </a:prstGeom>
+            <a:noFill/>
+            <a:ln>
+              <a:solidFill>
+                <a:srgbClr val="FF0000"/>
+              </a:solidFill>
+            </a:ln>
+            <a:effectLst/>
+            <a:extLst>
+              <a:ext uri="{909E8E84-426E-40dd-AFC4-6F175D3DCCD1}">
+                <a14:hiddenFill xmlns:a14="http://schemas.microsoft.com/office/drawing/2010/main" xmlns="">
+                  <a:solidFill>
+                    <a:schemeClr val="accent1"/>
+                  </a:solidFill>
+                </a14:hiddenFill>
+              </a:ext>
+              <a:ext uri="{91240B29-F687-4f45-9708-019B960494DF}">
+                <a14:hiddenLine xmlns:a14="http://schemas.microsoft.com/office/drawing/2010/main" xmlns="" w="9525" cap="flat" cmpd="sng" algn="ctr">
+                  <a:solidFill>
+                    <a:schemeClr val="tx1"/>
+                  </a:solidFill>
+                  <a:prstDash val="solid"/>
+                  <a:round/>
+                  <a:headEnd type="none" w="med" len="med"/>
+                  <a:tailEnd type="none" w="med" len="med"/>
+                </a14:hiddenLine>
+              </a:ext>
+              <a:ext uri="{AF507438-7753-43e0-B8FC-AC1667EBCBE1}">
+                <a14:hiddenEffects xmlns:a14="http://schemas.microsoft.com/office/drawing/2010/main" xmlns="">
+                  <a:effectLst>
+                    <a:outerShdw dist="35921" dir="2700000" algn="ctr" rotWithShape="0">
+                      <a:schemeClr val="bg2"/>
+                    </a:outerShdw>
+                  </a:effectLst>
+                </a14:hiddenEffects>
+              </a:ext>
+            </a:extLst>
+          </p:spPr>
+        </p:cxnSp>
+      </p:grpSp>
+      <p:grpSp>
+        <p:nvGrpSpPr>
+          <p:cNvPr id="24" name="Gruppieren 23">
+            <a:extLst>
+              <a:ext uri="{FF2B5EF4-FFF2-40B4-BE49-F238E27FC236}">
+                <a16:creationId xmlns:a16="http://schemas.microsoft.com/office/drawing/2014/main" id="{E42121A3-2D58-7A3F-801A-B3700371608A}"/>
+              </a:ext>
+            </a:extLst>
+          </p:cNvPr>
+          <p:cNvGrpSpPr/>
+          <p:nvPr/>
+        </p:nvGrpSpPr>
+        <p:grpSpPr>
+          <a:xfrm>
+            <a:off x="2573425" y="4138106"/>
+            <a:ext cx="5106963" cy="1762125"/>
+            <a:chOff x="2463692" y="3763964"/>
+            <a:chExt cx="5106963" cy="1762125"/>
+          </a:xfrm>
+        </p:grpSpPr>
+        <p:pic>
+          <p:nvPicPr>
+            <p:cNvPr id="13" name="Grafik 12">
+              <a:extLst>
+                <a:ext uri="{FF2B5EF4-FFF2-40B4-BE49-F238E27FC236}">
+                  <a16:creationId xmlns:a16="http://schemas.microsoft.com/office/drawing/2014/main" id="{79D5A284-2CF8-9486-C1C1-615B1F02F054}"/>
+                </a:ext>
+              </a:extLst>
+            </p:cNvPr>
+            <p:cNvPicPr>
+              <a:picLocks noChangeAspect="1"/>
+            </p:cNvPicPr>
+            <p:nvPr/>
+          </p:nvPicPr>
+          <p:blipFill>
+            <a:blip r:embed="rId4">
+              <a:extLst>
+                <a:ext uri="{96DAC541-7B7A-43D3-8B79-37D633B846F1}">
+                  <asvg:svgBlip xmlns:asvg="http://schemas.microsoft.com/office/drawing/2016/SVG/main" r:embed="rId5"/>
+                </a:ext>
+              </a:extLst>
+            </a:blip>
+            <a:stretch>
+              <a:fillRect/>
+            </a:stretch>
+          </p:blipFill>
+          <p:spPr>
+            <a:xfrm rot="18492313">
+              <a:off x="5732330" y="3687764"/>
+              <a:ext cx="1762125" cy="1914525"/>
+            </a:xfrm>
+            <a:prstGeom prst="rect">
+              <a:avLst/>
+            </a:prstGeom>
+          </p:spPr>
+        </p:pic>
+        <p:pic>
+          <p:nvPicPr>
+            <p:cNvPr id="18" name="Grafik 17">
+              <a:extLst>
+                <a:ext uri="{FF2B5EF4-FFF2-40B4-BE49-F238E27FC236}">
+                  <a16:creationId xmlns:a16="http://schemas.microsoft.com/office/drawing/2014/main" id="{CA1B9058-C764-0B41-5BFB-6274D46FD4F7}"/>
+                </a:ext>
+              </a:extLst>
+            </p:cNvPr>
+            <p:cNvPicPr>
+              <a:picLocks noChangeAspect="1"/>
+            </p:cNvPicPr>
+            <p:nvPr/>
+          </p:nvPicPr>
+          <p:blipFill>
+            <a:blip r:embed="rId6"/>
+            <a:stretch>
+              <a:fillRect/>
+            </a:stretch>
+          </p:blipFill>
+          <p:spPr>
+            <a:xfrm>
+              <a:off x="2463692" y="4178563"/>
+              <a:ext cx="1475656" cy="877108"/>
+            </a:xfrm>
+            <a:prstGeom prst="rect">
+              <a:avLst/>
+            </a:prstGeom>
+          </p:spPr>
+        </p:pic>
+        <p:cxnSp>
+          <p:nvCxnSpPr>
+            <p:cNvPr id="21" name="Gerader Verbinder 20">
+              <a:extLst>
+                <a:ext uri="{FF2B5EF4-FFF2-40B4-BE49-F238E27FC236}">
+                  <a16:creationId xmlns:a16="http://schemas.microsoft.com/office/drawing/2014/main" id="{5744B54A-5CFE-6629-6D6B-CFEC87AB2ADE}"/>
+                </a:ext>
+              </a:extLst>
+            </p:cNvPr>
+            <p:cNvCxnSpPr>
+              <a:cxnSpLocks/>
+            </p:cNvCxnSpPr>
+            <p:nvPr/>
+          </p:nvCxnSpPr>
+          <p:spPr bwMode="auto">
+            <a:xfrm>
+              <a:off x="3411671" y="5054742"/>
+              <a:ext cx="2544452" cy="338926"/>
+            </a:xfrm>
+            <a:prstGeom prst="line">
+              <a:avLst/>
+            </a:prstGeom>
+            <a:noFill/>
+            <a:ln>
+              <a:solidFill>
+                <a:srgbClr val="FF0000"/>
+              </a:solidFill>
+            </a:ln>
+            <a:effectLst/>
+            <a:extLst>
+              <a:ext uri="{909E8E84-426E-40dd-AFC4-6F175D3DCCD1}">
+                <a14:hiddenFill xmlns:a14="http://schemas.microsoft.com/office/drawing/2010/main" xmlns="">
+                  <a:solidFill>
+                    <a:schemeClr val="accent1"/>
+                  </a:solidFill>
+                </a14:hiddenFill>
+              </a:ext>
+              <a:ext uri="{91240B29-F687-4f45-9708-019B960494DF}">
+                <a14:hiddenLine xmlns:a14="http://schemas.microsoft.com/office/drawing/2010/main" xmlns="" w="9525" cap="flat" cmpd="sng" algn="ctr">
+                  <a:solidFill>
+                    <a:schemeClr val="tx1"/>
+                  </a:solidFill>
+                  <a:prstDash val="solid"/>
+                  <a:round/>
+                  <a:headEnd type="none" w="med" len="med"/>
+                  <a:tailEnd type="none" w="med" len="med"/>
+                </a14:hiddenLine>
+              </a:ext>
+              <a:ext uri="{AF507438-7753-43e0-B8FC-AC1667EBCBE1}">
+                <a14:hiddenEffects xmlns:a14="http://schemas.microsoft.com/office/drawing/2010/main" xmlns="">
+                  <a:effectLst>
+                    <a:outerShdw dist="35921" dir="2700000" algn="ctr" rotWithShape="0">
+                      <a:schemeClr val="bg2"/>
+                    </a:outerShdw>
+                  </a:effectLst>
+                </a14:hiddenEffects>
+              </a:ext>
+            </a:extLst>
+          </p:spPr>
+        </p:cxnSp>
+        <p:sp>
+          <p:nvSpPr>
+            <p:cNvPr id="22" name="Pfeil: nach rechts 21">
+              <a:extLst>
+                <a:ext uri="{FF2B5EF4-FFF2-40B4-BE49-F238E27FC236}">
+                  <a16:creationId xmlns:a16="http://schemas.microsoft.com/office/drawing/2014/main" id="{B290DEAC-C0AE-2393-02F0-28A2E0C366E7}"/>
+                </a:ext>
+              </a:extLst>
+            </p:cNvPr>
+            <p:cNvSpPr/>
+            <p:nvPr/>
+          </p:nvSpPr>
+          <p:spPr bwMode="auto">
+            <a:xfrm flipH="1">
+              <a:off x="4143837" y="4455159"/>
+              <a:ext cx="1080120" cy="288032"/>
+            </a:xfrm>
+            <a:prstGeom prst="rightArrow">
+              <a:avLst/>
+            </a:prstGeom>
+            <a:noFill/>
+            <a:ln>
+              <a:solidFill>
+                <a:srgbClr val="FF0000"/>
+              </a:solidFill>
+            </a:ln>
+            <a:effectLst/>
+            <a:extLst>
+              <a:ext uri="{909E8E84-426E-40dd-AFC4-6F175D3DCCD1}">
+                <a14:hiddenFill xmlns:a14="http://schemas.microsoft.com/office/drawing/2010/main" xmlns="">
+                  <a:solidFill>
+                    <a:schemeClr val="accent1"/>
+                  </a:solidFill>
+                </a14:hiddenFill>
+              </a:ext>
+              <a:ext uri="{91240B29-F687-4f45-9708-019B960494DF}">
+                <a14:hiddenLine xmlns:a14="http://schemas.microsoft.com/office/drawing/2010/main" xmlns="" w="9525" cap="flat" cmpd="sng" algn="ctr">
+                  <a:solidFill>
+                    <a:schemeClr val="tx1"/>
+                  </a:solidFill>
+                  <a:prstDash val="solid"/>
+                  <a:round/>
+                  <a:headEnd type="none" w="med" len="med"/>
+                  <a:tailEnd type="none" w="med" len="med"/>
+                </a14:hiddenLine>
+              </a:ext>
+              <a:ext uri="{AF507438-7753-43e0-B8FC-AC1667EBCBE1}">
+                <a14:hiddenEffects xmlns:a14="http://schemas.microsoft.com/office/drawing/2010/main" xmlns="">
+                  <a:effectLst>
+                    <a:outerShdw dist="35921" dir="2700000" algn="ctr" rotWithShape="0">
+                      <a:schemeClr val="bg2"/>
+                    </a:outerShdw>
+                  </a:effectLst>
+                </a14:hiddenEffects>
+              </a:ext>
+            </a:extLst>
+          </p:spPr>
+          <p:txBody>
+            <a:bodyPr vert="horz" wrap="square" lIns="0" tIns="0" rIns="0" bIns="0" numCol="1" rtlCol="0" anchor="t" anchorCtr="0" compatLnSpc="1">
+              <a:prstTxWarp prst="textNoShape">
+                <a:avLst/>
+              </a:prstTxWarp>
+            </a:bodyPr>
+            <a:lstStyle/>
+            <a:p>
+              <a:pPr marL="0" marR="0" indent="0" algn="l" defTabSz="914400" rtl="0" eaLnBrk="1" fontAlgn="base" latinLnBrk="0" hangingPunct="1">
+                <a:lnSpc>
+                  <a:spcPct val="100000"/>
+                </a:lnSpc>
+                <a:spcBef>
+                  <a:spcPct val="0"/>
+                </a:spcBef>
+                <a:spcAft>
+                  <a:spcPct val="40000"/>
+                </a:spcAft>
+                <a:buClrTx/>
+                <a:buSzTx/>
+                <a:buFont typeface="Wingdings" pitchFamily="2" charset="2"/>
+                <a:buNone/>
+                <a:tabLst/>
+              </a:pPr>
+              <a:endParaRPr kumimoji="0" lang="en-GB" sz="1800" b="0" i="0" u="none" strike="noStrike" cap="none" normalizeH="0" baseline="0">
+                <a:ln>
+                  <a:noFill/>
+                </a:ln>
+                <a:solidFill>
+                  <a:schemeClr val="tx1"/>
+                </a:solidFill>
+                <a:effectLst/>
+                <a:latin typeface="Frutiger LT Com 55 Roman" pitchFamily="34" charset="0"/>
+              </a:endParaRPr>
+            </a:p>
+          </p:txBody>
+        </p:sp>
+        <p:cxnSp>
+          <p:nvCxnSpPr>
+            <p:cNvPr id="23" name="Gerader Verbinder 22">
+              <a:extLst>
+                <a:ext uri="{FF2B5EF4-FFF2-40B4-BE49-F238E27FC236}">
+                  <a16:creationId xmlns:a16="http://schemas.microsoft.com/office/drawing/2014/main" id="{B17775DD-9652-512A-85F8-AD798F33B5E0}"/>
+                </a:ext>
+              </a:extLst>
+            </p:cNvPr>
+            <p:cNvCxnSpPr>
+              <a:cxnSpLocks/>
+            </p:cNvCxnSpPr>
+            <p:nvPr/>
+          </p:nvCxnSpPr>
+          <p:spPr bwMode="auto">
+            <a:xfrm flipV="1">
+              <a:off x="3411671" y="3804682"/>
+              <a:ext cx="2544452" cy="338926"/>
+            </a:xfrm>
+            <a:prstGeom prst="line">
+              <a:avLst/>
+            </a:prstGeom>
+            <a:noFill/>
+            <a:ln>
+              <a:solidFill>
+                <a:srgbClr val="FF0000"/>
+              </a:solidFill>
+            </a:ln>
+            <a:effectLst/>
+            <a:extLst>
+              <a:ext uri="{909E8E84-426E-40dd-AFC4-6F175D3DCCD1}">
+                <a14:hiddenFill xmlns:a14="http://schemas.microsoft.com/office/drawing/2010/main" xmlns="">
+                  <a:solidFill>
+                    <a:schemeClr val="accent1"/>
+                  </a:solidFill>
+                </a14:hiddenFill>
+              </a:ext>
+              <a:ext uri="{91240B29-F687-4f45-9708-019B960494DF}">
+                <a14:hiddenLine xmlns:a14="http://schemas.microsoft.com/office/drawing/2010/main" xmlns="" w="9525" cap="flat" cmpd="sng" algn="ctr">
+                  <a:solidFill>
+                    <a:schemeClr val="tx1"/>
+                  </a:solidFill>
+                  <a:prstDash val="solid"/>
+                  <a:round/>
+                  <a:headEnd type="none" w="med" len="med"/>
+                  <a:tailEnd type="none" w="med" len="med"/>
+                </a14:hiddenLine>
+              </a:ext>
+              <a:ext uri="{AF507438-7753-43e0-B8FC-AC1667EBCBE1}">
+                <a14:hiddenEffects xmlns:a14="http://schemas.microsoft.com/office/drawing/2010/main" xmlns="">
+                  <a:effectLst>
+                    <a:outerShdw dist="35921" dir="2700000" algn="ctr" rotWithShape="0">
+                      <a:schemeClr val="bg2"/>
+                    </a:outerShdw>
+                  </a:effectLst>
+                </a14:hiddenEffects>
+              </a:ext>
+            </a:extLst>
+          </p:spPr>
+        </p:cxnSp>
+      </p:grpSp>
+      <p:sp>
+        <p:nvSpPr>
+          <p:cNvPr id="26" name="Textfeld 25">
+            <a:extLst>
+              <a:ext uri="{FF2B5EF4-FFF2-40B4-BE49-F238E27FC236}">
+                <a16:creationId xmlns:a16="http://schemas.microsoft.com/office/drawing/2014/main" id="{1071E943-DEAC-3FCC-8EB5-A9A45B9AEAB6}"/>
+              </a:ext>
+            </a:extLst>
+          </p:cNvPr>
+          <p:cNvSpPr txBox="1"/>
+          <p:nvPr/>
+        </p:nvSpPr>
+        <p:spPr>
+          <a:xfrm>
+            <a:off x="7236296" y="5652057"/>
+            <a:ext cx="1080120" cy="369332"/>
+          </a:xfrm>
+          <a:prstGeom prst="rect">
+            <a:avLst/>
+          </a:prstGeom>
+          <a:noFill/>
+        </p:spPr>
+        <p:txBody>
+          <a:bodyPr wrap="square" rtlCol="0">
+            <a:spAutoFit/>
+          </a:bodyPr>
+          <a:lstStyle/>
+          <a:p>
+            <a:r>
+              <a:rPr lang="de-DE" dirty="0"/>
+              <a:t>[3]</a:t>
+            </a:r>
+            <a:endParaRPr lang="en-GB" dirty="0"/>
+          </a:p>
+        </p:txBody>
+      </p:sp>
+      <mc:AlternateContent xmlns:mc="http://schemas.openxmlformats.org/markup-compatibility/2006">
+        <mc:Choice xmlns:a14="http://schemas.microsoft.com/office/drawing/2010/main" Requires="a14">
+          <p:sp>
+            <p:nvSpPr>
+              <p:cNvPr id="27" name="Textfeld 26">
+                <a:extLst>
+                  <a:ext uri="{FF2B5EF4-FFF2-40B4-BE49-F238E27FC236}">
+                    <a16:creationId xmlns:a16="http://schemas.microsoft.com/office/drawing/2014/main" id="{EBFAAC81-FC80-39F0-A994-7397D0797259}"/>
+                  </a:ext>
+                </a:extLst>
+              </p:cNvPr>
+              <p:cNvSpPr txBox="1"/>
+              <p:nvPr/>
+            </p:nvSpPr>
+            <p:spPr>
+              <a:xfrm>
+                <a:off x="5283701" y="2876985"/>
+                <a:ext cx="2736304" cy="658706"/>
+              </a:xfrm>
+              <a:prstGeom prst="rect">
+                <a:avLst/>
+              </a:prstGeom>
+              <a:noFill/>
+            </p:spPr>
+            <p:txBody>
+              <a:bodyPr wrap="square" rtlCol="0">
+                <a:spAutoFit/>
+              </a:bodyPr>
+              <a:lstStyle/>
+              <a:p>
+                <a14:m>
+                  <m:oMathPara xmlns:m="http://schemas.openxmlformats.org/officeDocument/2006/math">
+                    <m:oMathParaPr>
+                      <m:jc m:val="centerGroup"/>
+                    </m:oMathParaPr>
+                    <m:oMath xmlns:m="http://schemas.openxmlformats.org/officeDocument/2006/math">
+                      <m:nary>
+                        <m:naryPr>
+                          <m:ctrlPr>
+                            <a:rPr lang="de-DE" sz="1800" b="0" i="1" smtClean="0">
+                              <a:latin typeface="Cambria Math" panose="02040503050406030204" pitchFamily="18" charset="0"/>
+                            </a:rPr>
+                          </m:ctrlPr>
+                        </m:naryPr>
+                        <m:sub>
+                          <m:r>
+                            <a:rPr lang="de-DE" sz="1800" b="0" i="1" smtClean="0">
+                              <a:latin typeface="Cambria Math" panose="02040503050406030204" pitchFamily="18" charset="0"/>
+                              <a:ea typeface="Cambria Math" panose="02040503050406030204" pitchFamily="18" charset="0"/>
+                            </a:rPr>
+                            <m:t>𝒮</m:t>
+                          </m:r>
+                        </m:sub>
+                        <m:sup>
+                          <m:r>
+                            <a:rPr lang="de-DE" sz="1800" b="0" i="1" smtClean="0">
+                              <a:latin typeface="Cambria Math" panose="02040503050406030204" pitchFamily="18" charset="0"/>
+                            </a:rPr>
+                            <m:t> </m:t>
+                          </m:r>
+                        </m:sup>
+                        <m:e>
+                          <m:sSub>
+                            <m:sSubPr>
+                              <m:ctrlPr>
+                                <a:rPr lang="de-DE" sz="1800" b="0" i="1" smtClean="0">
+                                  <a:latin typeface="Cambria Math" panose="02040503050406030204" pitchFamily="18" charset="0"/>
+                                </a:rPr>
+                              </m:ctrlPr>
+                            </m:sSubPr>
+                            <m:e>
+                              <m:r>
+                                <a:rPr lang="de-DE" sz="1800" b="0" i="1" smtClean="0">
+                                  <a:latin typeface="Cambria Math" panose="02040503050406030204" pitchFamily="18" charset="0"/>
+                                </a:rPr>
+                                <m:t>𝑘</m:t>
+                              </m:r>
+                            </m:e>
+                            <m:sub>
+                              <m:r>
+                                <a:rPr lang="de-DE" sz="1800" b="0" i="1" smtClean="0">
+                                  <a:latin typeface="Cambria Math" panose="02040503050406030204" pitchFamily="18" charset="0"/>
+                                </a:rPr>
+                                <m:t>𝜃</m:t>
+                              </m:r>
+                            </m:sub>
+                          </m:sSub>
+                          <m:d>
+                            <m:dPr>
+                              <m:ctrlPr>
+                                <a:rPr lang="de-DE" i="1">
+                                  <a:latin typeface="Cambria Math" panose="02040503050406030204" pitchFamily="18" charset="0"/>
+                                </a:rPr>
+                              </m:ctrlPr>
+                            </m:dPr>
+                            <m:e>
+                              <m:acc>
+                                <m:accPr>
+                                  <m:chr m:val="⃗"/>
+                                  <m:ctrlPr>
+                                    <a:rPr lang="de-DE" i="1">
+                                      <a:latin typeface="Cambria Math" panose="02040503050406030204" pitchFamily="18" charset="0"/>
+                                    </a:rPr>
+                                  </m:ctrlPr>
+                                </m:accPr>
+                                <m:e>
+                                  <m:r>
+                                    <a:rPr lang="de-DE" i="1">
+                                      <a:latin typeface="Cambria Math" panose="02040503050406030204" pitchFamily="18" charset="0"/>
+                                    </a:rPr>
+                                    <m:t>𝑦</m:t>
+                                  </m:r>
+                                </m:e>
+                              </m:acc>
+                              <m:r>
+                                <a:rPr lang="de-DE" i="1">
+                                  <a:latin typeface="Cambria Math" panose="02040503050406030204" pitchFamily="18" charset="0"/>
+                                </a:rPr>
+                                <m:t>, </m:t>
+                              </m:r>
+                              <m:acc>
+                                <m:accPr>
+                                  <m:chr m:val="⃗"/>
+                                  <m:ctrlPr>
+                                    <a:rPr lang="de-DE" i="1">
+                                      <a:latin typeface="Cambria Math" panose="02040503050406030204" pitchFamily="18" charset="0"/>
+                                    </a:rPr>
+                                  </m:ctrlPr>
+                                </m:accPr>
+                                <m:e>
+                                  <m:r>
+                                    <a:rPr lang="de-DE" i="1">
+                                      <a:latin typeface="Cambria Math" panose="02040503050406030204" pitchFamily="18" charset="0"/>
+                                    </a:rPr>
+                                    <m:t>𝑥</m:t>
+                                  </m:r>
+                                </m:e>
+                              </m:acc>
+                            </m:e>
+                          </m:d>
+                          <m:r>
+                            <a:rPr lang="de-DE" b="0" i="1" smtClean="0">
+                              <a:latin typeface="Cambria Math" panose="02040503050406030204" pitchFamily="18" charset="0"/>
+                            </a:rPr>
+                            <m:t>𝑣</m:t>
+                          </m:r>
+                          <m:d>
+                            <m:dPr>
+                              <m:ctrlPr>
+                                <a:rPr lang="de-DE" i="1">
+                                  <a:latin typeface="Cambria Math" panose="02040503050406030204" pitchFamily="18" charset="0"/>
+                                </a:rPr>
+                              </m:ctrlPr>
+                            </m:dPr>
+                            <m:e>
+                              <m:acc>
+                                <m:accPr>
+                                  <m:chr m:val="⃗"/>
+                                  <m:ctrlPr>
+                                    <a:rPr lang="de-DE" i="1">
+                                      <a:latin typeface="Cambria Math" panose="02040503050406030204" pitchFamily="18" charset="0"/>
+                                    </a:rPr>
+                                  </m:ctrlPr>
+                                </m:accPr>
+                                <m:e>
+                                  <m:r>
+                                    <a:rPr lang="de-DE" i="1">
+                                      <a:latin typeface="Cambria Math" panose="02040503050406030204" pitchFamily="18" charset="0"/>
+                                    </a:rPr>
+                                    <m:t>𝑦</m:t>
+                                  </m:r>
+                                </m:e>
+                              </m:acc>
+                            </m:e>
+                          </m:d>
+                          <m:r>
+                            <a:rPr lang="de-DE" i="1">
+                              <a:latin typeface="Cambria Math" panose="02040503050406030204" pitchFamily="18" charset="0"/>
+                            </a:rPr>
+                            <m:t>𝑑</m:t>
+                          </m:r>
+                          <m:acc>
+                            <m:accPr>
+                              <m:chr m:val="⃗"/>
+                              <m:ctrlPr>
+                                <a:rPr lang="de-DE" i="1">
+                                  <a:latin typeface="Cambria Math" panose="02040503050406030204" pitchFamily="18" charset="0"/>
+                                </a:rPr>
+                              </m:ctrlPr>
+                            </m:accPr>
+                            <m:e>
+                              <m:r>
+                                <a:rPr lang="de-DE" b="0" i="1" smtClean="0">
+                                  <a:latin typeface="Cambria Math" panose="02040503050406030204" pitchFamily="18" charset="0"/>
+                                </a:rPr>
+                                <m:t>𝑠</m:t>
+                              </m:r>
+                            </m:e>
+                          </m:acc>
+                        </m:e>
+                      </m:nary>
+                    </m:oMath>
+                  </m:oMathPara>
+                </a14:m>
+                <a:endParaRPr lang="en-GB" dirty="0"/>
+              </a:p>
+            </p:txBody>
+          </p:sp>
+        </mc:Choice>
+        <mc:Fallback>
+          <p:sp>
+            <p:nvSpPr>
+              <p:cNvPr id="27" name="Textfeld 26">
+                <a:extLst>
+                  <a:ext uri="{FF2B5EF4-FFF2-40B4-BE49-F238E27FC236}">
+                    <a16:creationId xmlns:a16="http://schemas.microsoft.com/office/drawing/2014/main" id="{EBFAAC81-FC80-39F0-A994-7397D0797259}"/>
+                  </a:ext>
+                </a:extLst>
+              </p:cNvPr>
+              <p:cNvSpPr txBox="1">
+                <a:spLocks noRot="1" noChangeAspect="1" noMove="1" noResize="1" noEditPoints="1" noAdjustHandles="1" noChangeArrowheads="1" noChangeShapeType="1" noTextEdit="1"/>
+              </p:cNvSpPr>
+              <p:nvPr/>
+            </p:nvSpPr>
+            <p:spPr>
+              <a:xfrm>
+                <a:off x="5283701" y="2876985"/>
+                <a:ext cx="2736304" cy="658706"/>
+              </a:xfrm>
+              <a:prstGeom prst="rect">
+                <a:avLst/>
+              </a:prstGeom>
+              <a:blipFill>
+                <a:blip r:embed="rId7"/>
+                <a:stretch>
+                  <a:fillRect/>
+                </a:stretch>
+              </a:blipFill>
+            </p:spPr>
+            <p:txBody>
+              <a:bodyPr/>
+              <a:lstStyle/>
+              <a:p>
+                <a:r>
+                  <a:rPr lang="en-GB">
+                    <a:noFill/>
+                  </a:rPr>
+                  <a:t> </a:t>
+                </a:r>
+              </a:p>
+            </p:txBody>
+          </p:sp>
+        </mc:Fallback>
+      </mc:AlternateContent>
+      <p:sp>
+        <p:nvSpPr>
+          <p:cNvPr id="28" name="Pfeil: nach unten 27">
+            <a:extLst>
+              <a:ext uri="{FF2B5EF4-FFF2-40B4-BE49-F238E27FC236}">
+                <a16:creationId xmlns:a16="http://schemas.microsoft.com/office/drawing/2014/main" id="{819A4F06-AC4F-6B54-CA57-B3AC97231149}"/>
+              </a:ext>
+            </a:extLst>
+          </p:cNvPr>
+          <p:cNvSpPr/>
+          <p:nvPr/>
+        </p:nvSpPr>
+        <p:spPr bwMode="auto">
+          <a:xfrm>
+            <a:off x="6516216" y="2574438"/>
+            <a:ext cx="360040" cy="461121"/>
+          </a:xfrm>
+          <a:prstGeom prst="downArrow">
+            <a:avLst/>
+          </a:prstGeom>
+          <a:noFill/>
+          <a:ln>
+            <a:solidFill>
+              <a:srgbClr val="FF0000"/>
+            </a:solidFill>
+          </a:ln>
+          <a:effectLst/>
+          <a:extLst>
+            <a:ext uri="{909E8E84-426E-40dd-AFC4-6F175D3DCCD1}">
+              <a14:hiddenFill xmlns:a14="http://schemas.microsoft.com/office/drawing/2010/main" xmlns="">
+                <a:solidFill>
+                  <a:schemeClr val="accent1"/>
+                </a:solidFill>
+              </a14:hiddenFill>
+            </a:ext>
+            <a:ext uri="{91240B29-F687-4f45-9708-019B960494DF}">
+              <a14:hiddenLine xmlns:a14="http://schemas.microsoft.com/office/drawing/2010/main" xmlns="" w="9525" cap="flat" cmpd="sng" algn="ctr">
+                <a:solidFill>
+                  <a:schemeClr val="tx1"/>
+                </a:solidFill>
+                <a:prstDash val="solid"/>
+                <a:round/>
+                <a:headEnd type="none" w="med" len="med"/>
+                <a:tailEnd type="none" w="med" len="med"/>
+              </a14:hiddenLine>
+            </a:ext>
+            <a:ext uri="{AF507438-7753-43e0-B8FC-AC1667EBCBE1}">
+              <a14:hiddenEffects xmlns:a14="http://schemas.microsoft.com/office/drawing/2010/main" xmlns="">
+                <a:effectLst>
+                  <a:outerShdw dist="35921" dir="2700000" algn="ctr" rotWithShape="0">
+                    <a:schemeClr val="bg2"/>
+                  </a:outerShdw>
+                </a:effectLst>
+              </a14:hiddenEffects>
+            </a:ext>
+          </a:extLst>
+        </p:spPr>
+        <p:txBody>
+          <a:bodyPr vert="horz" wrap="square" lIns="0" tIns="0" rIns="0" bIns="0" numCol="1" rtlCol="0" anchor="t" anchorCtr="0" compatLnSpc="1">
+            <a:prstTxWarp prst="textNoShape">
+              <a:avLst/>
+            </a:prstTxWarp>
+          </a:bodyPr>
+          <a:lstStyle/>
+          <a:p>
+            <a:pPr marL="0" marR="0" indent="0" algn="l" defTabSz="914400" rtl="0" eaLnBrk="1" fontAlgn="base" latinLnBrk="0" hangingPunct="1">
+              <a:lnSpc>
+                <a:spcPct val="100000"/>
+              </a:lnSpc>
+              <a:spcBef>
+                <a:spcPct val="0"/>
+              </a:spcBef>
+              <a:spcAft>
+                <a:spcPct val="40000"/>
+              </a:spcAft>
+              <a:buClrTx/>
+              <a:buSzTx/>
+              <a:buFont typeface="Wingdings" pitchFamily="2" charset="2"/>
+              <a:buNone/>
+              <a:tabLst/>
+            </a:pPr>
+            <a:endParaRPr kumimoji="0" lang="en-GB" sz="1800" b="0" i="0" u="none" strike="noStrike" cap="none" normalizeH="0" baseline="0">
+              <a:ln>
+                <a:noFill/>
+              </a:ln>
+              <a:solidFill>
+                <a:schemeClr val="tx1"/>
+              </a:solidFill>
+              <a:effectLst/>
+              <a:latin typeface="Frutiger LT Com 55 Roman" pitchFamily="34" charset="0"/>
+            </a:endParaRPr>
+          </a:p>
+        </p:txBody>
+      </p:sp>
+      <p:sp>
+        <p:nvSpPr>
+          <p:cNvPr id="29" name="Pfeil: nach unten 28">
+            <a:extLst>
+              <a:ext uri="{FF2B5EF4-FFF2-40B4-BE49-F238E27FC236}">
+                <a16:creationId xmlns:a16="http://schemas.microsoft.com/office/drawing/2014/main" id="{3D06754B-E20E-01A4-F8E7-D136AF5ED13B}"/>
+              </a:ext>
+            </a:extLst>
+          </p:cNvPr>
+          <p:cNvSpPr/>
+          <p:nvPr/>
+        </p:nvSpPr>
+        <p:spPr bwMode="auto">
+          <a:xfrm>
+            <a:off x="6516216" y="3369892"/>
+            <a:ext cx="360040" cy="461121"/>
+          </a:xfrm>
+          <a:prstGeom prst="downArrow">
+            <a:avLst/>
+          </a:prstGeom>
+          <a:noFill/>
+          <a:ln>
+            <a:solidFill>
+              <a:srgbClr val="FF0000"/>
+            </a:solidFill>
+          </a:ln>
+          <a:effectLst/>
+          <a:extLst>
+            <a:ext uri="{909E8E84-426E-40dd-AFC4-6F175D3DCCD1}">
+              <a14:hiddenFill xmlns:a14="http://schemas.microsoft.com/office/drawing/2010/main" xmlns="">
+                <a:solidFill>
+                  <a:schemeClr val="accent1"/>
+                </a:solidFill>
+              </a14:hiddenFill>
+            </a:ext>
+            <a:ext uri="{91240B29-F687-4f45-9708-019B960494DF}">
+              <a14:hiddenLine xmlns:a14="http://schemas.microsoft.com/office/drawing/2010/main" xmlns="" w="9525" cap="flat" cmpd="sng" algn="ctr">
+                <a:solidFill>
+                  <a:schemeClr val="tx1"/>
+                </a:solidFill>
+                <a:prstDash val="solid"/>
+                <a:round/>
+                <a:headEnd type="none" w="med" len="med"/>
+                <a:tailEnd type="none" w="med" len="med"/>
+              </a14:hiddenLine>
+            </a:ext>
+            <a:ext uri="{AF507438-7753-43e0-B8FC-AC1667EBCBE1}">
+              <a14:hiddenEffects xmlns:a14="http://schemas.microsoft.com/office/drawing/2010/main" xmlns="">
+                <a:effectLst>
+                  <a:outerShdw dist="35921" dir="2700000" algn="ctr" rotWithShape="0">
+                    <a:schemeClr val="bg2"/>
+                  </a:outerShdw>
+                </a:effectLst>
+              </a14:hiddenEffects>
+            </a:ext>
+          </a:extLst>
+        </p:spPr>
+        <p:txBody>
+          <a:bodyPr vert="horz" wrap="square" lIns="0" tIns="0" rIns="0" bIns="0" numCol="1" rtlCol="0" anchor="t" anchorCtr="0" compatLnSpc="1">
+            <a:prstTxWarp prst="textNoShape">
+              <a:avLst/>
+            </a:prstTxWarp>
+          </a:bodyPr>
+          <a:lstStyle/>
+          <a:p>
+            <a:pPr marL="0" marR="0" indent="0" algn="l" defTabSz="914400" rtl="0" eaLnBrk="1" fontAlgn="base" latinLnBrk="0" hangingPunct="1">
+              <a:lnSpc>
+                <a:spcPct val="100000"/>
+              </a:lnSpc>
+              <a:spcBef>
+                <a:spcPct val="0"/>
+              </a:spcBef>
+              <a:spcAft>
+                <a:spcPct val="40000"/>
+              </a:spcAft>
+              <a:buClrTx/>
+              <a:buSzTx/>
+              <a:buFont typeface="Wingdings" pitchFamily="2" charset="2"/>
+              <a:buNone/>
+              <a:tabLst/>
+            </a:pPr>
+            <a:endParaRPr kumimoji="0" lang="en-GB" sz="1800" b="0" i="0" u="none" strike="noStrike" cap="none" normalizeH="0" baseline="0">
+              <a:ln>
+                <a:noFill/>
+              </a:ln>
+              <a:solidFill>
+                <a:schemeClr val="tx1"/>
+              </a:solidFill>
+              <a:effectLst/>
+              <a:latin typeface="Frutiger LT Com 55 Roman" pitchFamily="34" charset="0"/>
+            </a:endParaRPr>
           </a:p>
         </p:txBody>
       </p:sp>
     </p:spTree>
     <p:extLst>
       <p:ext uri="{BB962C8B-B14F-4D97-AF65-F5344CB8AC3E}">
-        <p14:creationId xmlns:p14="http://schemas.microsoft.com/office/powerpoint/2010/main" val="1210688276"/>
+        <p14:creationId xmlns:p14="http://schemas.microsoft.com/office/powerpoint/2010/main" val="1615993440"/>
       </p:ext>
     </p:extLst>
   </p:cSld>
@@ -5187,7 +8920,7 @@
 </p:sld>
 </file>
 
-<file path=ppt/slides/slide7.xml><?xml version="1.0" encoding="utf-8"?>
+<file path=ppt/slides/slide8.xml><?xml version="1.0" encoding="utf-8"?>
 <p:sld xmlns:a="http://schemas.openxmlformats.org/drawingml/2006/main" xmlns:r="http://schemas.openxmlformats.org/officeDocument/2006/relationships" xmlns:p="http://schemas.openxmlformats.org/presentationml/2006/main">
   <p:cSld>
     <p:spTree>
@@ -5325,6 +9058,69 @@
                 <a:hlinkClick r:id="rId2"/>
               </a:rPr>
               <a:t> </a:t>
+            </a:r>
+            <a:endParaRPr lang="en-US" noProof="0" dirty="0">
+              <a:latin typeface="Frutiger LT Com 45 Light"/>
+            </a:endParaRPr>
+          </a:p>
+          <a:p>
+            <a:pPr marL="0" indent="0">
+              <a:buNone/>
+            </a:pPr>
+            <a:r>
+              <a:rPr lang="en-US" dirty="0">
+                <a:latin typeface="Frutiger LT Com 45 Light"/>
+              </a:rPr>
+              <a:t>[2] </a:t>
+            </a:r>
+            <a:r>
+              <a:rPr lang="en-US" dirty="0">
+                <a:latin typeface="Frutiger LT Com 45 Light"/>
+                <a:hlinkClick r:id="rId3"/>
+              </a:rPr>
+              <a:t>Gitter (</a:t>
+            </a:r>
+            <a:r>
+              <a:rPr lang="en-US" dirty="0" err="1">
+                <a:latin typeface="Frutiger LT Com 45 Light"/>
+                <a:hlinkClick r:id="rId3"/>
+              </a:rPr>
+              <a:t>Geometrie</a:t>
+            </a:r>
+            <a:r>
+              <a:rPr lang="en-US" dirty="0">
+                <a:latin typeface="Frutiger LT Com 45 Light"/>
+                <a:hlinkClick r:id="rId3"/>
+              </a:rPr>
+              <a:t>)</a:t>
+            </a:r>
+            <a:endParaRPr lang="en-US" dirty="0">
+              <a:latin typeface="Frutiger LT Com 45 Light"/>
+            </a:endParaRPr>
+          </a:p>
+          <a:p>
+            <a:pPr marL="0" indent="0">
+              <a:buNone/>
+            </a:pPr>
+            <a:r>
+              <a:rPr lang="en-US" noProof="0" dirty="0">
+                <a:latin typeface="Frutiger LT Com 45 Light"/>
+              </a:rPr>
+              <a:t>[3] </a:t>
+            </a:r>
+            <a:r>
+              <a:rPr lang="en-US" noProof="0" dirty="0">
+                <a:latin typeface="Frutiger LT Com 45 Light"/>
+                <a:hlinkClick r:id="rId4"/>
+              </a:rPr>
+              <a:t>Tesseract </a:t>
+            </a:r>
+            <a:r>
+              <a:rPr lang="en-US" noProof="0" dirty="0" err="1">
+                <a:latin typeface="Frutiger LT Com 45 Light"/>
+                <a:hlinkClick r:id="rId4"/>
+              </a:rPr>
+              <a:t>MathWorld</a:t>
             </a:r>
             <a:endParaRPr lang="en-US" noProof="0" dirty="0"/>
           </a:p>

--- a/NeuralOperator.pptx
+++ b/NeuralOperator.pptx
@@ -5,10 +5,10 @@
     <p:sldMasterId id="2147483671" r:id="rId1"/>
   </p:sldMasterIdLst>
   <p:notesMasterIdLst>
-    <p:notesMasterId r:id="rId10"/>
+    <p:notesMasterId r:id="rId14"/>
   </p:notesMasterIdLst>
   <p:handoutMasterIdLst>
-    <p:handoutMasterId r:id="rId11"/>
+    <p:handoutMasterId r:id="rId15"/>
   </p:handoutMasterIdLst>
   <p:sldIdLst>
     <p:sldId id="305" r:id="rId2"/>
@@ -18,7 +18,11 @@
     <p:sldId id="373" r:id="rId6"/>
     <p:sldId id="375" r:id="rId7"/>
     <p:sldId id="376" r:id="rId8"/>
-    <p:sldId id="355" r:id="rId9"/>
+    <p:sldId id="377" r:id="rId9"/>
+    <p:sldId id="378" r:id="rId10"/>
+    <p:sldId id="380" r:id="rId11"/>
+    <p:sldId id="355" r:id="rId12"/>
+    <p:sldId id="379" r:id="rId13"/>
   </p:sldIdLst>
   <p:sldSz cx="9144000" cy="6858000" type="screen4x3"/>
   <p:notesSz cx="6805613" cy="9944100"/>
@@ -159,7 +163,11 @@
             <p14:sldId id="373"/>
             <p14:sldId id="375"/>
             <p14:sldId id="376"/>
+            <p14:sldId id="377"/>
+            <p14:sldId id="378"/>
+            <p14:sldId id="380"/>
             <p14:sldId id="355"/>
+            <p14:sldId id="379"/>
           </p14:sldIdLst>
         </p14:section>
       </p14:sectionLst>
@@ -332,7 +340,7 @@
               <a:pPr>
                 <a:defRPr/>
               </a:pPr>
-              <a:t>28.02.2025</a:t>
+              <a:t>02.03.2025</a:t>
             </a:fld>
             <a:endParaRPr lang="de-DE"/>
           </a:p>
@@ -540,7 +548,7 @@
               <a:pPr>
                 <a:defRPr/>
               </a:pPr>
-              <a:t>28.02.2025</a:t>
+              <a:t>01.03.2025</a:t>
             </a:fld>
             <a:endParaRPr lang="de-DE" dirty="0"/>
           </a:p>
@@ -1187,6 +1195,67 @@
 </p:notes>
 </file>
 
+<file path=ppt/notesSlides/notesSlide2.xml><?xml version="1.0" encoding="utf-8"?>
+<p:notes xmlns:a="http://schemas.openxmlformats.org/drawingml/2006/main" xmlns:r="http://schemas.openxmlformats.org/officeDocument/2006/relationships" xmlns:p="http://schemas.openxmlformats.org/presentationml/2006/main">
+  <p:cSld>
+    <p:spTree>
+      <p:nvGrpSpPr>
+        <p:cNvPr id="1" name=""/>
+        <p:cNvGrpSpPr/>
+        <p:nvPr/>
+      </p:nvGrpSpPr>
+      <p:grpSpPr>
+        <a:xfrm>
+          <a:off x="0" y="0"/>
+          <a:ext cx="0" cy="0"/>
+          <a:chOff x="0" y="0"/>
+          <a:chExt cx="0" cy="0"/>
+        </a:xfrm>
+      </p:grpSpPr>
+      <p:sp>
+        <p:nvSpPr>
+          <p:cNvPr id="2" name="Folienbildplatzhalter 1"/>
+          <p:cNvSpPr>
+            <a:spLocks noGrp="1" noRot="1" noChangeAspect="1"/>
+          </p:cNvSpPr>
+          <p:nvPr>
+            <p:ph type="sldImg"/>
+          </p:nvPr>
+        </p:nvSpPr>
+        <p:spPr/>
+      </p:sp>
+      <p:sp>
+        <p:nvSpPr>
+          <p:cNvPr id="3" name="Notizenplatzhalter 2"/>
+          <p:cNvSpPr>
+            <a:spLocks noGrp="1"/>
+          </p:cNvSpPr>
+          <p:nvPr>
+            <p:ph type="body" idx="1"/>
+          </p:nvPr>
+        </p:nvSpPr>
+        <p:spPr/>
+        <p:txBody>
+          <a:bodyPr/>
+          <a:lstStyle/>
+          <a:p>
+            <a:endParaRPr lang="en-GB" dirty="0"/>
+          </a:p>
+        </p:txBody>
+      </p:sp>
+    </p:spTree>
+    <p:extLst>
+      <p:ext uri="{BB962C8B-B14F-4D97-AF65-F5344CB8AC3E}">
+        <p14:creationId xmlns:p14="http://schemas.microsoft.com/office/powerpoint/2010/main" val="3982854361"/>
+      </p:ext>
+    </p:extLst>
+  </p:cSld>
+  <p:clrMapOvr>
+    <a:masterClrMapping/>
+  </p:clrMapOvr>
+</p:notes>
+</file>
+
 <file path=ppt/slideLayouts/slideLayout1.xml><?xml version="1.0" encoding="utf-8"?>
 <p:sldLayout xmlns:a="http://schemas.openxmlformats.org/drawingml/2006/main" xmlns:r="http://schemas.openxmlformats.org/officeDocument/2006/relationships" xmlns:p="http://schemas.openxmlformats.org/presentationml/2006/main" showMasterSp="0" preserve="1" userDrawn="1">
   <p:cSld name="Titel mit Logo">
@@ -1232,12 +1301,12 @@
           <a:effectLst/>
           <a:extLst>
             <a:ext uri="{909E8E84-426E-40dd-AFC4-6F175D3DCCD1}">
-              <a14:hiddenFill xmlns="" xmlns:a14="http://schemas.microsoft.com/office/drawing/2010/main">
+              <a14:hiddenFill xmlns:a14="http://schemas.microsoft.com/office/drawing/2010/main" xmlns="">
                 <a:noFill/>
               </a14:hiddenFill>
             </a:ext>
             <a:ext uri="{AF507438-7753-43e0-B8FC-AC1667EBCBE1}">
-              <a14:hiddenEffects xmlns="" xmlns:a14="http://schemas.microsoft.com/office/drawing/2010/main">
+              <a14:hiddenEffects xmlns:a14="http://schemas.microsoft.com/office/drawing/2010/main" xmlns="">
                 <a:effectLst>
                   <a:outerShdw dist="35921" dir="2700000" algn="ctr" rotWithShape="0">
                     <a:schemeClr val="bg2"/>
@@ -1283,12 +1352,12 @@
           <a:effectLst/>
           <a:extLst>
             <a:ext uri="{909E8E84-426E-40dd-AFC4-6F175D3DCCD1}">
-              <a14:hiddenFill xmlns="" xmlns:a14="http://schemas.microsoft.com/office/drawing/2010/main">
+              <a14:hiddenFill xmlns:a14="http://schemas.microsoft.com/office/drawing/2010/main" xmlns="">
                 <a:noFill/>
               </a14:hiddenFill>
             </a:ext>
             <a:ext uri="{AF507438-7753-43e0-B8FC-AC1667EBCBE1}">
-              <a14:hiddenEffects xmlns="" xmlns:a14="http://schemas.microsoft.com/office/drawing/2010/main">
+              <a14:hiddenEffects xmlns:a14="http://schemas.microsoft.com/office/drawing/2010/main" xmlns="">
                 <a:effectLst>
                   <a:outerShdw dist="35921" dir="2700000" algn="ctr" rotWithShape="0">
                     <a:schemeClr val="bg2"/>
@@ -1329,14 +1398,14 @@
           <a:effectLst/>
           <a:extLst>
             <a:ext uri="{909E8E84-426E-40dd-AFC4-6F175D3DCCD1}">
-              <a14:hiddenFill xmlns="" xmlns:a14="http://schemas.microsoft.com/office/drawing/2010/main">
+              <a14:hiddenFill xmlns:a14="http://schemas.microsoft.com/office/drawing/2010/main" xmlns="">
                 <a:solidFill>
                   <a:schemeClr val="accent1"/>
                 </a:solidFill>
               </a14:hiddenFill>
             </a:ext>
             <a:ext uri="{91240B29-F687-4f45-9708-019B960494DF}">
-              <a14:hiddenLine xmlns="" xmlns:a14="http://schemas.microsoft.com/office/drawing/2010/main" w="9525">
+              <a14:hiddenLine xmlns:a14="http://schemas.microsoft.com/office/drawing/2010/main" xmlns="" w="9525">
                 <a:solidFill>
                   <a:schemeClr val="tx1"/>
                 </a:solidFill>
@@ -1346,7 +1415,7 @@
               </a14:hiddenLine>
             </a:ext>
             <a:ext uri="{AF507438-7753-43e0-B8FC-AC1667EBCBE1}">
-              <a14:hiddenEffects xmlns="" xmlns:a14="http://schemas.microsoft.com/office/drawing/2010/main">
+              <a14:hiddenEffects xmlns:a14="http://schemas.microsoft.com/office/drawing/2010/main" xmlns="">
                 <a:effectLst>
                   <a:outerShdw dist="35921" dir="2700000" algn="ctr" rotWithShape="0">
                     <a:schemeClr val="bg2"/>
@@ -1533,12 +1602,12 @@
           <a:effectLst/>
           <a:extLst>
             <a:ext uri="{909E8E84-426E-40dd-AFC4-6F175D3DCCD1}">
-              <a14:hiddenFill xmlns="" xmlns:a14="http://schemas.microsoft.com/office/drawing/2010/main">
+              <a14:hiddenFill xmlns:a14="http://schemas.microsoft.com/office/drawing/2010/main" xmlns="">
                 <a:noFill/>
               </a14:hiddenFill>
             </a:ext>
             <a:ext uri="{AF507438-7753-43e0-B8FC-AC1667EBCBE1}">
-              <a14:hiddenEffects xmlns="" xmlns:a14="http://schemas.microsoft.com/office/drawing/2010/main">
+              <a14:hiddenEffects xmlns:a14="http://schemas.microsoft.com/office/drawing/2010/main" xmlns="">
                 <a:effectLst>
                   <a:outerShdw dist="35921" dir="2700000" algn="ctr" rotWithShape="0">
                     <a:schemeClr val="bg2"/>
@@ -1591,14 +1660,14 @@
           </a:ln>
           <a:extLst>
             <a:ext uri="{909E8E84-426E-40dd-AFC4-6F175D3DCCD1}">
-              <a14:hiddenFill xmlns="" xmlns:a14="http://schemas.microsoft.com/office/drawing/2010/main">
+              <a14:hiddenFill xmlns:a14="http://schemas.microsoft.com/office/drawing/2010/main" xmlns="">
                 <a:solidFill>
                   <a:srgbClr val="FFFFFF"/>
                 </a:solidFill>
               </a14:hiddenFill>
             </a:ext>
             <a:ext uri="{91240B29-F687-4f45-9708-019B960494DF}">
-              <a14:hiddenLine xmlns="" xmlns:a14="http://schemas.microsoft.com/office/drawing/2010/main" w="9525">
+              <a14:hiddenLine xmlns:a14="http://schemas.microsoft.com/office/drawing/2010/main" xmlns="" w="9525">
                 <a:solidFill>
                   <a:srgbClr val="000000"/>
                 </a:solidFill>
@@ -1831,14 +1900,14 @@
           </a:ln>
           <a:extLst>
             <a:ext uri="{909E8E84-426E-40dd-AFC4-6F175D3DCCD1}">
-              <a14:hiddenFill xmlns="" xmlns:a14="http://schemas.microsoft.com/office/drawing/2010/main">
+              <a14:hiddenFill xmlns:a14="http://schemas.microsoft.com/office/drawing/2010/main" xmlns="">
                 <a:solidFill>
                   <a:srgbClr val="FFFFFF"/>
                 </a:solidFill>
               </a14:hiddenFill>
             </a:ext>
             <a:ext uri="{91240B29-F687-4f45-9708-019B960494DF}">
-              <a14:hiddenLine xmlns="" xmlns:a14="http://schemas.microsoft.com/office/drawing/2010/main" w="9525">
+              <a14:hiddenLine xmlns:a14="http://schemas.microsoft.com/office/drawing/2010/main" xmlns="" w="9525">
                 <a:solidFill>
                   <a:srgbClr val="000000"/>
                 </a:solidFill>
@@ -2110,14 +2179,14 @@
           </a:ln>
           <a:extLst>
             <a:ext uri="{909E8E84-426E-40dd-AFC4-6F175D3DCCD1}">
-              <a14:hiddenFill xmlns="" xmlns:a14="http://schemas.microsoft.com/office/drawing/2010/main">
+              <a14:hiddenFill xmlns:a14="http://schemas.microsoft.com/office/drawing/2010/main" xmlns="">
                 <a:solidFill>
                   <a:srgbClr val="FFFFFF"/>
                 </a:solidFill>
               </a14:hiddenFill>
             </a:ext>
             <a:ext uri="{91240B29-F687-4f45-9708-019B960494DF}">
-              <a14:hiddenLine xmlns="" xmlns:a14="http://schemas.microsoft.com/office/drawing/2010/main" w="9525">
+              <a14:hiddenLine xmlns:a14="http://schemas.microsoft.com/office/drawing/2010/main" xmlns="" w="9525">
                 <a:solidFill>
                   <a:srgbClr val="000000"/>
                 </a:solidFill>
@@ -2168,14 +2237,14 @@
           </a:ln>
           <a:extLst>
             <a:ext uri="{909E8E84-426E-40dd-AFC4-6F175D3DCCD1}">
-              <a14:hiddenFill xmlns="" xmlns:a14="http://schemas.microsoft.com/office/drawing/2010/main">
+              <a14:hiddenFill xmlns:a14="http://schemas.microsoft.com/office/drawing/2010/main" xmlns="">
                 <a:solidFill>
                   <a:srgbClr val="FFFFFF"/>
                 </a:solidFill>
               </a14:hiddenFill>
             </a:ext>
             <a:ext uri="{91240B29-F687-4f45-9708-019B960494DF}">
-              <a14:hiddenLine xmlns="" xmlns:a14="http://schemas.microsoft.com/office/drawing/2010/main" w="9525">
+              <a14:hiddenLine xmlns:a14="http://schemas.microsoft.com/office/drawing/2010/main" xmlns="" w="9525">
                 <a:solidFill>
                   <a:srgbClr val="000000"/>
                 </a:solidFill>
@@ -2258,12 +2327,12 @@
           <a:effectLst/>
           <a:extLst>
             <a:ext uri="{909E8E84-426E-40dd-AFC4-6F175D3DCCD1}">
-              <a14:hiddenFill xmlns="" xmlns:a14="http://schemas.microsoft.com/office/drawing/2010/main">
+              <a14:hiddenFill xmlns:a14="http://schemas.microsoft.com/office/drawing/2010/main" xmlns="">
                 <a:noFill/>
               </a14:hiddenFill>
             </a:ext>
             <a:ext uri="{AF507438-7753-43e0-B8FC-AC1667EBCBE1}">
-              <a14:hiddenEffects xmlns="" xmlns:a14="http://schemas.microsoft.com/office/drawing/2010/main">
+              <a14:hiddenEffects xmlns:a14="http://schemas.microsoft.com/office/drawing/2010/main" xmlns="">
                 <a:effectLst>
                   <a:outerShdw dist="35921" dir="2700000" algn="ctr" rotWithShape="0">
                     <a:schemeClr val="bg2"/>
@@ -2316,14 +2385,14 @@
           </a:ln>
           <a:extLst>
             <a:ext uri="{909E8E84-426E-40dd-AFC4-6F175D3DCCD1}">
-              <a14:hiddenFill xmlns="" xmlns:a14="http://schemas.microsoft.com/office/drawing/2010/main">
+              <a14:hiddenFill xmlns:a14="http://schemas.microsoft.com/office/drawing/2010/main" xmlns="">
                 <a:solidFill>
                   <a:srgbClr val="FFFFFF"/>
                 </a:solidFill>
               </a14:hiddenFill>
             </a:ext>
             <a:ext uri="{91240B29-F687-4f45-9708-019B960494DF}">
-              <a14:hiddenLine xmlns="" xmlns:a14="http://schemas.microsoft.com/office/drawing/2010/main" w="9525">
+              <a14:hiddenLine xmlns:a14="http://schemas.microsoft.com/office/drawing/2010/main" xmlns="" w="9525">
                 <a:solidFill>
                   <a:srgbClr val="000000"/>
                 </a:solidFill>
@@ -2881,6 +2950,761 @@
 </p:sld>
 </file>
 
+<file path=ppt/slides/slide10.xml><?xml version="1.0" encoding="utf-8"?>
+<p:sld xmlns:a="http://schemas.openxmlformats.org/drawingml/2006/main" xmlns:r="http://schemas.openxmlformats.org/officeDocument/2006/relationships" xmlns:p="http://schemas.openxmlformats.org/presentationml/2006/main">
+  <p:cSld>
+    <p:spTree>
+      <p:nvGrpSpPr>
+        <p:cNvPr id="1" name=""/>
+        <p:cNvGrpSpPr/>
+        <p:nvPr/>
+      </p:nvGrpSpPr>
+      <p:grpSpPr>
+        <a:xfrm>
+          <a:off x="0" y="0"/>
+          <a:ext cx="0" cy="0"/>
+          <a:chOff x="0" y="0"/>
+          <a:chExt cx="0" cy="0"/>
+        </a:xfrm>
+      </p:grpSpPr>
+      <p:sp>
+        <p:nvSpPr>
+          <p:cNvPr id="2" name="Titel 1">
+            <a:extLst>
+              <a:ext uri="{FF2B5EF4-FFF2-40B4-BE49-F238E27FC236}">
+                <a16:creationId xmlns:a16="http://schemas.microsoft.com/office/drawing/2014/main" id="{4B366712-81B6-7878-AF79-C8E4465ECB93}"/>
+              </a:ext>
+            </a:extLst>
+          </p:cNvPr>
+          <p:cNvSpPr>
+            <a:spLocks noGrp="1"/>
+          </p:cNvSpPr>
+          <p:nvPr>
+            <p:ph type="title"/>
+          </p:nvPr>
+        </p:nvSpPr>
+        <p:spPr/>
+        <p:txBody>
+          <a:bodyPr/>
+          <a:lstStyle/>
+          <a:p>
+            <a:r>
+              <a:rPr lang="de-DE" dirty="0"/>
+              <a:t>The </a:t>
+            </a:r>
+            <a:r>
+              <a:rPr lang="de-DE" dirty="0" err="1"/>
+              <a:t>graph</a:t>
+            </a:r>
+            <a:r>
+              <a:rPr lang="de-DE" dirty="0"/>
+              <a:t> </a:t>
+            </a:r>
+            <a:r>
+              <a:rPr lang="de-DE" dirty="0" err="1"/>
+              <a:t>neural</a:t>
+            </a:r>
+            <a:r>
+              <a:rPr lang="de-DE" dirty="0"/>
+              <a:t> </a:t>
+            </a:r>
+            <a:r>
+              <a:rPr lang="de-DE" dirty="0" err="1"/>
+              <a:t>operator</a:t>
+            </a:r>
+            <a:r>
+              <a:rPr lang="de-DE" dirty="0"/>
+              <a:t> - GNO</a:t>
+            </a:r>
+            <a:endParaRPr lang="en-GB" dirty="0"/>
+          </a:p>
+        </p:txBody>
+      </p:sp>
+      <p:sp>
+        <p:nvSpPr>
+          <p:cNvPr id="3" name="Inhaltsplatzhalter 2">
+            <a:extLst>
+              <a:ext uri="{FF2B5EF4-FFF2-40B4-BE49-F238E27FC236}">
+                <a16:creationId xmlns:a16="http://schemas.microsoft.com/office/drawing/2014/main" id="{D79D5BAD-A804-7A9F-2664-6B990B510BE6}"/>
+              </a:ext>
+            </a:extLst>
+          </p:cNvPr>
+          <p:cNvSpPr>
+            <a:spLocks noGrp="1"/>
+          </p:cNvSpPr>
+          <p:nvPr>
+            <p:ph idx="1"/>
+          </p:nvPr>
+        </p:nvSpPr>
+        <p:spPr/>
+        <p:txBody>
+          <a:bodyPr/>
+          <a:lstStyle/>
+          <a:p>
+            <a:endParaRPr lang="en-GB" dirty="0"/>
+          </a:p>
+        </p:txBody>
+      </p:sp>
+    </p:spTree>
+    <p:extLst>
+      <p:ext uri="{BB962C8B-B14F-4D97-AF65-F5344CB8AC3E}">
+        <p14:creationId xmlns:p14="http://schemas.microsoft.com/office/powerpoint/2010/main" val="3547954254"/>
+      </p:ext>
+    </p:extLst>
+  </p:cSld>
+  <p:clrMapOvr>
+    <a:masterClrMapping/>
+  </p:clrMapOvr>
+</p:sld>
+</file>
+
+<file path=ppt/slides/slide11.xml><?xml version="1.0" encoding="utf-8"?>
+<p:sld xmlns:a="http://schemas.openxmlformats.org/drawingml/2006/main" xmlns:r="http://schemas.openxmlformats.org/officeDocument/2006/relationships" xmlns:p="http://schemas.openxmlformats.org/presentationml/2006/main">
+  <p:cSld>
+    <p:spTree>
+      <p:nvGrpSpPr>
+        <p:cNvPr id="1" name=""/>
+        <p:cNvGrpSpPr/>
+        <p:nvPr/>
+      </p:nvGrpSpPr>
+      <p:grpSpPr>
+        <a:xfrm>
+          <a:off x="0" y="0"/>
+          <a:ext cx="0" cy="0"/>
+          <a:chOff x="0" y="0"/>
+          <a:chExt cx="0" cy="0"/>
+        </a:xfrm>
+      </p:grpSpPr>
+      <p:sp>
+        <p:nvSpPr>
+          <p:cNvPr id="2" name="Titel 1"/>
+          <p:cNvSpPr>
+            <a:spLocks noGrp="1"/>
+          </p:cNvSpPr>
+          <p:nvPr>
+            <p:ph type="title"/>
+          </p:nvPr>
+        </p:nvSpPr>
+        <p:spPr/>
+        <p:txBody>
+          <a:bodyPr/>
+          <a:lstStyle/>
+          <a:p>
+            <a:r>
+              <a:rPr lang="en-US" noProof="0" dirty="0"/>
+              <a:t>References</a:t>
+            </a:r>
+          </a:p>
+        </p:txBody>
+      </p:sp>
+      <p:sp>
+        <p:nvSpPr>
+          <p:cNvPr id="3" name="Inhaltsplatzhalter 2"/>
+          <p:cNvSpPr>
+            <a:spLocks noGrp="1"/>
+          </p:cNvSpPr>
+          <p:nvPr>
+            <p:ph idx="1"/>
+          </p:nvPr>
+        </p:nvSpPr>
+        <p:spPr>
+          <a:xfrm>
+            <a:off x="466725" y="836712"/>
+            <a:ext cx="8208000" cy="5184677"/>
+          </a:xfrm>
+        </p:spPr>
+        <p:txBody>
+          <a:bodyPr/>
+          <a:lstStyle/>
+          <a:p>
+            <a:pPr marL="0" indent="0">
+              <a:buNone/>
+            </a:pPr>
+            <a:r>
+              <a:rPr lang="en-US" noProof="0" dirty="0">
+                <a:latin typeface="Frutiger LT Com 45 Light"/>
+              </a:rPr>
+              <a:t>[0] 	</a:t>
+            </a:r>
+            <a:r>
+              <a:rPr lang="en-US" noProof="0" dirty="0"/>
+              <a:t>N. B. </a:t>
+            </a:r>
+            <a:r>
+              <a:rPr lang="en-US" noProof="0" dirty="0" err="1"/>
+              <a:t>Kovachki</a:t>
+            </a:r>
+            <a:r>
+              <a:rPr lang="en-US" noProof="0" dirty="0"/>
+              <a:t>, Z. Li, B. Liu, K. </a:t>
+            </a:r>
+            <a:r>
+              <a:rPr lang="en-US" noProof="0" dirty="0" err="1"/>
+              <a:t>Azizzadenesheli</a:t>
+            </a:r>
+            <a:r>
+              <a:rPr lang="en-US" noProof="0" dirty="0"/>
+              <a:t>, K. Bhattacharya, A. M. Stuart, A. 	</a:t>
+            </a:r>
+            <a:r>
+              <a:rPr lang="en-US" noProof="0" dirty="0" err="1"/>
+              <a:t>Anandkumar</a:t>
+            </a:r>
+            <a:r>
+              <a:rPr lang="en-US" noProof="0" dirty="0"/>
+              <a:t>: Neural Operator: Learning Maps Between Function Spaces. </a:t>
+            </a:r>
+            <a:r>
+              <a:rPr lang="en-US" noProof="0" dirty="0" err="1"/>
+              <a:t>CoRR</a:t>
+            </a:r>
+            <a:r>
+              <a:rPr lang="en-US" noProof="0" dirty="0"/>
+              <a:t> 	abs/2108.08481. 2021.</a:t>
+            </a:r>
+            <a:endParaRPr lang="en-US" noProof="0" dirty="0">
+              <a:latin typeface="Frutiger LT Com 45 Light"/>
+            </a:endParaRPr>
+          </a:p>
+          <a:p>
+            <a:pPr marL="0" indent="0">
+              <a:buNone/>
+            </a:pPr>
+            <a:r>
+              <a:rPr lang="en-US" noProof="0" dirty="0">
+                <a:latin typeface="Frutiger LT Com 45 Light"/>
+              </a:rPr>
+              <a:t>[1] 	</a:t>
+            </a:r>
+            <a:r>
+              <a:rPr lang="en-US" noProof="0" dirty="0">
+                <a:latin typeface="Frutiger LT Com 45 Light"/>
+                <a:hlinkClick r:id="rId2"/>
+              </a:rPr>
+              <a:t>Draw electric field lines without </a:t>
+            </a:r>
+            <a:r>
+              <a:rPr lang="en-US" noProof="0" dirty="0" err="1">
+                <a:latin typeface="Frutiger LT Com 45 Light"/>
+                <a:hlinkClick r:id="rId2"/>
+              </a:rPr>
+              <a:t>Mayavi</a:t>
+            </a:r>
+            <a:r>
+              <a:rPr lang="en-US" noProof="0" dirty="0">
+                <a:latin typeface="Frutiger LT Com 45 Light"/>
+                <a:hlinkClick r:id="rId2"/>
+              </a:rPr>
+              <a:t> </a:t>
+            </a:r>
+            <a:endParaRPr lang="en-US" noProof="0" dirty="0">
+              <a:latin typeface="Frutiger LT Com 45 Light"/>
+            </a:endParaRPr>
+          </a:p>
+          <a:p>
+            <a:pPr marL="0" indent="0">
+              <a:buNone/>
+            </a:pPr>
+            <a:r>
+              <a:rPr lang="en-US" dirty="0">
+                <a:latin typeface="Frutiger LT Com 45 Light"/>
+              </a:rPr>
+              <a:t>[2] </a:t>
+            </a:r>
+            <a:r>
+              <a:rPr lang="en-US" dirty="0">
+                <a:latin typeface="Frutiger LT Com 45 Light"/>
+                <a:hlinkClick r:id="rId3"/>
+              </a:rPr>
+              <a:t>Gitter (</a:t>
+            </a:r>
+            <a:r>
+              <a:rPr lang="en-US" dirty="0" err="1">
+                <a:latin typeface="Frutiger LT Com 45 Light"/>
+                <a:hlinkClick r:id="rId3"/>
+              </a:rPr>
+              <a:t>Geometrie</a:t>
+            </a:r>
+            <a:r>
+              <a:rPr lang="en-US" dirty="0">
+                <a:latin typeface="Frutiger LT Com 45 Light"/>
+                <a:hlinkClick r:id="rId3"/>
+              </a:rPr>
+              <a:t>)</a:t>
+            </a:r>
+            <a:endParaRPr lang="en-US" dirty="0">
+              <a:latin typeface="Frutiger LT Com 45 Light"/>
+            </a:endParaRPr>
+          </a:p>
+          <a:p>
+            <a:pPr marL="0" indent="0">
+              <a:buNone/>
+            </a:pPr>
+            <a:r>
+              <a:rPr lang="en-US" noProof="0" dirty="0">
+                <a:latin typeface="Frutiger LT Com 45 Light"/>
+              </a:rPr>
+              <a:t>[3] </a:t>
+            </a:r>
+            <a:r>
+              <a:rPr lang="en-US" noProof="0" dirty="0">
+                <a:latin typeface="Frutiger LT Com 45 Light"/>
+                <a:hlinkClick r:id="rId4"/>
+              </a:rPr>
+              <a:t>Tesseract </a:t>
+            </a:r>
+            <a:r>
+              <a:rPr lang="en-US" noProof="0" dirty="0" err="1">
+                <a:latin typeface="Frutiger LT Com 45 Light"/>
+                <a:hlinkClick r:id="rId4"/>
+              </a:rPr>
+              <a:t>MathWorld</a:t>
+            </a:r>
+            <a:endParaRPr lang="en-US" noProof="0" dirty="0">
+              <a:latin typeface="Frutiger LT Com 45 Light"/>
+            </a:endParaRPr>
+          </a:p>
+          <a:p>
+            <a:pPr marL="0" indent="0">
+              <a:buNone/>
+            </a:pPr>
+            <a:r>
+              <a:rPr lang="en-US" dirty="0">
+                <a:latin typeface="Frutiger LT Com 45 Light"/>
+              </a:rPr>
+              <a:t>[4] </a:t>
+            </a:r>
+            <a:r>
+              <a:rPr lang="en-GB" dirty="0"/>
+              <a:t>J. Pathak, S. Subramanian, P. Harrington, S. Raja, A. Chattopadhyay, M. Mardani, T. Kurth, D. Hall, Z. Li, K. </a:t>
+            </a:r>
+            <a:r>
+              <a:rPr lang="en-GB" dirty="0" err="1"/>
+              <a:t>Azizzadenesheli</a:t>
+            </a:r>
+            <a:r>
+              <a:rPr lang="en-GB" dirty="0"/>
+              <a:t>, P. </a:t>
+            </a:r>
+            <a:r>
+              <a:rPr lang="en-GB" dirty="0" err="1"/>
+              <a:t>Hassanzadeh</a:t>
+            </a:r>
+            <a:r>
+              <a:rPr lang="en-GB" dirty="0"/>
+              <a:t>, K. Kashinath, A. </a:t>
+            </a:r>
+            <a:r>
+              <a:rPr lang="en-GB" dirty="0" err="1"/>
+              <a:t>Anandkumar</a:t>
+            </a:r>
+            <a:r>
+              <a:rPr lang="en-GB" dirty="0"/>
+              <a:t>: </a:t>
+            </a:r>
+            <a:r>
+              <a:rPr lang="en-GB" dirty="0" err="1"/>
+              <a:t>FourcastNet</a:t>
+            </a:r>
+            <a:r>
+              <a:rPr lang="en-GB" dirty="0"/>
+              <a:t>: A global data-driven high-resolution weather model using adaptive Fourier neural operators. </a:t>
+            </a:r>
+            <a:r>
+              <a:rPr lang="en-GB" dirty="0" err="1"/>
+              <a:t>CoRR</a:t>
+            </a:r>
+            <a:r>
+              <a:rPr lang="en-GB" dirty="0"/>
+              <a:t> abs/2202.11214. 2022.</a:t>
+            </a:r>
+          </a:p>
+          <a:p>
+            <a:pPr marL="0" indent="0">
+              <a:buNone/>
+            </a:pPr>
+            <a:r>
+              <a:rPr lang="en-GB" noProof="0" dirty="0"/>
+              <a:t>[5] </a:t>
+            </a:r>
+            <a:r>
+              <a:rPr lang="en-GB" dirty="0"/>
+              <a:t>Z. Li, H. Zheng, N. </a:t>
+            </a:r>
+            <a:r>
+              <a:rPr lang="en-GB" dirty="0" err="1"/>
+              <a:t>Kovachki</a:t>
+            </a:r>
+            <a:r>
+              <a:rPr lang="en-GB" dirty="0"/>
+              <a:t>, D. Jin, H. Chen, B. Liu, K. </a:t>
+            </a:r>
+            <a:r>
+              <a:rPr lang="en-GB" dirty="0" err="1"/>
+              <a:t>Azizzadenesheli</a:t>
+            </a:r>
+            <a:r>
+              <a:rPr lang="en-GB" dirty="0"/>
+              <a:t>, A. </a:t>
+            </a:r>
+            <a:r>
+              <a:rPr lang="en-GB" dirty="0" err="1"/>
+              <a:t>Anandkumar</a:t>
+            </a:r>
+            <a:r>
+              <a:rPr lang="en-GB" dirty="0"/>
+              <a:t>: Physics-Informed Neural Operator for Learning Partial Differential Equations. ACM / IMS J. Data Sci. 1(3), Article 9. 2024.</a:t>
+            </a:r>
+          </a:p>
+          <a:p>
+            <a:pPr marL="0" indent="0">
+              <a:buNone/>
+            </a:pPr>
+            <a:r>
+              <a:rPr lang="en-GB" noProof="0" dirty="0"/>
+              <a:t>[6] </a:t>
+            </a:r>
+            <a:r>
+              <a:rPr lang="en-GB" dirty="0"/>
+              <a:t>J. Brandstetter, D. Worrall, M. Welling: Message Passing Neural PDE Solvers. </a:t>
+            </a:r>
+            <a:r>
+              <a:rPr lang="en-GB" dirty="0" err="1"/>
+              <a:t>CoRR</a:t>
+            </a:r>
+            <a:r>
+              <a:rPr lang="en-GB" dirty="0"/>
+              <a:t> abs/2202.03376. 2023.</a:t>
+            </a:r>
+            <a:endParaRPr lang="en-GB" noProof="0" dirty="0"/>
+          </a:p>
+        </p:txBody>
+      </p:sp>
+      <p:sp>
+        <p:nvSpPr>
+          <p:cNvPr id="4" name="Rectangle 1">
+            <a:extLst>
+              <a:ext uri="{FF2B5EF4-FFF2-40B4-BE49-F238E27FC236}">
+                <a16:creationId xmlns:a16="http://schemas.microsoft.com/office/drawing/2014/main" id="{35436769-B519-64EF-AA6E-5BC52F096967}"/>
+              </a:ext>
+            </a:extLst>
+          </p:cNvPr>
+          <p:cNvSpPr>
+            <a:spLocks noChangeArrowheads="1"/>
+          </p:cNvSpPr>
+          <p:nvPr/>
+        </p:nvSpPr>
+        <p:spPr bwMode="auto">
+          <a:xfrm>
+            <a:off x="0" y="0"/>
+            <a:ext cx="9144000" cy="457200"/>
+          </a:xfrm>
+          <a:prstGeom prst="rect">
+            <a:avLst/>
+          </a:prstGeom>
+          <a:noFill/>
+          <a:ln>
+            <a:noFill/>
+          </a:ln>
+          <a:effectLst/>
+          <a:extLst>
+            <a:ext uri="{909E8E84-426E-40DD-AFC4-6F175D3DCCD1}">
+              <a14:hiddenFill xmlns:a14="http://schemas.microsoft.com/office/drawing/2010/main">
+                <a:solidFill>
+                  <a:schemeClr val="accent1"/>
+                </a:solidFill>
+              </a14:hiddenFill>
+            </a:ext>
+            <a:ext uri="{91240B29-F687-4F45-9708-019B960494DF}">
+              <a14:hiddenLine xmlns:a14="http://schemas.microsoft.com/office/drawing/2010/main" w="9525">
+                <a:solidFill>
+                  <a:schemeClr val="tx1"/>
+                </a:solidFill>
+                <a:miter lim="800000"/>
+                <a:headEnd/>
+                <a:tailEnd/>
+              </a14:hiddenLine>
+            </a:ext>
+            <a:ext uri="{AF507438-7753-43E0-B8FC-AC1667EBCBE1}">
+              <a14:hiddenEffects xmlns:a14="http://schemas.microsoft.com/office/drawing/2010/main">
+                <a:effectLst>
+                  <a:outerShdw dist="35921" dir="2700000" algn="ctr" rotWithShape="0">
+                    <a:schemeClr val="bg2"/>
+                  </a:outerShdw>
+                </a:effectLst>
+              </a14:hiddenEffects>
+            </a:ext>
+          </a:extLst>
+        </p:spPr>
+        <p:txBody>
+          <a:bodyPr vert="horz" wrap="none" lIns="91440" tIns="45720" rIns="91440" bIns="45720" numCol="1" anchor="ctr" anchorCtr="0" compatLnSpc="1">
+            <a:prstTxWarp prst="textNoShape">
+              <a:avLst/>
+            </a:prstTxWarp>
+            <a:spAutoFit/>
+          </a:bodyPr>
+          <a:lstStyle/>
+          <a:p>
+            <a:pPr marL="0" marR="0" lvl="0" indent="0" algn="l" defTabSz="914400" rtl="0" eaLnBrk="0" fontAlgn="base" latinLnBrk="0" hangingPunct="0">
+              <a:lnSpc>
+                <a:spcPct val="100000"/>
+              </a:lnSpc>
+              <a:spcBef>
+                <a:spcPct val="0"/>
+              </a:spcBef>
+              <a:spcAft>
+                <a:spcPct val="0"/>
+              </a:spcAft>
+              <a:buClrTx/>
+              <a:buSzTx/>
+              <a:buFontTx/>
+              <a:buNone/>
+              <a:tabLst/>
+            </a:pPr>
+            <a:r>
+              <a:rPr kumimoji="0" lang="en-US" altLang="en-US" sz="1000" b="0" i="0" u="none" strike="noStrike" cap="none" normalizeH="0" baseline="0">
+                <a:ln>
+                  <a:noFill/>
+                </a:ln>
+                <a:solidFill>
+                  <a:schemeClr val="tx1"/>
+                </a:solidFill>
+                <a:effectLst/>
+                <a:latin typeface="Arial Unicode MS"/>
+              </a:rPr>
+              <a:t>Fourcastnet: A global data-driven high-resolution weather model using adaptive fourier neural operators</a:t>
+            </a:r>
+            <a:r>
+              <a:rPr kumimoji="0" lang="en-US" altLang="en-US" sz="600" b="0" i="0" u="none" strike="noStrike" cap="none" normalizeH="0" baseline="0">
+                <a:ln>
+                  <a:noFill/>
+                </a:ln>
+                <a:solidFill>
+                  <a:schemeClr val="tx1"/>
+                </a:solidFill>
+                <a:effectLst/>
+              </a:rPr>
+              <a:t> </a:t>
+            </a:r>
+            <a:endParaRPr kumimoji="0" lang="en-US" altLang="en-US" sz="1800" b="0" i="0" u="none" strike="noStrike" cap="none" normalizeH="0" baseline="0">
+              <a:ln>
+                <a:noFill/>
+              </a:ln>
+              <a:solidFill>
+                <a:schemeClr val="tx1"/>
+              </a:solidFill>
+              <a:effectLst/>
+              <a:latin typeface="Arial" panose="020B0604020202020204" pitchFamily="34" charset="0"/>
+            </a:endParaRPr>
+          </a:p>
+        </p:txBody>
+      </p:sp>
+    </p:spTree>
+    <p:extLst>
+      <p:ext uri="{BB962C8B-B14F-4D97-AF65-F5344CB8AC3E}">
+        <p14:creationId xmlns:p14="http://schemas.microsoft.com/office/powerpoint/2010/main" val="830681217"/>
+      </p:ext>
+    </p:extLst>
+  </p:cSld>
+  <p:clrMapOvr>
+    <a:masterClrMapping/>
+  </p:clrMapOvr>
+</p:sld>
+</file>
+
+<file path=ppt/slides/slide12.xml><?xml version="1.0" encoding="utf-8"?>
+<p:sld xmlns:a="http://schemas.openxmlformats.org/drawingml/2006/main" xmlns:r="http://schemas.openxmlformats.org/officeDocument/2006/relationships" xmlns:p="http://schemas.openxmlformats.org/presentationml/2006/main">
+  <p:cSld>
+    <p:spTree>
+      <p:nvGrpSpPr>
+        <p:cNvPr id="1" name=""/>
+        <p:cNvGrpSpPr/>
+        <p:nvPr/>
+      </p:nvGrpSpPr>
+      <p:grpSpPr>
+        <a:xfrm>
+          <a:off x="0" y="0"/>
+          <a:ext cx="0" cy="0"/>
+          <a:chOff x="0" y="0"/>
+          <a:chExt cx="0" cy="0"/>
+        </a:xfrm>
+      </p:grpSpPr>
+      <p:sp>
+        <p:nvSpPr>
+          <p:cNvPr id="2" name="Titel 1">
+            <a:extLst>
+              <a:ext uri="{FF2B5EF4-FFF2-40B4-BE49-F238E27FC236}">
+                <a16:creationId xmlns:a16="http://schemas.microsoft.com/office/drawing/2014/main" id="{8CEB77BF-12DB-C7D8-DAB7-3498E94CDC47}"/>
+              </a:ext>
+            </a:extLst>
+          </p:cNvPr>
+          <p:cNvSpPr>
+            <a:spLocks noGrp="1"/>
+          </p:cNvSpPr>
+          <p:nvPr>
+            <p:ph type="title"/>
+          </p:nvPr>
+        </p:nvSpPr>
+        <p:spPr/>
+        <p:txBody>
+          <a:bodyPr/>
+          <a:lstStyle/>
+          <a:p>
+            <a:r>
+              <a:rPr lang="de-DE" dirty="0"/>
+              <a:t>References</a:t>
+            </a:r>
+            <a:endParaRPr lang="en-GB" dirty="0"/>
+          </a:p>
+        </p:txBody>
+      </p:sp>
+      <p:sp>
+        <p:nvSpPr>
+          <p:cNvPr id="3" name="Inhaltsplatzhalter 2">
+            <a:extLst>
+              <a:ext uri="{FF2B5EF4-FFF2-40B4-BE49-F238E27FC236}">
+                <a16:creationId xmlns:a16="http://schemas.microsoft.com/office/drawing/2014/main" id="{4125ECD1-BAE9-EEA7-43BD-1DF199398545}"/>
+              </a:ext>
+            </a:extLst>
+          </p:cNvPr>
+          <p:cNvSpPr>
+            <a:spLocks noGrp="1"/>
+          </p:cNvSpPr>
+          <p:nvPr>
+            <p:ph idx="1"/>
+          </p:nvPr>
+        </p:nvSpPr>
+        <p:spPr/>
+        <p:txBody>
+          <a:bodyPr/>
+          <a:lstStyle/>
+          <a:p>
+            <a:r>
+              <a:rPr lang="en-GB" noProof="0" dirty="0"/>
+              <a:t>[7] </a:t>
+            </a:r>
+            <a:r>
+              <a:rPr lang="en-GB" dirty="0"/>
+              <a:t>B. </a:t>
+            </a:r>
+            <a:r>
+              <a:rPr lang="en-GB" dirty="0" err="1"/>
+              <a:t>Alkin</a:t>
+            </a:r>
+            <a:r>
+              <a:rPr lang="en-GB" dirty="0"/>
+              <a:t>, A. </a:t>
+            </a:r>
+            <a:r>
+              <a:rPr lang="en-GB" dirty="0" err="1"/>
+              <a:t>Fürst</a:t>
+            </a:r>
+            <a:r>
+              <a:rPr lang="en-GB" dirty="0"/>
+              <a:t>, S. Schmid, L. Gruber, M. </a:t>
+            </a:r>
+            <a:r>
+              <a:rPr lang="en-GB" dirty="0" err="1"/>
+              <a:t>Holzleitner</a:t>
+            </a:r>
+            <a:r>
+              <a:rPr lang="en-GB" dirty="0"/>
+              <a:t>, J. Brandstetter: Universal Physics Transformers: A Framework For Efficiently Scaling Neural Operators. </a:t>
+            </a:r>
+            <a:r>
+              <a:rPr lang="en-GB" dirty="0" err="1"/>
+              <a:t>CoRR</a:t>
+            </a:r>
+            <a:r>
+              <a:rPr lang="en-GB" dirty="0"/>
+              <a:t> abs/2402.12365. 2025.</a:t>
+            </a:r>
+          </a:p>
+          <a:p>
+            <a:r>
+              <a:rPr lang="en-GB" noProof="0" dirty="0"/>
+              <a:t>[8] </a:t>
+            </a:r>
+            <a:r>
+              <a:rPr lang="en-GB" dirty="0"/>
+              <a:t>Z. Li, N. B. </a:t>
+            </a:r>
+            <a:r>
+              <a:rPr lang="en-GB" dirty="0" err="1"/>
+              <a:t>Kovachki</a:t>
+            </a:r>
+            <a:r>
+              <a:rPr lang="en-GB" dirty="0"/>
+              <a:t>, C. Choy, B. Li, J. </a:t>
+            </a:r>
+            <a:r>
+              <a:rPr lang="en-GB" dirty="0" err="1"/>
+              <a:t>Kossaifi</a:t>
+            </a:r>
+            <a:r>
+              <a:rPr lang="en-GB" dirty="0"/>
+              <a:t>, S. P. </a:t>
+            </a:r>
+            <a:r>
+              <a:rPr lang="en-GB" dirty="0" err="1"/>
+              <a:t>Otta</a:t>
+            </a:r>
+            <a:r>
+              <a:rPr lang="en-GB" dirty="0"/>
+              <a:t>, M. A. </a:t>
+            </a:r>
+            <a:r>
+              <a:rPr lang="en-GB" dirty="0" err="1"/>
+              <a:t>Nabian</a:t>
+            </a:r>
+            <a:r>
+              <a:rPr lang="en-GB" dirty="0"/>
+              <a:t>, M. Stadler, C. Hundt, K. </a:t>
+            </a:r>
+            <a:r>
+              <a:rPr lang="en-GB" dirty="0" err="1"/>
+              <a:t>Azizzadenesheli</a:t>
+            </a:r>
+            <a:r>
+              <a:rPr lang="en-GB" dirty="0"/>
+              <a:t>, A. </a:t>
+            </a:r>
+            <a:r>
+              <a:rPr lang="en-GB" dirty="0" err="1"/>
+              <a:t>Anandkumar</a:t>
+            </a:r>
+            <a:r>
+              <a:rPr lang="en-GB" dirty="0"/>
+              <a:t>: Geometry-Informed Neural Operator for Large-Scale 3D PDEs. </a:t>
+            </a:r>
+            <a:r>
+              <a:rPr lang="en-GB" dirty="0" err="1"/>
+              <a:t>CoRR</a:t>
+            </a:r>
+            <a:r>
+              <a:rPr lang="en-GB" dirty="0"/>
+              <a:t> abs/2309.00583. 2023.</a:t>
+            </a:r>
+            <a:endParaRPr lang="en-US" noProof="0" dirty="0"/>
+          </a:p>
+          <a:p>
+            <a:endParaRPr lang="en-GB" dirty="0"/>
+          </a:p>
+        </p:txBody>
+      </p:sp>
+    </p:spTree>
+    <p:extLst>
+      <p:ext uri="{BB962C8B-B14F-4D97-AF65-F5344CB8AC3E}">
+        <p14:creationId xmlns:p14="http://schemas.microsoft.com/office/powerpoint/2010/main" val="3815706708"/>
+      </p:ext>
+    </p:extLst>
+  </p:cSld>
+  <p:clrMapOvr>
+    <a:masterClrMapping/>
+  </p:clrMapOvr>
+</p:sld>
+</file>
+
 <file path=ppt/slides/slide2.xml><?xml version="1.0" encoding="utf-8"?>
 <p:sld xmlns:a="http://schemas.openxmlformats.org/drawingml/2006/main" xmlns:r="http://schemas.openxmlformats.org/officeDocument/2006/relationships" xmlns:p="http://schemas.openxmlformats.org/presentationml/2006/main">
   <p:cSld>
@@ -3076,7 +3900,7 @@
         </p:nvSpPr>
         <p:spPr>
           <a:xfrm>
-            <a:off x="3599220" y="2741139"/>
+            <a:off x="3743114" y="2666989"/>
             <a:ext cx="1005403" cy="369332"/>
           </a:xfrm>
           <a:prstGeom prst="rect">
@@ -3093,41 +3917,6 @@
             <a:r>
               <a:rPr lang="en-US" noProof="0" dirty="0"/>
               <a:t>Function</a:t>
-            </a:r>
-          </a:p>
-        </p:txBody>
-      </p:sp>
-      <p:sp>
-        <p:nvSpPr>
-          <p:cNvPr id="9" name="Textfeld 8">
-            <a:extLst>
-              <a:ext uri="{FF2B5EF4-FFF2-40B4-BE49-F238E27FC236}">
-                <a16:creationId xmlns:a16="http://schemas.microsoft.com/office/drawing/2014/main" id="{76285254-3ED8-BEF3-2610-BA9F3E489E61}"/>
-              </a:ext>
-            </a:extLst>
-          </p:cNvPr>
-          <p:cNvSpPr txBox="1"/>
-          <p:nvPr/>
-        </p:nvSpPr>
-        <p:spPr>
-          <a:xfrm>
-            <a:off x="4716016" y="4192333"/>
-            <a:ext cx="1043876" cy="369332"/>
-          </a:xfrm>
-          <a:prstGeom prst="rect">
-            <a:avLst/>
-          </a:prstGeom>
-          <a:noFill/>
-        </p:spPr>
-        <p:txBody>
-          <a:bodyPr wrap="none" rtlCol="0">
-            <a:spAutoFit/>
-          </a:bodyPr>
-          <a:lstStyle/>
-          <a:p>
-            <a:r>
-              <a:rPr lang="en-US" noProof="0" dirty="0"/>
-              <a:t>Operator</a:t>
             </a:r>
           </a:p>
         </p:txBody>
@@ -3148,7 +3937,7 @@
         </p:nvCxnSpPr>
         <p:spPr bwMode="auto">
           <a:xfrm flipH="1">
-            <a:off x="3563888" y="3104206"/>
+            <a:off x="3707782" y="3030056"/>
             <a:ext cx="373748" cy="511838"/>
           </a:xfrm>
           <a:prstGeom prst="straightConnector1">
@@ -3159,14 +3948,14 @@
           </a:ln>
           <a:extLst>
             <a:ext uri="{909E8E84-426E-40dd-AFC4-6F175D3DCCD1}">
-              <a14:hiddenFill xmlns:a14="http://schemas.microsoft.com/office/drawing/2010/main" xmlns="">
+              <a14:hiddenFill xmlns="" xmlns:a14="http://schemas.microsoft.com/office/drawing/2010/main">
                 <a:solidFill>
                   <a:schemeClr val="accent1"/>
                 </a:solidFill>
               </a14:hiddenFill>
             </a:ext>
             <a:ext uri="{91240B29-F687-4f45-9708-019B960494DF}">
-              <a14:hiddenLine xmlns:a14="http://schemas.microsoft.com/office/drawing/2010/main" xmlns="" w="9525" cap="flat" cmpd="sng" algn="ctr">
+              <a14:hiddenLine xmlns="" xmlns:a14="http://schemas.microsoft.com/office/drawing/2010/main" w="9525" cap="flat" cmpd="sng" algn="ctr">
                 <a:solidFill>
                   <a:schemeClr val="tx1"/>
                 </a:solidFill>
@@ -3177,7 +3966,7 @@
               </a14:hiddenLine>
             </a:ext>
             <a:ext uri="{AF507438-7753-43e0-B8FC-AC1667EBCBE1}">
-              <a14:hiddenEffects xmlns:a14="http://schemas.microsoft.com/office/drawing/2010/main" xmlns="">
+              <a14:hiddenEffects xmlns="" xmlns:a14="http://schemas.microsoft.com/office/drawing/2010/main">
                 <a:effectLst>
                   <a:outerShdw dist="35921" dir="2700000" algn="ctr" rotWithShape="0">
                     <a:schemeClr val="bg2"/>
@@ -3213,13 +4002,14 @@
           </p:cNvPr>
           <p:cNvCxnSpPr>
             <a:cxnSpLocks/>
+            <a:endCxn id="20" idx="0"/>
           </p:cNvCxnSpPr>
           <p:nvPr/>
         </p:nvCxnSpPr>
         <p:spPr bwMode="auto">
-          <a:xfrm>
-            <a:off x="4265053" y="3121828"/>
-            <a:ext cx="248647" cy="494216"/>
+          <a:xfrm flipH="1">
+            <a:off x="4389376" y="3047678"/>
+            <a:ext cx="19571" cy="459330"/>
           </a:xfrm>
           <a:prstGeom prst="straightConnector1">
             <a:avLst/>
@@ -3229,14 +4019,14 @@
           </a:ln>
           <a:extLst>
             <a:ext uri="{909E8E84-426E-40dd-AFC4-6F175D3DCCD1}">
-              <a14:hiddenFill xmlns:a14="http://schemas.microsoft.com/office/drawing/2010/main" xmlns="">
+              <a14:hiddenFill xmlns="" xmlns:a14="http://schemas.microsoft.com/office/drawing/2010/main">
                 <a:solidFill>
                   <a:schemeClr val="accent1"/>
                 </a:solidFill>
               </a14:hiddenFill>
             </a:ext>
             <a:ext uri="{91240B29-F687-4f45-9708-019B960494DF}">
-              <a14:hiddenLine xmlns:a14="http://schemas.microsoft.com/office/drawing/2010/main" xmlns="" w="9525" cap="flat" cmpd="sng" algn="ctr">
+              <a14:hiddenLine xmlns="" xmlns:a14="http://schemas.microsoft.com/office/drawing/2010/main" w="9525" cap="flat" cmpd="sng" algn="ctr">
                 <a:solidFill>
                   <a:schemeClr val="tx1"/>
                 </a:solidFill>
@@ -3247,7 +4037,7 @@
               </a14:hiddenLine>
             </a:ext>
             <a:ext uri="{AF507438-7753-43e0-B8FC-AC1667EBCBE1}">
-              <a14:hiddenEffects xmlns:a14="http://schemas.microsoft.com/office/drawing/2010/main" xmlns="">
+              <a14:hiddenEffects xmlns="" xmlns:a14="http://schemas.microsoft.com/office/drawing/2010/main">
                 <a:effectLst>
                   <a:outerShdw dist="35921" dir="2700000" algn="ctr" rotWithShape="0">
                     <a:schemeClr val="bg2"/>
@@ -3272,79 +4062,135 @@
           </a:fontRef>
         </p:style>
       </p:cxnSp>
-      <p:cxnSp>
-        <p:nvCxnSpPr>
-          <p:cNvPr id="16" name="Gerade Verbindung mit Pfeil 15">
+      <p:grpSp>
+        <p:nvGrpSpPr>
+          <p:cNvPr id="5" name="Gruppieren 4">
             <a:extLst>
               <a:ext uri="{FF2B5EF4-FFF2-40B4-BE49-F238E27FC236}">
-                <a16:creationId xmlns:a16="http://schemas.microsoft.com/office/drawing/2014/main" id="{AA77C15F-743B-46DE-6795-68486A777632}"/>
+                <a16:creationId xmlns:a16="http://schemas.microsoft.com/office/drawing/2014/main" id="{9EC4E8DA-1A0B-7820-4E57-790170D41B7F}"/>
               </a:ext>
             </a:extLst>
           </p:cNvPr>
-          <p:cNvCxnSpPr>
-            <a:cxnSpLocks/>
-            <a:stCxn id="9" idx="1"/>
-          </p:cNvCxnSpPr>
+          <p:cNvGrpSpPr/>
           <p:nvPr/>
-        </p:nvCxnSpPr>
-        <p:spPr bwMode="auto">
-          <a:xfrm flipH="1" flipV="1">
-            <a:off x="4265053" y="4169738"/>
-            <a:ext cx="450963" cy="207261"/>
+        </p:nvGrpSpPr>
+        <p:grpSpPr>
+          <a:xfrm>
+            <a:off x="3517633" y="4028956"/>
+            <a:ext cx="1494839" cy="391927"/>
+            <a:chOff x="4265053" y="4169738"/>
+            <a:chExt cx="1494839" cy="391927"/>
           </a:xfrm>
-          <a:prstGeom prst="straightConnector1">
-            <a:avLst/>
-          </a:prstGeom>
-          <a:ln>
-            <a:tailEnd type="triangle"/>
-          </a:ln>
-          <a:extLst>
-            <a:ext uri="{909E8E84-426E-40dd-AFC4-6F175D3DCCD1}">
-              <a14:hiddenFill xmlns:a14="http://schemas.microsoft.com/office/drawing/2010/main" xmlns="">
-                <a:solidFill>
-                  <a:schemeClr val="accent1"/>
-                </a:solidFill>
-              </a14:hiddenFill>
-            </a:ext>
-            <a:ext uri="{91240B29-F687-4f45-9708-019B960494DF}">
-              <a14:hiddenLine xmlns:a14="http://schemas.microsoft.com/office/drawing/2010/main" xmlns="" w="9525" cap="flat" cmpd="sng" algn="ctr">
-                <a:solidFill>
-                  <a:schemeClr val="tx1"/>
-                </a:solidFill>
-                <a:prstDash val="solid"/>
-                <a:round/>
-                <a:headEnd type="none" w="med" len="med"/>
-                <a:tailEnd type="none" w="med" len="med"/>
-              </a14:hiddenLine>
-            </a:ext>
-            <a:ext uri="{AF507438-7753-43e0-B8FC-AC1667EBCBE1}">
-              <a14:hiddenEffects xmlns:a14="http://schemas.microsoft.com/office/drawing/2010/main" xmlns="">
-                <a:effectLst>
-                  <a:outerShdw dist="35921" dir="2700000" algn="ctr" rotWithShape="0">
-                    <a:schemeClr val="bg2"/>
-                  </a:outerShdw>
-                </a:effectLst>
-              </a14:hiddenEffects>
-            </a:ext>
-          </a:extLst>
-        </p:spPr>
-        <p:style>
-          <a:lnRef idx="1">
-            <a:schemeClr val="dk1"/>
-          </a:lnRef>
-          <a:fillRef idx="0">
-            <a:schemeClr val="dk1"/>
-          </a:fillRef>
-          <a:effectRef idx="0">
-            <a:schemeClr val="dk1"/>
-          </a:effectRef>
-          <a:fontRef idx="minor">
-            <a:schemeClr val="tx1"/>
-          </a:fontRef>
-        </p:style>
-      </p:cxnSp>
-      <mc:AlternateContent xmlns:mc="http://schemas.openxmlformats.org/markup-compatibility/2006" xmlns:a14="http://schemas.microsoft.com/office/drawing/2010/main">
-        <mc:Choice Requires="a14">
+        </p:grpSpPr>
+        <p:sp>
+          <p:nvSpPr>
+            <p:cNvPr id="9" name="Textfeld 8">
+              <a:extLst>
+                <a:ext uri="{FF2B5EF4-FFF2-40B4-BE49-F238E27FC236}">
+                  <a16:creationId xmlns:a16="http://schemas.microsoft.com/office/drawing/2014/main" id="{76285254-3ED8-BEF3-2610-BA9F3E489E61}"/>
+                </a:ext>
+              </a:extLst>
+            </p:cNvPr>
+            <p:cNvSpPr txBox="1"/>
+            <p:nvPr/>
+          </p:nvSpPr>
+          <p:spPr>
+            <a:xfrm>
+              <a:off x="4716016" y="4192333"/>
+              <a:ext cx="1043876" cy="369332"/>
+            </a:xfrm>
+            <a:prstGeom prst="rect">
+              <a:avLst/>
+            </a:prstGeom>
+            <a:noFill/>
+          </p:spPr>
+          <p:txBody>
+            <a:bodyPr wrap="none" rtlCol="0">
+              <a:spAutoFit/>
+            </a:bodyPr>
+            <a:lstStyle/>
+            <a:p>
+              <a:r>
+                <a:rPr lang="en-US" noProof="0" dirty="0"/>
+                <a:t>Operator</a:t>
+              </a:r>
+            </a:p>
+          </p:txBody>
+        </p:sp>
+        <p:cxnSp>
+          <p:nvCxnSpPr>
+            <p:cNvPr id="16" name="Gerade Verbindung mit Pfeil 15">
+              <a:extLst>
+                <a:ext uri="{FF2B5EF4-FFF2-40B4-BE49-F238E27FC236}">
+                  <a16:creationId xmlns:a16="http://schemas.microsoft.com/office/drawing/2014/main" id="{AA77C15F-743B-46DE-6795-68486A777632}"/>
+                </a:ext>
+              </a:extLst>
+            </p:cNvPr>
+            <p:cNvCxnSpPr>
+              <a:cxnSpLocks/>
+              <a:stCxn id="9" idx="1"/>
+            </p:cNvCxnSpPr>
+            <p:nvPr/>
+          </p:nvCxnSpPr>
+          <p:spPr bwMode="auto">
+            <a:xfrm flipH="1" flipV="1">
+              <a:off x="4265053" y="4169738"/>
+              <a:ext cx="450963" cy="207261"/>
+            </a:xfrm>
+            <a:prstGeom prst="straightConnector1">
+              <a:avLst/>
+            </a:prstGeom>
+            <a:ln>
+              <a:tailEnd type="triangle"/>
+            </a:ln>
+            <a:extLst>
+              <a:ext uri="{909E8E84-426E-40dd-AFC4-6F175D3DCCD1}">
+                <a14:hiddenFill xmlns="" xmlns:a14="http://schemas.microsoft.com/office/drawing/2010/main">
+                  <a:solidFill>
+                    <a:schemeClr val="accent1"/>
+                  </a:solidFill>
+                </a14:hiddenFill>
+              </a:ext>
+              <a:ext uri="{91240B29-F687-4f45-9708-019B960494DF}">
+                <a14:hiddenLine xmlns="" xmlns:a14="http://schemas.microsoft.com/office/drawing/2010/main" w="9525" cap="flat" cmpd="sng" algn="ctr">
+                  <a:solidFill>
+                    <a:schemeClr val="tx1"/>
+                  </a:solidFill>
+                  <a:prstDash val="solid"/>
+                  <a:round/>
+                  <a:headEnd type="none" w="med" len="med"/>
+                  <a:tailEnd type="none" w="med" len="med"/>
+                </a14:hiddenLine>
+              </a:ext>
+              <a:ext uri="{AF507438-7753-43e0-B8FC-AC1667EBCBE1}">
+                <a14:hiddenEffects xmlns="" xmlns:a14="http://schemas.microsoft.com/office/drawing/2010/main">
+                  <a:effectLst>
+                    <a:outerShdw dist="35921" dir="2700000" algn="ctr" rotWithShape="0">
+                      <a:schemeClr val="bg2"/>
+                    </a:outerShdw>
+                  </a:effectLst>
+                </a14:hiddenEffects>
+              </a:ext>
+            </a:extLst>
+          </p:spPr>
+          <p:style>
+            <a:lnRef idx="1">
+              <a:schemeClr val="dk1"/>
+            </a:lnRef>
+            <a:fillRef idx="0">
+              <a:schemeClr val="dk1"/>
+            </a:fillRef>
+            <a:effectRef idx="0">
+              <a:schemeClr val="dk1"/>
+            </a:effectRef>
+            <a:fontRef idx="minor">
+              <a:schemeClr val="tx1"/>
+            </a:fontRef>
+          </p:style>
+        </p:cxnSp>
+      </p:grpSp>
+      <mc:AlternateContent xmlns:mc="http://schemas.openxmlformats.org/markup-compatibility/2006">
+        <mc:Choice xmlns:a14="http://schemas.microsoft.com/office/drawing/2010/main" Requires="a14">
           <p:sp>
             <p:nvSpPr>
               <p:cNvPr id="20" name="Textfeld 19">
@@ -3360,7 +4206,7 @@
             <p:spPr>
               <a:xfrm>
                 <a:off x="2103376" y="3507008"/>
-                <a:ext cx="4572000" cy="618246"/>
+                <a:ext cx="4572000" cy="491288"/>
               </a:xfrm>
               <a:prstGeom prst="rect">
                 <a:avLst/>
@@ -3377,111 +4223,120 @@
                   <a:buNone/>
                 </a:pPr>
                 <a14:m>
-                  <m:oMathPara xmlns:m="http://schemas.openxmlformats.org/officeDocument/2006/math">
-                    <m:oMathParaPr>
-                      <m:jc m:val="centerGroup"/>
-                    </m:oMathParaPr>
-                    <m:oMath xmlns:m="http://schemas.openxmlformats.org/officeDocument/2006/math">
-                      <m:acc>
-                        <m:accPr>
-                          <m:chr m:val="̇"/>
-                          <m:ctrlPr>
-                            <a:rPr lang="en-US" i="1" noProof="0" smtClean="0">
-                              <a:latin typeface="Cambria Math" panose="02040503050406030204" pitchFamily="18" charset="0"/>
-                            </a:rPr>
-                          </m:ctrlPr>
-                        </m:accPr>
-                        <m:e>
-                          <m:r>
-                            <a:rPr lang="en-US" b="0" i="1" noProof="0" smtClean="0">
-                              <a:latin typeface="Cambria Math" panose="02040503050406030204" pitchFamily="18" charset="0"/>
-                            </a:rPr>
-                            <m:t>𝑥</m:t>
-                          </m:r>
-                        </m:e>
-                      </m:acc>
-                      <m:r>
-                        <a:rPr lang="en-US" b="0" i="1" noProof="0" smtClean="0">
-                          <a:latin typeface="Cambria Math" panose="02040503050406030204" pitchFamily="18" charset="0"/>
-                        </a:rPr>
-                        <m:t>(</m:t>
-                      </m:r>
-                      <m:r>
-                        <a:rPr lang="en-US" b="0" i="1" noProof="0" smtClean="0">
-                          <a:latin typeface="Cambria Math" panose="02040503050406030204" pitchFamily="18" charset="0"/>
-                        </a:rPr>
-                        <m:t>𝑡</m:t>
-                      </m:r>
-                      <m:r>
-                        <a:rPr lang="en-US" b="0" i="1" noProof="0" smtClean="0">
-                          <a:latin typeface="Cambria Math" panose="02040503050406030204" pitchFamily="18" charset="0"/>
-                        </a:rPr>
-                        <m:t>)= </m:t>
-                      </m:r>
-                      <m:f>
-                        <m:fPr>
-                          <m:ctrlPr>
-                            <a:rPr lang="en-US" b="0" i="1" noProof="0" smtClean="0">
-                              <a:latin typeface="Cambria Math" panose="02040503050406030204" pitchFamily="18" charset="0"/>
-                            </a:rPr>
-                          </m:ctrlPr>
-                        </m:fPr>
-                        <m:num>
-                          <m:r>
-                            <a:rPr lang="en-US" b="0" i="1" noProof="0" smtClean="0">
-                              <a:latin typeface="Cambria Math" panose="02040503050406030204" pitchFamily="18" charset="0"/>
-                            </a:rPr>
-                            <m:t>𝑑</m:t>
-                          </m:r>
-                        </m:num>
-                        <m:den>
-                          <m:r>
-                            <a:rPr lang="en-US" b="0" i="1" noProof="0" smtClean="0">
-                              <a:latin typeface="Cambria Math" panose="02040503050406030204" pitchFamily="18" charset="0"/>
-                            </a:rPr>
-                            <m:t>𝑑𝑡</m:t>
-                          </m:r>
-                        </m:den>
-                      </m:f>
-                      <m:r>
-                        <m:rPr>
-                          <m:sty m:val="p"/>
-                        </m:rPr>
-                        <a:rPr lang="en-US" b="0" i="0" noProof="0" smtClean="0">
-                          <a:latin typeface="Cambria Math" panose="02040503050406030204" pitchFamily="18" charset="0"/>
-                        </a:rPr>
-                        <m:t>x</m:t>
-                      </m:r>
-                      <m:r>
-                        <a:rPr lang="en-US" b="0" i="0" noProof="0" smtClean="0">
-                          <a:latin typeface="Cambria Math" panose="02040503050406030204" pitchFamily="18" charset="0"/>
-                        </a:rPr>
-                        <m:t>(</m:t>
-                      </m:r>
-                      <m:r>
-                        <m:rPr>
-                          <m:sty m:val="p"/>
-                        </m:rPr>
-                        <a:rPr lang="en-US" b="0" i="0" noProof="0" smtClean="0">
-                          <a:latin typeface="Cambria Math" panose="02040503050406030204" pitchFamily="18" charset="0"/>
-                        </a:rPr>
-                        <m:t>t</m:t>
-                      </m:r>
-                      <m:r>
-                        <a:rPr lang="en-US" b="0" i="0" noProof="0" smtClean="0">
-                          <a:latin typeface="Cambria Math" panose="02040503050406030204" pitchFamily="18" charset="0"/>
-                        </a:rPr>
-                        <m:t>)</m:t>
-                      </m:r>
-                    </m:oMath>
-                  </m:oMathPara>
+                  <m:oMath xmlns:m="http://schemas.openxmlformats.org/officeDocument/2006/math">
+                    <m:f>
+                      <m:fPr>
+                        <m:ctrlPr>
+                          <a:rPr lang="en-US" b="0" i="1" noProof="0" smtClean="0">
+                            <a:latin typeface="Cambria Math" panose="02040503050406030204" pitchFamily="18" charset="0"/>
+                          </a:rPr>
+                        </m:ctrlPr>
+                      </m:fPr>
+                      <m:num>
+                        <m:r>
+                          <a:rPr lang="en-US" b="0" i="1" noProof="0" smtClean="0">
+                            <a:latin typeface="Cambria Math" panose="02040503050406030204" pitchFamily="18" charset="0"/>
+                          </a:rPr>
+                          <m:t>𝑑</m:t>
+                        </m:r>
+                      </m:num>
+                      <m:den>
+                        <m:r>
+                          <a:rPr lang="en-US" b="0" i="1" noProof="0" smtClean="0">
+                            <a:latin typeface="Cambria Math" panose="02040503050406030204" pitchFamily="18" charset="0"/>
+                          </a:rPr>
+                          <m:t>𝑑𝑡</m:t>
+                        </m:r>
+                      </m:den>
+                    </m:f>
+                    <m:r>
+                      <m:rPr>
+                        <m:sty m:val="p"/>
+                      </m:rPr>
+                      <a:rPr lang="en-US" b="0" i="0" noProof="0" smtClean="0">
+                        <a:latin typeface="Cambria Math" panose="02040503050406030204" pitchFamily="18" charset="0"/>
+                      </a:rPr>
+                      <m:t>x</m:t>
+                    </m:r>
+                    <m:r>
+                      <a:rPr lang="en-US" b="0" i="0" noProof="0" smtClean="0">
+                        <a:latin typeface="Cambria Math" panose="02040503050406030204" pitchFamily="18" charset="0"/>
+                      </a:rPr>
+                      <m:t>(</m:t>
+                    </m:r>
+                    <m:r>
+                      <m:rPr>
+                        <m:sty m:val="p"/>
+                      </m:rPr>
+                      <a:rPr lang="en-US" b="0" i="0" noProof="0" smtClean="0">
+                        <a:latin typeface="Cambria Math" panose="02040503050406030204" pitchFamily="18" charset="0"/>
+                      </a:rPr>
+                      <m:t>t</m:t>
+                    </m:r>
+                    <m:r>
+                      <a:rPr lang="en-US" b="0" i="0" noProof="0" smtClean="0">
+                        <a:latin typeface="Cambria Math" panose="02040503050406030204" pitchFamily="18" charset="0"/>
+                      </a:rPr>
+                      <m:t>)</m:t>
+                    </m:r>
+                  </m:oMath>
+                </a14:m>
+                <a:r>
+                  <a:rPr lang="en-US" dirty="0"/>
+                  <a:t> </a:t>
+                </a:r>
+                <a14:m>
+                  <m:oMath xmlns:m="http://schemas.openxmlformats.org/officeDocument/2006/math">
+                    <m:r>
+                      <a:rPr lang="de-DE" b="0" i="0" smtClean="0">
+                        <a:latin typeface="Cambria Math" panose="02040503050406030204" pitchFamily="18" charset="0"/>
+                      </a:rPr>
+                      <m:t>=</m:t>
+                    </m:r>
+                    <m:acc>
+                      <m:accPr>
+                        <m:chr m:val="̇"/>
+                        <m:ctrlPr>
+                          <a:rPr lang="en-US" i="1">
+                            <a:latin typeface="Cambria Math" panose="02040503050406030204" pitchFamily="18" charset="0"/>
+                          </a:rPr>
+                        </m:ctrlPr>
+                      </m:accPr>
+                      <m:e>
+                        <m:r>
+                          <a:rPr lang="en-US" i="1">
+                            <a:latin typeface="Cambria Math" panose="02040503050406030204" pitchFamily="18" charset="0"/>
+                          </a:rPr>
+                          <m:t>𝑥</m:t>
+                        </m:r>
+                      </m:e>
+                    </m:acc>
+                    <m:r>
+                      <a:rPr lang="en-US" i="1">
+                        <a:latin typeface="Cambria Math" panose="02040503050406030204" pitchFamily="18" charset="0"/>
+                      </a:rPr>
+                      <m:t>(</m:t>
+                    </m:r>
+                    <m:r>
+                      <a:rPr lang="en-US" i="1">
+                        <a:latin typeface="Cambria Math" panose="02040503050406030204" pitchFamily="18" charset="0"/>
+                      </a:rPr>
+                      <m:t>𝑡</m:t>
+                    </m:r>
+                    <m:r>
+                      <a:rPr lang="en-US" i="1">
+                        <a:latin typeface="Cambria Math" panose="02040503050406030204" pitchFamily="18" charset="0"/>
+                      </a:rPr>
+                      <m:t>)</m:t>
+                    </m:r>
+                  </m:oMath>
                 </a14:m>
                 <a:endParaRPr lang="en-US" noProof="0" dirty="0"/>
               </a:p>
             </p:txBody>
           </p:sp>
         </mc:Choice>
-        <mc:Fallback xmlns="">
+        <mc:Fallback>
           <p:sp>
             <p:nvSpPr>
               <p:cNvPr id="20" name="Textfeld 19">
@@ -3499,7 +4354,7 @@
             <p:spPr>
               <a:xfrm>
                 <a:off x="2103376" y="3507008"/>
-                <a:ext cx="4572000" cy="618246"/>
+                <a:ext cx="4572000" cy="491288"/>
               </a:xfrm>
               <a:prstGeom prst="rect">
                 <a:avLst/>
@@ -3507,7 +4362,7 @@
               <a:blipFill>
                 <a:blip r:embed="rId3"/>
                 <a:stretch>
-                  <a:fillRect/>
+                  <a:fillRect b="-2469"/>
                 </a:stretch>
               </a:blipFill>
             </p:spPr>
@@ -5441,14 +6296,14 @@
           <a:effectLst/>
           <a:extLst>
             <a:ext uri="{909E8E84-426E-40dd-AFC4-6F175D3DCCD1}">
-              <a14:hiddenFill xmlns:a14="http://schemas.microsoft.com/office/drawing/2010/main" xmlns="">
+              <a14:hiddenFill xmlns="" xmlns:a14="http://schemas.microsoft.com/office/drawing/2010/main">
                 <a:solidFill>
                   <a:schemeClr val="accent1"/>
                 </a:solidFill>
               </a14:hiddenFill>
             </a:ext>
             <a:ext uri="{91240B29-F687-4f45-9708-019B960494DF}">
-              <a14:hiddenLine xmlns:a14="http://schemas.microsoft.com/office/drawing/2010/main" xmlns="" w="9525" cap="flat" cmpd="sng" algn="ctr">
+              <a14:hiddenLine xmlns="" xmlns:a14="http://schemas.microsoft.com/office/drawing/2010/main" w="9525" cap="flat" cmpd="sng" algn="ctr">
                 <a:solidFill>
                   <a:schemeClr val="tx1"/>
                 </a:solidFill>
@@ -5459,7 +6314,7 @@
               </a14:hiddenLine>
             </a:ext>
             <a:ext uri="{AF507438-7753-43e0-B8FC-AC1667EBCBE1}">
-              <a14:hiddenEffects xmlns:a14="http://schemas.microsoft.com/office/drawing/2010/main" xmlns="">
+              <a14:hiddenEffects xmlns="" xmlns:a14="http://schemas.microsoft.com/office/drawing/2010/main">
                 <a:effectLst>
                   <a:outerShdw dist="35921" dir="2700000" algn="ctr" rotWithShape="0">
                     <a:schemeClr val="bg2"/>
@@ -5502,14 +6357,14 @@
           <a:effectLst/>
           <a:extLst>
             <a:ext uri="{909E8E84-426E-40dd-AFC4-6F175D3DCCD1}">
-              <a14:hiddenFill xmlns:a14="http://schemas.microsoft.com/office/drawing/2010/main" xmlns="">
+              <a14:hiddenFill xmlns="" xmlns:a14="http://schemas.microsoft.com/office/drawing/2010/main">
                 <a:solidFill>
                   <a:schemeClr val="accent1"/>
                 </a:solidFill>
               </a14:hiddenFill>
             </a:ext>
             <a:ext uri="{91240B29-F687-4f45-9708-019B960494DF}">
-              <a14:hiddenLine xmlns:a14="http://schemas.microsoft.com/office/drawing/2010/main" xmlns="" w="9525" cap="flat" cmpd="sng" algn="ctr">
+              <a14:hiddenLine xmlns="" xmlns:a14="http://schemas.microsoft.com/office/drawing/2010/main" w="9525" cap="flat" cmpd="sng" algn="ctr">
                 <a:solidFill>
                   <a:schemeClr val="tx1"/>
                 </a:solidFill>
@@ -5520,7 +6375,7 @@
               </a14:hiddenLine>
             </a:ext>
             <a:ext uri="{AF507438-7753-43e0-B8FC-AC1667EBCBE1}">
-              <a14:hiddenEffects xmlns:a14="http://schemas.microsoft.com/office/drawing/2010/main" xmlns="">
+              <a14:hiddenEffects xmlns="" xmlns:a14="http://schemas.microsoft.com/office/drawing/2010/main">
                 <a:effectLst>
                   <a:outerShdw dist="35921" dir="2700000" algn="ctr" rotWithShape="0">
                     <a:schemeClr val="bg2"/>
@@ -5564,14 +6419,14 @@
           <a:effectLst/>
           <a:extLst>
             <a:ext uri="{909E8E84-426E-40dd-AFC4-6F175D3DCCD1}">
-              <a14:hiddenFill xmlns:a14="http://schemas.microsoft.com/office/drawing/2010/main" xmlns="">
+              <a14:hiddenFill xmlns="" xmlns:a14="http://schemas.microsoft.com/office/drawing/2010/main">
                 <a:solidFill>
                   <a:schemeClr val="accent1"/>
                 </a:solidFill>
               </a14:hiddenFill>
             </a:ext>
             <a:ext uri="{91240B29-F687-4f45-9708-019B960494DF}">
-              <a14:hiddenLine xmlns:a14="http://schemas.microsoft.com/office/drawing/2010/main" xmlns="" w="9525" cap="flat" cmpd="sng" algn="ctr">
+              <a14:hiddenLine xmlns="" xmlns:a14="http://schemas.microsoft.com/office/drawing/2010/main" w="9525" cap="flat" cmpd="sng" algn="ctr">
                 <a:solidFill>
                   <a:schemeClr val="tx1"/>
                 </a:solidFill>
@@ -5582,7 +6437,7 @@
               </a14:hiddenLine>
             </a:ext>
             <a:ext uri="{AF507438-7753-43e0-B8FC-AC1667EBCBE1}">
-              <a14:hiddenEffects xmlns:a14="http://schemas.microsoft.com/office/drawing/2010/main" xmlns="">
+              <a14:hiddenEffects xmlns="" xmlns:a14="http://schemas.microsoft.com/office/drawing/2010/main">
                 <a:effectLst>
                   <a:outerShdw dist="35921" dir="2700000" algn="ctr" rotWithShape="0">
                     <a:schemeClr val="bg2"/>
@@ -6138,8 +6993,8 @@
           </a:p>
         </p:txBody>
       </p:sp>
-      <mc:AlternateContent xmlns:mc="http://schemas.openxmlformats.org/markup-compatibility/2006">
-        <mc:Choice xmlns:a14="http://schemas.microsoft.com/office/drawing/2010/main" Requires="a14">
+      <mc:AlternateContent xmlns:mc="http://schemas.openxmlformats.org/markup-compatibility/2006" xmlns:a14="http://schemas.microsoft.com/office/drawing/2010/main">
+        <mc:Choice Requires="a14">
           <p:sp>
             <p:nvSpPr>
               <p:cNvPr id="3" name="Inhaltsplatzhalter 2">
@@ -6481,7 +7336,7 @@
             </p:txBody>
           </p:sp>
         </mc:Choice>
-        <mc:Fallback>
+        <mc:Fallback xmlns="">
           <p:sp>
             <p:nvSpPr>
               <p:cNvPr id="3" name="Inhaltsplatzhalter 2">
@@ -6525,8 +7380,8 @@
           </p:sp>
         </mc:Fallback>
       </mc:AlternateContent>
-      <mc:AlternateContent xmlns:mc="http://schemas.openxmlformats.org/markup-compatibility/2006">
-        <mc:Choice xmlns:a14="http://schemas.microsoft.com/office/drawing/2010/main" Requires="a14">
+      <mc:AlternateContent xmlns:mc="http://schemas.openxmlformats.org/markup-compatibility/2006" xmlns:a14="http://schemas.microsoft.com/office/drawing/2010/main">
+        <mc:Choice Requires="a14">
           <p:sp>
             <p:nvSpPr>
               <p:cNvPr id="5" name="Textfeld 4">
@@ -6893,7 +7748,7 @@
             </p:txBody>
           </p:sp>
         </mc:Choice>
-        <mc:Fallback>
+        <mc:Fallback xmlns="">
           <p:sp>
             <p:nvSpPr>
               <p:cNvPr id="5" name="Textfeld 4">
@@ -6938,8 +7793,8 @@
           </p:sp>
         </mc:Fallback>
       </mc:AlternateContent>
-      <mc:AlternateContent xmlns:mc="http://schemas.openxmlformats.org/markup-compatibility/2006">
-        <mc:Choice xmlns:a14="http://schemas.microsoft.com/office/drawing/2010/main" Requires="a14">
+      <mc:AlternateContent xmlns:mc="http://schemas.openxmlformats.org/markup-compatibility/2006" xmlns:a14="http://schemas.microsoft.com/office/drawing/2010/main">
+        <mc:Choice Requires="a14">
           <p:sp>
             <p:nvSpPr>
               <p:cNvPr id="7" name="Textfeld 6">
@@ -7524,7 +8379,7 @@
             </p:txBody>
           </p:sp>
         </mc:Choice>
-        <mc:Fallback>
+        <mc:Fallback xmlns="">
           <p:sp>
             <p:nvSpPr>
               <p:cNvPr id="7" name="Textfeld 6">
@@ -7599,8 +8454,8 @@
           <a:chExt cx="0" cy="0"/>
         </a:xfrm>
       </p:grpSpPr>
-      <mc:AlternateContent xmlns:mc="http://schemas.openxmlformats.org/markup-compatibility/2006">
-        <mc:Choice xmlns:a14="http://schemas.microsoft.com/office/drawing/2010/main" Requires="a14">
+      <mc:AlternateContent xmlns:mc="http://schemas.openxmlformats.org/markup-compatibility/2006" xmlns:a14="http://schemas.microsoft.com/office/drawing/2010/main">
+        <mc:Choice Requires="a14">
           <p:sp>
             <p:nvSpPr>
               <p:cNvPr id="2" name="Titel 1">
@@ -7687,7 +8542,7 @@
             </p:txBody>
           </p:sp>
         </mc:Choice>
-        <mc:Fallback>
+        <mc:Fallback xmlns="">
           <p:sp>
             <p:nvSpPr>
               <p:cNvPr id="2" name="Titel 1">
@@ -7785,7 +8640,15 @@
             </a:pPr>
             <a:r>
               <a:rPr lang="de-DE" dirty="0"/>
-              <a:t>Kernel </a:t>
+              <a:t>Iterative </a:t>
+            </a:r>
+            <a:r>
+              <a:rPr lang="de-DE" dirty="0" err="1"/>
+              <a:t>kernel</a:t>
+            </a:r>
+            <a:r>
+              <a:rPr lang="de-DE" dirty="0"/>
+              <a:t> </a:t>
             </a:r>
             <a:r>
               <a:rPr lang="de-DE" dirty="0" err="1"/>
@@ -7878,14 +8741,14 @@
             <a:effectLst/>
             <a:extLst>
               <a:ext uri="{909E8E84-426E-40dd-AFC4-6F175D3DCCD1}">
-                <a14:hiddenFill xmlns:a14="http://schemas.microsoft.com/office/drawing/2010/main" xmlns="">
+                <a14:hiddenFill xmlns="" xmlns:a14="http://schemas.microsoft.com/office/drawing/2010/main">
                   <a:solidFill>
                     <a:schemeClr val="accent1"/>
                   </a:solidFill>
                 </a14:hiddenFill>
               </a:ext>
               <a:ext uri="{91240B29-F687-4f45-9708-019B960494DF}">
-                <a14:hiddenLine xmlns:a14="http://schemas.microsoft.com/office/drawing/2010/main" xmlns="" w="9525" cap="flat" cmpd="sng" algn="ctr">
+                <a14:hiddenLine xmlns="" xmlns:a14="http://schemas.microsoft.com/office/drawing/2010/main" w="9525" cap="flat" cmpd="sng" algn="ctr">
                   <a:solidFill>
                     <a:schemeClr val="tx1"/>
                   </a:solidFill>
@@ -7896,7 +8759,7 @@
                 </a14:hiddenLine>
               </a:ext>
               <a:ext uri="{AF507438-7753-43e0-B8FC-AC1667EBCBE1}">
-                <a14:hiddenEffects xmlns:a14="http://schemas.microsoft.com/office/drawing/2010/main" xmlns="">
+                <a14:hiddenEffects xmlns="" xmlns:a14="http://schemas.microsoft.com/office/drawing/2010/main">
                   <a:effectLst>
                     <a:outerShdw dist="35921" dir="2700000" algn="ctr" rotWithShape="0">
                       <a:schemeClr val="bg2"/>
@@ -7936,14 +8799,14 @@
             <a:effectLst/>
             <a:extLst>
               <a:ext uri="{909E8E84-426E-40dd-AFC4-6F175D3DCCD1}">
-                <a14:hiddenFill xmlns:a14="http://schemas.microsoft.com/office/drawing/2010/main" xmlns="">
+                <a14:hiddenFill xmlns="" xmlns:a14="http://schemas.microsoft.com/office/drawing/2010/main">
                   <a:solidFill>
                     <a:schemeClr val="accent1"/>
                   </a:solidFill>
                 </a14:hiddenFill>
               </a:ext>
               <a:ext uri="{91240B29-F687-4f45-9708-019B960494DF}">
-                <a14:hiddenLine xmlns:a14="http://schemas.microsoft.com/office/drawing/2010/main" xmlns="" w="9525" cap="flat" cmpd="sng" algn="ctr">
+                <a14:hiddenLine xmlns="" xmlns:a14="http://schemas.microsoft.com/office/drawing/2010/main" w="9525" cap="flat" cmpd="sng" algn="ctr">
                   <a:solidFill>
                     <a:schemeClr val="tx1"/>
                   </a:solidFill>
@@ -7954,7 +8817,7 @@
                 </a14:hiddenLine>
               </a:ext>
               <a:ext uri="{AF507438-7753-43e0-B8FC-AC1667EBCBE1}">
-                <a14:hiddenEffects xmlns:a14="http://schemas.microsoft.com/office/drawing/2010/main" xmlns="">
+                <a14:hiddenEffects xmlns="" xmlns:a14="http://schemas.microsoft.com/office/drawing/2010/main">
                   <a:effectLst>
                     <a:outerShdw dist="35921" dir="2700000" algn="ctr" rotWithShape="0">
                       <a:schemeClr val="bg2"/>
@@ -8098,14 +8961,14 @@
             <a:effectLst/>
             <a:extLst>
               <a:ext uri="{909E8E84-426E-40dd-AFC4-6F175D3DCCD1}">
-                <a14:hiddenFill xmlns:a14="http://schemas.microsoft.com/office/drawing/2010/main" xmlns="">
+                <a14:hiddenFill xmlns="" xmlns:a14="http://schemas.microsoft.com/office/drawing/2010/main">
                   <a:solidFill>
                     <a:schemeClr val="accent1"/>
                   </a:solidFill>
                 </a14:hiddenFill>
               </a:ext>
               <a:ext uri="{91240B29-F687-4f45-9708-019B960494DF}">
-                <a14:hiddenLine xmlns:a14="http://schemas.microsoft.com/office/drawing/2010/main" xmlns="" w="9525" cap="flat" cmpd="sng" algn="ctr">
+                <a14:hiddenLine xmlns="" xmlns:a14="http://schemas.microsoft.com/office/drawing/2010/main" w="9525" cap="flat" cmpd="sng" algn="ctr">
                   <a:solidFill>
                     <a:schemeClr val="tx1"/>
                   </a:solidFill>
@@ -8116,7 +8979,7 @@
                 </a14:hiddenLine>
               </a:ext>
               <a:ext uri="{AF507438-7753-43e0-B8FC-AC1667EBCBE1}">
-                <a14:hiddenEffects xmlns:a14="http://schemas.microsoft.com/office/drawing/2010/main" xmlns="">
+                <a14:hiddenEffects xmlns="" xmlns:a14="http://schemas.microsoft.com/office/drawing/2010/main">
                   <a:effectLst>
                     <a:outerShdw dist="35921" dir="2700000" algn="ctr" rotWithShape="0">
                       <a:schemeClr val="bg2"/>
@@ -8245,14 +9108,14 @@
             <a:effectLst/>
             <a:extLst>
               <a:ext uri="{909E8E84-426E-40dd-AFC4-6F175D3DCCD1}">
-                <a14:hiddenFill xmlns:a14="http://schemas.microsoft.com/office/drawing/2010/main" xmlns="">
+                <a14:hiddenFill xmlns="" xmlns:a14="http://schemas.microsoft.com/office/drawing/2010/main">
                   <a:solidFill>
                     <a:schemeClr val="accent1"/>
                   </a:solidFill>
                 </a14:hiddenFill>
               </a:ext>
               <a:ext uri="{91240B29-F687-4f45-9708-019B960494DF}">
-                <a14:hiddenLine xmlns:a14="http://schemas.microsoft.com/office/drawing/2010/main" xmlns="" w="9525" cap="flat" cmpd="sng" algn="ctr">
+                <a14:hiddenLine xmlns="" xmlns:a14="http://schemas.microsoft.com/office/drawing/2010/main" w="9525" cap="flat" cmpd="sng" algn="ctr">
                   <a:solidFill>
                     <a:schemeClr val="tx1"/>
                   </a:solidFill>
@@ -8263,7 +9126,7 @@
                 </a14:hiddenLine>
               </a:ext>
               <a:ext uri="{AF507438-7753-43e0-B8FC-AC1667EBCBE1}">
-                <a14:hiddenEffects xmlns:a14="http://schemas.microsoft.com/office/drawing/2010/main" xmlns="">
+                <a14:hiddenEffects xmlns="" xmlns:a14="http://schemas.microsoft.com/office/drawing/2010/main">
                   <a:effectLst>
                     <a:outerShdw dist="35921" dir="2700000" algn="ctr" rotWithShape="0">
                       <a:schemeClr val="bg2"/>
@@ -8303,14 +9166,14 @@
             <a:effectLst/>
             <a:extLst>
               <a:ext uri="{909E8E84-426E-40dd-AFC4-6F175D3DCCD1}">
-                <a14:hiddenFill xmlns:a14="http://schemas.microsoft.com/office/drawing/2010/main" xmlns="">
+                <a14:hiddenFill xmlns="" xmlns:a14="http://schemas.microsoft.com/office/drawing/2010/main">
                   <a:solidFill>
                     <a:schemeClr val="accent1"/>
                   </a:solidFill>
                 </a14:hiddenFill>
               </a:ext>
               <a:ext uri="{91240B29-F687-4f45-9708-019B960494DF}">
-                <a14:hiddenLine xmlns:a14="http://schemas.microsoft.com/office/drawing/2010/main" xmlns="" w="9525" cap="flat" cmpd="sng" algn="ctr">
+                <a14:hiddenLine xmlns="" xmlns:a14="http://schemas.microsoft.com/office/drawing/2010/main" w="9525" cap="flat" cmpd="sng" algn="ctr">
                   <a:solidFill>
                     <a:schemeClr val="tx1"/>
                   </a:solidFill>
@@ -8321,7 +9184,7 @@
                 </a14:hiddenLine>
               </a:ext>
               <a:ext uri="{AF507438-7753-43e0-B8FC-AC1667EBCBE1}">
-                <a14:hiddenEffects xmlns:a14="http://schemas.microsoft.com/office/drawing/2010/main" xmlns="">
+                <a14:hiddenEffects xmlns="" xmlns:a14="http://schemas.microsoft.com/office/drawing/2010/main">
                   <a:effectLst>
                     <a:outerShdw dist="35921" dir="2700000" algn="ctr" rotWithShape="0">
                       <a:schemeClr val="bg2"/>
@@ -8399,14 +9262,14 @@
             <a:effectLst/>
             <a:extLst>
               <a:ext uri="{909E8E84-426E-40dd-AFC4-6F175D3DCCD1}">
-                <a14:hiddenFill xmlns:a14="http://schemas.microsoft.com/office/drawing/2010/main" xmlns="">
+                <a14:hiddenFill xmlns="" xmlns:a14="http://schemas.microsoft.com/office/drawing/2010/main">
                   <a:solidFill>
                     <a:schemeClr val="accent1"/>
                   </a:solidFill>
                 </a14:hiddenFill>
               </a:ext>
               <a:ext uri="{91240B29-F687-4f45-9708-019B960494DF}">
-                <a14:hiddenLine xmlns:a14="http://schemas.microsoft.com/office/drawing/2010/main" xmlns="" w="9525" cap="flat" cmpd="sng" algn="ctr">
+                <a14:hiddenLine xmlns="" xmlns:a14="http://schemas.microsoft.com/office/drawing/2010/main" w="9525" cap="flat" cmpd="sng" algn="ctr">
                   <a:solidFill>
                     <a:schemeClr val="tx1"/>
                   </a:solidFill>
@@ -8417,7 +9280,7 @@
                 </a14:hiddenLine>
               </a:ext>
               <a:ext uri="{AF507438-7753-43e0-B8FC-AC1667EBCBE1}">
-                <a14:hiddenEffects xmlns:a14="http://schemas.microsoft.com/office/drawing/2010/main" xmlns="">
+                <a14:hiddenEffects xmlns="" xmlns:a14="http://schemas.microsoft.com/office/drawing/2010/main">
                   <a:effectLst>
                     <a:outerShdw dist="35921" dir="2700000" algn="ctr" rotWithShape="0">
                       <a:schemeClr val="bg2"/>
@@ -8465,8 +9328,8 @@
           </a:p>
         </p:txBody>
       </p:sp>
-      <mc:AlternateContent xmlns:mc="http://schemas.openxmlformats.org/markup-compatibility/2006">
-        <mc:Choice xmlns:a14="http://schemas.microsoft.com/office/drawing/2010/main" Requires="a14">
+      <mc:AlternateContent xmlns:mc="http://schemas.openxmlformats.org/markup-compatibility/2006" xmlns:a14="http://schemas.microsoft.com/office/drawing/2010/main">
+        <mc:Choice Requires="a14">
           <p:sp>
             <p:nvSpPr>
               <p:cNvPr id="27" name="Textfeld 26">
@@ -8495,6 +9358,7 @@
               </a:bodyPr>
               <a:lstStyle/>
               <a:p>
+                <a:pPr/>
                 <a14:m>
                   <m:oMathPara xmlns:m="http://schemas.openxmlformats.org/officeDocument/2006/math">
                     <m:oMathParaPr>
@@ -8674,7 +9538,7 @@
             </p:txBody>
           </p:sp>
         </mc:Choice>
-        <mc:Fallback>
+        <mc:Fallback xmlns="">
           <p:sp>
             <p:nvSpPr>
               <p:cNvPr id="27" name="Textfeld 26">
@@ -8748,14 +9612,14 @@
           <a:effectLst/>
           <a:extLst>
             <a:ext uri="{909E8E84-426E-40dd-AFC4-6F175D3DCCD1}">
-              <a14:hiddenFill xmlns:a14="http://schemas.microsoft.com/office/drawing/2010/main" xmlns="">
+              <a14:hiddenFill xmlns="" xmlns:a14="http://schemas.microsoft.com/office/drawing/2010/main">
                 <a:solidFill>
                   <a:schemeClr val="accent1"/>
                 </a:solidFill>
               </a14:hiddenFill>
             </a:ext>
             <a:ext uri="{91240B29-F687-4f45-9708-019B960494DF}">
-              <a14:hiddenLine xmlns:a14="http://schemas.microsoft.com/office/drawing/2010/main" xmlns="" w="9525" cap="flat" cmpd="sng" algn="ctr">
+              <a14:hiddenLine xmlns="" xmlns:a14="http://schemas.microsoft.com/office/drawing/2010/main" w="9525" cap="flat" cmpd="sng" algn="ctr">
                 <a:solidFill>
                   <a:schemeClr val="tx1"/>
                 </a:solidFill>
@@ -8766,7 +9630,7 @@
               </a14:hiddenLine>
             </a:ext>
             <a:ext uri="{AF507438-7753-43e0-B8FC-AC1667EBCBE1}">
-              <a14:hiddenEffects xmlns:a14="http://schemas.microsoft.com/office/drawing/2010/main" xmlns="">
+              <a14:hiddenEffects xmlns="" xmlns:a14="http://schemas.microsoft.com/office/drawing/2010/main">
                 <a:effectLst>
                   <a:outerShdw dist="35921" dir="2700000" algn="ctr" rotWithShape="0">
                     <a:schemeClr val="bg2"/>
@@ -8842,14 +9706,14 @@
           <a:effectLst/>
           <a:extLst>
             <a:ext uri="{909E8E84-426E-40dd-AFC4-6F175D3DCCD1}">
-              <a14:hiddenFill xmlns:a14="http://schemas.microsoft.com/office/drawing/2010/main" xmlns="">
+              <a14:hiddenFill xmlns="" xmlns:a14="http://schemas.microsoft.com/office/drawing/2010/main">
                 <a:solidFill>
                   <a:schemeClr val="accent1"/>
                 </a:solidFill>
               </a14:hiddenFill>
             </a:ext>
             <a:ext uri="{91240B29-F687-4f45-9708-019B960494DF}">
-              <a14:hiddenLine xmlns:a14="http://schemas.microsoft.com/office/drawing/2010/main" xmlns="" w="9525" cap="flat" cmpd="sng" algn="ctr">
+              <a14:hiddenLine xmlns="" xmlns:a14="http://schemas.microsoft.com/office/drawing/2010/main" w="9525" cap="flat" cmpd="sng" algn="ctr">
                 <a:solidFill>
                   <a:schemeClr val="tx1"/>
                 </a:solidFill>
@@ -8860,7 +9724,7 @@
               </a14:hiddenLine>
             </a:ext>
             <a:ext uri="{AF507438-7753-43e0-B8FC-AC1667EBCBE1}">
-              <a14:hiddenEffects xmlns:a14="http://schemas.microsoft.com/office/drawing/2010/main" xmlns="">
+              <a14:hiddenEffects xmlns="" xmlns:a14="http://schemas.microsoft.com/office/drawing/2010/main">
                 <a:effectLst>
                   <a:outerShdw dist="35921" dir="2700000" algn="ctr" rotWithShape="0">
                     <a:schemeClr val="bg2"/>
@@ -8939,7 +9803,13 @@
       </p:grpSpPr>
       <p:sp>
         <p:nvSpPr>
-          <p:cNvPr id="2" name="Titel 1"/>
+          <p:cNvPr id="2" name="Titel 1">
+            <a:extLst>
+              <a:ext uri="{FF2B5EF4-FFF2-40B4-BE49-F238E27FC236}">
+                <a16:creationId xmlns:a16="http://schemas.microsoft.com/office/drawing/2014/main" id="{B1C5CC3C-43AF-675D-5307-BE7594BDBBFD}"/>
+              </a:ext>
+            </a:extLst>
+          </p:cNvPr>
           <p:cNvSpPr>
             <a:spLocks noGrp="1"/>
           </p:cNvSpPr>
@@ -8952,16 +9822,148 @@
           <a:bodyPr/>
           <a:lstStyle/>
           <a:p>
-            <a:r>
-              <a:rPr lang="en-US" noProof="0" dirty="0"/>
-              <a:t>References</a:t>
-            </a:r>
+            <a:endParaRPr lang="en-GB"/>
+          </a:p>
+        </p:txBody>
+      </p:sp>
+      <p:pic>
+        <p:nvPicPr>
+          <p:cNvPr id="5" name="Inhaltsplatzhalter 4" descr="Ein Bild, das Screenshot enthält.&#10;&#10;KI-generierte Inhalte können fehlerhaft sein.">
+            <a:extLst>
+              <a:ext uri="{FF2B5EF4-FFF2-40B4-BE49-F238E27FC236}">
+                <a16:creationId xmlns:a16="http://schemas.microsoft.com/office/drawing/2014/main" id="{39A193F6-24D6-2CD0-12D5-C417EA338875}"/>
+              </a:ext>
+            </a:extLst>
+          </p:cNvPr>
+          <p:cNvPicPr>
+            <a:picLocks noGrp="1" noChangeAspect="1"/>
+          </p:cNvPicPr>
+          <p:nvPr>
+            <p:ph idx="1"/>
+          </p:nvPr>
+        </p:nvPicPr>
+        <p:blipFill>
+          <a:blip r:embed="rId3">
+            <a:extLst>
+              <a:ext uri="{28A0092B-C50C-407E-A947-70E740481C1C}">
+                <a14:useLocalDpi xmlns:a14="http://schemas.microsoft.com/office/drawing/2010/main" val="0"/>
+              </a:ext>
+            </a:extLst>
+          </a:blip>
+          <a:srcRect l="7535" t="3770" r="1369" b="54137"/>
+          <a:stretch/>
+        </p:blipFill>
+        <p:spPr>
+          <a:xfrm>
+            <a:off x="-3996952" y="0"/>
+            <a:ext cx="13665852" cy="6884301"/>
+          </a:xfrm>
+        </p:spPr>
+      </p:pic>
+      <p:sp>
+        <p:nvSpPr>
+          <p:cNvPr id="6" name="Textfeld 5">
+            <a:extLst>
+              <a:ext uri="{FF2B5EF4-FFF2-40B4-BE49-F238E27FC236}">
+                <a16:creationId xmlns:a16="http://schemas.microsoft.com/office/drawing/2014/main" id="{BA3BE064-32E8-E1AD-3F88-00EB93EC38B9}"/>
+              </a:ext>
+            </a:extLst>
+          </p:cNvPr>
+          <p:cNvSpPr txBox="1"/>
+          <p:nvPr/>
+        </p:nvSpPr>
+        <p:spPr>
+          <a:xfrm>
+            <a:off x="8604448" y="5661248"/>
+            <a:ext cx="1296144" cy="369332"/>
+          </a:xfrm>
+          <a:prstGeom prst="rect">
+            <a:avLst/>
+          </a:prstGeom>
+          <a:noFill/>
+        </p:spPr>
+        <p:txBody>
+          <a:bodyPr wrap="square" rtlCol="0">
+            <a:spAutoFit/>
+          </a:bodyPr>
+          <a:lstStyle/>
+          <a:p>
+            <a:r>
+              <a:rPr lang="de-DE" dirty="0"/>
+              <a:t>[4]</a:t>
+            </a:r>
+            <a:endParaRPr lang="en-GB" dirty="0"/>
+          </a:p>
+        </p:txBody>
+      </p:sp>
+    </p:spTree>
+    <p:extLst>
+      <p:ext uri="{BB962C8B-B14F-4D97-AF65-F5344CB8AC3E}">
+        <p14:creationId xmlns:p14="http://schemas.microsoft.com/office/powerpoint/2010/main" val="3371186725"/>
+      </p:ext>
+    </p:extLst>
+  </p:cSld>
+  <p:clrMapOvr>
+    <a:masterClrMapping/>
+  </p:clrMapOvr>
+</p:sld>
+</file>
+
+<file path=ppt/slides/slide9.xml><?xml version="1.0" encoding="utf-8"?>
+<p:sld xmlns:a="http://schemas.openxmlformats.org/drawingml/2006/main" xmlns:r="http://schemas.openxmlformats.org/officeDocument/2006/relationships" xmlns:p="http://schemas.openxmlformats.org/presentationml/2006/main">
+  <p:cSld>
+    <p:spTree>
+      <p:nvGrpSpPr>
+        <p:cNvPr id="1" name=""/>
+        <p:cNvGrpSpPr/>
+        <p:nvPr/>
+      </p:nvGrpSpPr>
+      <p:grpSpPr>
+        <a:xfrm>
+          <a:off x="0" y="0"/>
+          <a:ext cx="0" cy="0"/>
+          <a:chOff x="0" y="0"/>
+          <a:chExt cx="0" cy="0"/>
+        </a:xfrm>
+      </p:grpSpPr>
+      <p:sp>
+        <p:nvSpPr>
+          <p:cNvPr id="2" name="Titel 1">
+            <a:extLst>
+              <a:ext uri="{FF2B5EF4-FFF2-40B4-BE49-F238E27FC236}">
+                <a16:creationId xmlns:a16="http://schemas.microsoft.com/office/drawing/2014/main" id="{5A2FFEDC-F3CD-D01F-1236-31E1BA0E993F}"/>
+              </a:ext>
+            </a:extLst>
+          </p:cNvPr>
+          <p:cNvSpPr>
+            <a:spLocks noGrp="1"/>
+          </p:cNvSpPr>
+          <p:nvPr>
+            <p:ph type="title"/>
+          </p:nvPr>
+        </p:nvSpPr>
+        <p:spPr/>
+        <p:txBody>
+          <a:bodyPr/>
+          <a:lstStyle/>
+          <a:p>
+            <a:r>
+              <a:rPr lang="de-DE" dirty="0" err="1"/>
+              <a:t>Architectures</a:t>
+            </a:r>
+            <a:endParaRPr lang="en-GB" dirty="0"/>
           </a:p>
         </p:txBody>
       </p:sp>
       <p:sp>
         <p:nvSpPr>
-          <p:cNvPr id="3" name="Inhaltsplatzhalter 2"/>
+          <p:cNvPr id="3" name="Inhaltsplatzhalter 2">
+            <a:extLst>
+              <a:ext uri="{FF2B5EF4-FFF2-40B4-BE49-F238E27FC236}">
+                <a16:creationId xmlns:a16="http://schemas.microsoft.com/office/drawing/2014/main" id="{F9AF2C14-932E-3C3A-EFC5-A96C7F1E16BA}"/>
+              </a:ext>
+            </a:extLst>
+          </p:cNvPr>
           <p:cNvSpPr>
             <a:spLocks noGrp="1"/>
           </p:cNvSpPr>
@@ -8969,12 +9971,7 @@
             <p:ph idx="1"/>
           </p:nvPr>
         </p:nvSpPr>
-        <p:spPr>
-          <a:xfrm>
-            <a:off x="466725" y="836712"/>
-            <a:ext cx="8208000" cy="5184677"/>
-          </a:xfrm>
-        </p:spPr>
+        <p:spPr/>
         <p:txBody>
           <a:bodyPr/>
           <a:lstStyle/>
@@ -8983,153 +9980,96 @@
               <a:buNone/>
             </a:pPr>
             <a:r>
-              <a:rPr lang="en-US" noProof="0" dirty="0">
-                <a:latin typeface="Frutiger LT Com 45 Light"/>
-              </a:rPr>
-              <a:t>[0] 	</a:t>
-            </a:r>
+              <a:rPr lang="en-US" b="1" noProof="0" dirty="0"/>
+              <a:t>Layers</a:t>
+            </a:r>
+          </a:p>
+          <a:p>
             <a:r>
               <a:rPr lang="en-US" noProof="0" dirty="0"/>
-              <a:t>N. B. </a:t>
-            </a:r>
-            <a:r>
-              <a:rPr lang="en-US" noProof="0" dirty="0" err="1"/>
-              <a:t>Kovachki</a:t>
-            </a:r>
+              <a:t>Fourier Neural Operator (FNO) [0]</a:t>
+            </a:r>
+          </a:p>
+          <a:p>
             <a:r>
               <a:rPr lang="en-US" noProof="0" dirty="0"/>
-              <a:t>, Z. Li, B. Liu, K. </a:t>
-            </a:r>
-            <a:r>
-              <a:rPr lang="en-US" noProof="0" dirty="0" err="1"/>
-              <a:t>Azizzadenesheli</a:t>
-            </a:r>
+              <a:t>Low-rank Neural Operator (LNO) [0]</a:t>
+            </a:r>
+          </a:p>
+          <a:p>
             <a:r>
               <a:rPr lang="en-US" noProof="0" dirty="0"/>
-              <a:t>, K. Bhattacharya, A. M. Stuart, A. 	</a:t>
-            </a:r>
-            <a:r>
-              <a:rPr lang="en-US" noProof="0" dirty="0" err="1"/>
-              <a:t>Anandkumar</a:t>
-            </a:r>
-            <a:r>
-              <a:rPr lang="en-US" noProof="0" dirty="0"/>
-              <a:t>: Neural Operator: Learning Maps Between Function Spaces. </a:t>
-            </a:r>
-            <a:r>
-              <a:rPr lang="en-US" noProof="0" dirty="0" err="1"/>
-              <a:t>CoRR</a:t>
-            </a:r>
-            <a:r>
-              <a:rPr lang="en-US" noProof="0" dirty="0"/>
-              <a:t> 	abs/2108.08481. 2021.</a:t>
-            </a:r>
-            <a:endParaRPr lang="en-US" noProof="0" dirty="0">
-              <a:latin typeface="Frutiger LT Com 45 Light"/>
-            </a:endParaRPr>
+              <a:t>(Multipole) Graph Neural Operator (GNO) [0]</a:t>
+            </a:r>
+          </a:p>
+          <a:p>
+            <a:endParaRPr lang="en-US" noProof="0" dirty="0"/>
           </a:p>
           <a:p>
             <a:pPr marL="0" indent="0">
               <a:buNone/>
             </a:pPr>
             <a:r>
-              <a:rPr lang="en-US" noProof="0" dirty="0">
-                <a:latin typeface="Frutiger LT Com 45 Light"/>
-              </a:rPr>
-              <a:t>[1] 	</a:t>
-            </a:r>
-            <a:r>
-              <a:rPr lang="en-US" noProof="0" dirty="0">
-                <a:latin typeface="Frutiger LT Com 45 Light"/>
-                <a:hlinkClick r:id="rId2"/>
-              </a:rPr>
-              <a:t>Draw electric field lines without </a:t>
-            </a:r>
-            <a:r>
-              <a:rPr lang="en-US" noProof="0" dirty="0" err="1">
-                <a:latin typeface="Frutiger LT Com 45 Light"/>
-                <a:hlinkClick r:id="rId2"/>
-              </a:rPr>
-              <a:t>Mayavi</a:t>
-            </a:r>
-            <a:r>
-              <a:rPr lang="en-US" noProof="0" dirty="0">
-                <a:latin typeface="Frutiger LT Com 45 Light"/>
-                <a:hlinkClick r:id="rId2"/>
-              </a:rPr>
-              <a:t> </a:t>
-            </a:r>
-            <a:endParaRPr lang="en-US" noProof="0" dirty="0">
-              <a:latin typeface="Frutiger LT Com 45 Light"/>
-            </a:endParaRPr>
+              <a:rPr lang="en-US" b="1" noProof="0" dirty="0"/>
+              <a:t>And advanced architectures</a:t>
+            </a:r>
           </a:p>
           <a:p>
-            <a:pPr marL="0" indent="0">
-              <a:buNone/>
-            </a:pPr>
-            <a:r>
-              <a:rPr lang="en-US" dirty="0">
-                <a:latin typeface="Frutiger LT Com 45 Light"/>
-              </a:rPr>
-              <a:t>[2] </a:t>
-            </a:r>
-            <a:r>
-              <a:rPr lang="en-US" dirty="0">
-                <a:latin typeface="Frutiger LT Com 45 Light"/>
-                <a:hlinkClick r:id="rId3"/>
-              </a:rPr>
-              <a:t>Gitter (</a:t>
-            </a:r>
-            <a:r>
-              <a:rPr lang="en-US" dirty="0" err="1">
-                <a:latin typeface="Frutiger LT Com 45 Light"/>
-                <a:hlinkClick r:id="rId3"/>
-              </a:rPr>
-              <a:t>Geometrie</a:t>
-            </a:r>
-            <a:r>
-              <a:rPr lang="en-US" dirty="0">
-                <a:latin typeface="Frutiger LT Com 45 Light"/>
-                <a:hlinkClick r:id="rId3"/>
-              </a:rPr>
-              <a:t>)</a:t>
-            </a:r>
-            <a:endParaRPr lang="en-US" dirty="0">
-              <a:latin typeface="Frutiger LT Com 45 Light"/>
-            </a:endParaRPr>
+            <a:r>
+              <a:rPr lang="en-US" noProof="0" dirty="0"/>
+              <a:t>Adaptive </a:t>
+            </a:r>
+            <a:r>
+              <a:rPr lang="en-US" dirty="0"/>
+              <a:t>Fourier Neural vision transformer [4]</a:t>
+            </a:r>
           </a:p>
           <a:p>
-            <a:pPr marL="0" indent="0">
-              <a:buNone/>
-            </a:pPr>
-            <a:r>
-              <a:rPr lang="en-US" noProof="0" dirty="0">
-                <a:latin typeface="Frutiger LT Com 45 Light"/>
-              </a:rPr>
-              <a:t>[3] </a:t>
-            </a:r>
-            <a:r>
-              <a:rPr lang="en-US" noProof="0" dirty="0">
-                <a:latin typeface="Frutiger LT Com 45 Light"/>
-                <a:hlinkClick r:id="rId4"/>
-              </a:rPr>
-              <a:t>Tesseract </a:t>
-            </a:r>
-            <a:r>
-              <a:rPr lang="en-US" noProof="0" dirty="0" err="1">
-                <a:latin typeface="Frutiger LT Com 45 Light"/>
-                <a:hlinkClick r:id="rId4"/>
-              </a:rPr>
-              <a:t>MathWorld</a:t>
-            </a:r>
-            <a:endParaRPr lang="en-US" noProof="0" dirty="0"/>
+            <a:r>
+              <a:rPr lang="en-US" noProof="0" dirty="0"/>
+              <a:t>Physics </a:t>
+            </a:r>
+            <a:r>
+              <a:rPr lang="en-US" dirty="0"/>
+              <a:t>I</a:t>
+            </a:r>
+            <a:r>
+              <a:rPr lang="en-US" noProof="0" dirty="0" err="1"/>
+              <a:t>nformed</a:t>
+            </a:r>
+            <a:r>
+              <a:rPr lang="en-US" dirty="0"/>
+              <a:t> Neural Operator [5]</a:t>
+            </a:r>
+          </a:p>
+          <a:p>
+            <a:r>
+              <a:rPr lang="en-US" dirty="0"/>
+              <a:t>Message Passing Neural Operator [6]</a:t>
+            </a:r>
+          </a:p>
+          <a:p>
+            <a:r>
+              <a:rPr lang="en-US" noProof="0" dirty="0"/>
+              <a:t>Universal transformer Neural</a:t>
+            </a:r>
+            <a:r>
+              <a:rPr lang="en-US" dirty="0"/>
+              <a:t> Operator [7]</a:t>
+            </a:r>
+          </a:p>
+          <a:p>
+            <a:r>
+              <a:rPr lang="en-US" noProof="0" dirty="0"/>
+              <a:t>Geometry Informed Neural Operator [8]</a:t>
+            </a:r>
           </a:p>
         </p:txBody>
       </p:sp>
     </p:spTree>
     <p:extLst>
       <p:ext uri="{BB962C8B-B14F-4D97-AF65-F5344CB8AC3E}">
-        <p14:creationId xmlns:p14="http://schemas.microsoft.com/office/powerpoint/2010/main" val="830681217"/>
+        <p14:creationId xmlns:p14="http://schemas.microsoft.com/office/powerpoint/2010/main" val="2177423394"/>
       </p:ext>
     </p:extLst>
   </p:cSld>
@@ -9381,14 +10321,14 @@
         <a:effectLst/>
         <a:extLst>
           <a:ext uri="{909E8E84-426E-40dd-AFC4-6F175D3DCCD1}">
-            <a14:hiddenFill xmlns="" xmlns:a14="http://schemas.microsoft.com/office/drawing/2010/main">
+            <a14:hiddenFill xmlns:a14="http://schemas.microsoft.com/office/drawing/2010/main" xmlns="">
               <a:solidFill>
                 <a:schemeClr val="accent1"/>
               </a:solidFill>
             </a14:hiddenFill>
           </a:ext>
           <a:ext uri="{91240B29-F687-4f45-9708-019B960494DF}">
-            <a14:hiddenLine xmlns="" xmlns:a14="http://schemas.microsoft.com/office/drawing/2010/main" w="9525" cap="flat" cmpd="sng" algn="ctr">
+            <a14:hiddenLine xmlns:a14="http://schemas.microsoft.com/office/drawing/2010/main" xmlns="" w="9525" cap="flat" cmpd="sng" algn="ctr">
               <a:solidFill>
                 <a:schemeClr val="tx1"/>
               </a:solidFill>
@@ -9399,7 +10339,7 @@
             </a14:hiddenLine>
           </a:ext>
           <a:ext uri="{AF507438-7753-43e0-B8FC-AC1667EBCBE1}">
-            <a14:hiddenEffects xmlns="" xmlns:a14="http://schemas.microsoft.com/office/drawing/2010/main">
+            <a14:hiddenEffects xmlns:a14="http://schemas.microsoft.com/office/drawing/2010/main" xmlns="">
               <a:effectLst>
                 <a:outerShdw dist="35921" dir="2700000" algn="ctr" rotWithShape="0">
                   <a:schemeClr val="bg2"/>
@@ -9464,14 +10404,14 @@
         <a:effectLst/>
         <a:extLst>
           <a:ext uri="{909E8E84-426E-40dd-AFC4-6F175D3DCCD1}">
-            <a14:hiddenFill xmlns="" xmlns:a14="http://schemas.microsoft.com/office/drawing/2010/main">
+            <a14:hiddenFill xmlns:a14="http://schemas.microsoft.com/office/drawing/2010/main" xmlns="">
               <a:solidFill>
                 <a:schemeClr val="accent1"/>
               </a:solidFill>
             </a14:hiddenFill>
           </a:ext>
           <a:ext uri="{91240B29-F687-4f45-9708-019B960494DF}">
-            <a14:hiddenLine xmlns="" xmlns:a14="http://schemas.microsoft.com/office/drawing/2010/main" w="9525" cap="flat" cmpd="sng" algn="ctr">
+            <a14:hiddenLine xmlns:a14="http://schemas.microsoft.com/office/drawing/2010/main" xmlns="" w="9525" cap="flat" cmpd="sng" algn="ctr">
               <a:solidFill>
                 <a:schemeClr val="tx1"/>
               </a:solidFill>
@@ -9482,7 +10422,7 @@
             </a14:hiddenLine>
           </a:ext>
           <a:ext uri="{AF507438-7753-43e0-B8FC-AC1667EBCBE1}">
-            <a14:hiddenEffects xmlns="" xmlns:a14="http://schemas.microsoft.com/office/drawing/2010/main">
+            <a14:hiddenEffects xmlns:a14="http://schemas.microsoft.com/office/drawing/2010/main" xmlns="">
               <a:effectLst>
                 <a:outerShdw dist="35921" dir="2700000" algn="ctr" rotWithShape="0">
                   <a:schemeClr val="bg2"/>
